--- a/RadAssistIQ_DenseNet121CNN_LLM/documentation/x23396920-presentation.pptx
+++ b/RadAssistIQ_DenseNet121CNN_LLM/documentation/x23396920-presentation.pptx
@@ -4,11 +4,18 @@
   <p:sldMasterIdLst>
     <p:sldMasterId id="2147483648" r:id="rId1"/>
   </p:sldMasterIdLst>
+  <p:notesMasterIdLst>
+    <p:notesMasterId r:id="rId10"/>
+  </p:notesMasterIdLst>
   <p:sldIdLst>
     <p:sldId id="256" r:id="rId2"/>
-    <p:sldId id="258" r:id="rId3"/>
-    <p:sldId id="259" r:id="rId4"/>
-    <p:sldId id="260" r:id="rId5"/>
+    <p:sldId id="259" r:id="rId3"/>
+    <p:sldId id="262" r:id="rId4"/>
+    <p:sldId id="258" r:id="rId5"/>
+    <p:sldId id="260" r:id="rId6"/>
+    <p:sldId id="261" r:id="rId7"/>
+    <p:sldId id="264" r:id="rId8"/>
+    <p:sldId id="263" r:id="rId9"/>
   </p:sldIdLst>
   <p:sldSz cx="12192000" cy="6858000"/>
   <p:notesSz cx="6858000" cy="9144000"/>
@@ -107,7 +114,509 @@
       </a:defRPr>
     </a:lvl9pPr>
   </p:defaultTextStyle>
+  <p:extLst>
+    <p:ext uri="{EFAFB233-063F-42B5-8137-9DF3F51BA10A}">
+      <p15:sldGuideLst xmlns:p15="http://schemas.microsoft.com/office/powerpoint/2012/main"/>
+    </p:ext>
+  </p:extLst>
 </p:presentation>
+</file>
+
+<file path=ppt/notesMasters/notesMaster1.xml><?xml version="1.0" encoding="utf-8"?>
+<p:notesMaster xmlns:a="http://schemas.openxmlformats.org/drawingml/2006/main" xmlns:r="http://schemas.openxmlformats.org/officeDocument/2006/relationships" xmlns:p="http://schemas.openxmlformats.org/presentationml/2006/main">
+  <p:cSld>
+    <p:bg>
+      <p:bgRef idx="1001">
+        <a:schemeClr val="bg1"/>
+      </p:bgRef>
+    </p:bg>
+    <p:spTree>
+      <p:nvGrpSpPr>
+        <p:cNvPr id="1" name=""/>
+        <p:cNvGrpSpPr/>
+        <p:nvPr/>
+      </p:nvGrpSpPr>
+      <p:grpSpPr>
+        <a:xfrm>
+          <a:off x="0" y="0"/>
+          <a:ext cx="0" cy="0"/>
+          <a:chOff x="0" y="0"/>
+          <a:chExt cx="0" cy="0"/>
+        </a:xfrm>
+      </p:grpSpPr>
+      <p:sp>
+        <p:nvSpPr>
+          <p:cNvPr id="2" name="Header Placeholder 1"/>
+          <p:cNvSpPr>
+            <a:spLocks noGrp="1"/>
+          </p:cNvSpPr>
+          <p:nvPr>
+            <p:ph type="hdr" sz="quarter"/>
+          </p:nvPr>
+        </p:nvSpPr>
+        <p:spPr>
+          <a:xfrm>
+            <a:off x="0" y="0"/>
+            <a:ext cx="2971800" cy="458788"/>
+          </a:xfrm>
+          <a:prstGeom prst="rect">
+            <a:avLst/>
+          </a:prstGeom>
+        </p:spPr>
+        <p:txBody>
+          <a:bodyPr vert="horz" lIns="91440" tIns="45720" rIns="91440" bIns="45720" rtlCol="0"/>
+          <a:lstStyle>
+            <a:lvl1pPr algn="l">
+              <a:defRPr sz="1200"/>
+            </a:lvl1pPr>
+          </a:lstStyle>
+          <a:p>
+            <a:endParaRPr lang="en-US"/>
+          </a:p>
+        </p:txBody>
+      </p:sp>
+      <p:sp>
+        <p:nvSpPr>
+          <p:cNvPr id="3" name="Date Placeholder 2"/>
+          <p:cNvSpPr>
+            <a:spLocks noGrp="1"/>
+          </p:cNvSpPr>
+          <p:nvPr>
+            <p:ph type="dt" idx="1"/>
+          </p:nvPr>
+        </p:nvSpPr>
+        <p:spPr>
+          <a:xfrm>
+            <a:off x="3884613" y="0"/>
+            <a:ext cx="2971800" cy="458788"/>
+          </a:xfrm>
+          <a:prstGeom prst="rect">
+            <a:avLst/>
+          </a:prstGeom>
+        </p:spPr>
+        <p:txBody>
+          <a:bodyPr vert="horz" lIns="91440" tIns="45720" rIns="91440" bIns="45720" rtlCol="0"/>
+          <a:lstStyle>
+            <a:lvl1pPr algn="r">
+              <a:defRPr sz="1200"/>
+            </a:lvl1pPr>
+          </a:lstStyle>
+          <a:p>
+            <a:fld id="{102BB395-9A04-204C-BC3F-19B4F27FBD68}" type="datetimeFigureOut">
+              <a:rPr lang="en-US" smtClean="0"/>
+              <a:t>11/17/25</a:t>
+            </a:fld>
+            <a:endParaRPr lang="en-US"/>
+          </a:p>
+        </p:txBody>
+      </p:sp>
+      <p:sp>
+        <p:nvSpPr>
+          <p:cNvPr id="4" name="Slide Image Placeholder 3"/>
+          <p:cNvSpPr>
+            <a:spLocks noGrp="1" noRot="1" noChangeAspect="1"/>
+          </p:cNvSpPr>
+          <p:nvPr>
+            <p:ph type="sldImg" idx="2"/>
+          </p:nvPr>
+        </p:nvSpPr>
+        <p:spPr>
+          <a:xfrm>
+            <a:off x="685800" y="1143000"/>
+            <a:ext cx="5486400" cy="3086100"/>
+          </a:xfrm>
+          <a:prstGeom prst="rect">
+            <a:avLst/>
+          </a:prstGeom>
+          <a:noFill/>
+          <a:ln w="12700">
+            <a:solidFill>
+              <a:prstClr val="black"/>
+            </a:solidFill>
+          </a:ln>
+        </p:spPr>
+        <p:txBody>
+          <a:bodyPr vert="horz" lIns="91440" tIns="45720" rIns="91440" bIns="45720" rtlCol="0" anchor="ctr"/>
+          <a:lstStyle/>
+          <a:p>
+            <a:endParaRPr lang="en-US"/>
+          </a:p>
+        </p:txBody>
+      </p:sp>
+      <p:sp>
+        <p:nvSpPr>
+          <p:cNvPr id="5" name="Notes Placeholder 4"/>
+          <p:cNvSpPr>
+            <a:spLocks noGrp="1"/>
+          </p:cNvSpPr>
+          <p:nvPr>
+            <p:ph type="body" sz="quarter" idx="3"/>
+          </p:nvPr>
+        </p:nvSpPr>
+        <p:spPr>
+          <a:xfrm>
+            <a:off x="685800" y="4400550"/>
+            <a:ext cx="5486400" cy="3600450"/>
+          </a:xfrm>
+          <a:prstGeom prst="rect">
+            <a:avLst/>
+          </a:prstGeom>
+        </p:spPr>
+        <p:txBody>
+          <a:bodyPr vert="horz" lIns="91440" tIns="45720" rIns="91440" bIns="45720" rtlCol="0"/>
+          <a:lstStyle/>
+          <a:p>
+            <a:pPr lvl="0"/>
+            <a:r>
+              <a:rPr lang="en-GB"/>
+              <a:t>Click to edit Master text styles</a:t>
+            </a:r>
+          </a:p>
+          <a:p>
+            <a:pPr lvl="1"/>
+            <a:r>
+              <a:rPr lang="en-GB"/>
+              <a:t>Second level</a:t>
+            </a:r>
+          </a:p>
+          <a:p>
+            <a:pPr lvl="2"/>
+            <a:r>
+              <a:rPr lang="en-GB"/>
+              <a:t>Third level</a:t>
+            </a:r>
+          </a:p>
+          <a:p>
+            <a:pPr lvl="3"/>
+            <a:r>
+              <a:rPr lang="en-GB"/>
+              <a:t>Fourth level</a:t>
+            </a:r>
+          </a:p>
+          <a:p>
+            <a:pPr lvl="4"/>
+            <a:r>
+              <a:rPr lang="en-GB"/>
+              <a:t>Fifth level</a:t>
+            </a:r>
+            <a:endParaRPr lang="en-US"/>
+          </a:p>
+        </p:txBody>
+      </p:sp>
+      <p:sp>
+        <p:nvSpPr>
+          <p:cNvPr id="6" name="Footer Placeholder 5"/>
+          <p:cNvSpPr>
+            <a:spLocks noGrp="1"/>
+          </p:cNvSpPr>
+          <p:nvPr>
+            <p:ph type="ftr" sz="quarter" idx="4"/>
+          </p:nvPr>
+        </p:nvSpPr>
+        <p:spPr>
+          <a:xfrm>
+            <a:off x="0" y="8685213"/>
+            <a:ext cx="2971800" cy="458787"/>
+          </a:xfrm>
+          <a:prstGeom prst="rect">
+            <a:avLst/>
+          </a:prstGeom>
+        </p:spPr>
+        <p:txBody>
+          <a:bodyPr vert="horz" lIns="91440" tIns="45720" rIns="91440" bIns="45720" rtlCol="0" anchor="b"/>
+          <a:lstStyle>
+            <a:lvl1pPr algn="l">
+              <a:defRPr sz="1200"/>
+            </a:lvl1pPr>
+          </a:lstStyle>
+          <a:p>
+            <a:endParaRPr lang="en-US"/>
+          </a:p>
+        </p:txBody>
+      </p:sp>
+      <p:sp>
+        <p:nvSpPr>
+          <p:cNvPr id="7" name="Slide Number Placeholder 6"/>
+          <p:cNvSpPr>
+            <a:spLocks noGrp="1"/>
+          </p:cNvSpPr>
+          <p:nvPr>
+            <p:ph type="sldNum" sz="quarter" idx="5"/>
+          </p:nvPr>
+        </p:nvSpPr>
+        <p:spPr>
+          <a:xfrm>
+            <a:off x="3884613" y="8685213"/>
+            <a:ext cx="2971800" cy="458787"/>
+          </a:xfrm>
+          <a:prstGeom prst="rect">
+            <a:avLst/>
+          </a:prstGeom>
+        </p:spPr>
+        <p:txBody>
+          <a:bodyPr vert="horz" lIns="91440" tIns="45720" rIns="91440" bIns="45720" rtlCol="0" anchor="b"/>
+          <a:lstStyle>
+            <a:lvl1pPr algn="r">
+              <a:defRPr sz="1200"/>
+            </a:lvl1pPr>
+          </a:lstStyle>
+          <a:p>
+            <a:fld id="{E99BF244-69D7-024A-B6A5-545898448B30}" type="slidenum">
+              <a:rPr lang="en-US" smtClean="0"/>
+              <a:t>‹#›</a:t>
+            </a:fld>
+            <a:endParaRPr lang="en-US"/>
+          </a:p>
+        </p:txBody>
+      </p:sp>
+    </p:spTree>
+    <p:extLst>
+      <p:ext uri="{BB962C8B-B14F-4D97-AF65-F5344CB8AC3E}">
+        <p14:creationId xmlns:p14="http://schemas.microsoft.com/office/powerpoint/2010/main" val="2961865336"/>
+      </p:ext>
+    </p:extLst>
+  </p:cSld>
+  <p:clrMap bg1="lt1" tx1="dk1" bg2="lt2" tx2="dk2" accent1="accent1" accent2="accent2" accent3="accent3" accent4="accent4" accent5="accent5" accent6="accent6" hlink="hlink" folHlink="folHlink"/>
+  <p:notesStyle>
+    <a:lvl1pPr marL="0" algn="l" defTabSz="914400" rtl="0" eaLnBrk="1" latinLnBrk="0" hangingPunct="1">
+      <a:defRPr sz="1200" kern="1200">
+        <a:solidFill>
+          <a:schemeClr val="tx1"/>
+        </a:solidFill>
+        <a:latin typeface="+mn-lt"/>
+        <a:ea typeface="+mn-ea"/>
+        <a:cs typeface="+mn-cs"/>
+      </a:defRPr>
+    </a:lvl1pPr>
+    <a:lvl2pPr marL="457200" algn="l" defTabSz="914400" rtl="0" eaLnBrk="1" latinLnBrk="0" hangingPunct="1">
+      <a:defRPr sz="1200" kern="1200">
+        <a:solidFill>
+          <a:schemeClr val="tx1"/>
+        </a:solidFill>
+        <a:latin typeface="+mn-lt"/>
+        <a:ea typeface="+mn-ea"/>
+        <a:cs typeface="+mn-cs"/>
+      </a:defRPr>
+    </a:lvl2pPr>
+    <a:lvl3pPr marL="914400" algn="l" defTabSz="914400" rtl="0" eaLnBrk="1" latinLnBrk="0" hangingPunct="1">
+      <a:defRPr sz="1200" kern="1200">
+        <a:solidFill>
+          <a:schemeClr val="tx1"/>
+        </a:solidFill>
+        <a:latin typeface="+mn-lt"/>
+        <a:ea typeface="+mn-ea"/>
+        <a:cs typeface="+mn-cs"/>
+      </a:defRPr>
+    </a:lvl3pPr>
+    <a:lvl4pPr marL="1371600" algn="l" defTabSz="914400" rtl="0" eaLnBrk="1" latinLnBrk="0" hangingPunct="1">
+      <a:defRPr sz="1200" kern="1200">
+        <a:solidFill>
+          <a:schemeClr val="tx1"/>
+        </a:solidFill>
+        <a:latin typeface="+mn-lt"/>
+        <a:ea typeface="+mn-ea"/>
+        <a:cs typeface="+mn-cs"/>
+      </a:defRPr>
+    </a:lvl4pPr>
+    <a:lvl5pPr marL="1828800" algn="l" defTabSz="914400" rtl="0" eaLnBrk="1" latinLnBrk="0" hangingPunct="1">
+      <a:defRPr sz="1200" kern="1200">
+        <a:solidFill>
+          <a:schemeClr val="tx1"/>
+        </a:solidFill>
+        <a:latin typeface="+mn-lt"/>
+        <a:ea typeface="+mn-ea"/>
+        <a:cs typeface="+mn-cs"/>
+      </a:defRPr>
+    </a:lvl5pPr>
+    <a:lvl6pPr marL="2286000" algn="l" defTabSz="914400" rtl="0" eaLnBrk="1" latinLnBrk="0" hangingPunct="1">
+      <a:defRPr sz="1200" kern="1200">
+        <a:solidFill>
+          <a:schemeClr val="tx1"/>
+        </a:solidFill>
+        <a:latin typeface="+mn-lt"/>
+        <a:ea typeface="+mn-ea"/>
+        <a:cs typeface="+mn-cs"/>
+      </a:defRPr>
+    </a:lvl6pPr>
+    <a:lvl7pPr marL="2743200" algn="l" defTabSz="914400" rtl="0" eaLnBrk="1" latinLnBrk="0" hangingPunct="1">
+      <a:defRPr sz="1200" kern="1200">
+        <a:solidFill>
+          <a:schemeClr val="tx1"/>
+        </a:solidFill>
+        <a:latin typeface="+mn-lt"/>
+        <a:ea typeface="+mn-ea"/>
+        <a:cs typeface="+mn-cs"/>
+      </a:defRPr>
+    </a:lvl7pPr>
+    <a:lvl8pPr marL="3200400" algn="l" defTabSz="914400" rtl="0" eaLnBrk="1" latinLnBrk="0" hangingPunct="1">
+      <a:defRPr sz="1200" kern="1200">
+        <a:solidFill>
+          <a:schemeClr val="tx1"/>
+        </a:solidFill>
+        <a:latin typeface="+mn-lt"/>
+        <a:ea typeface="+mn-ea"/>
+        <a:cs typeface="+mn-cs"/>
+      </a:defRPr>
+    </a:lvl8pPr>
+    <a:lvl9pPr marL="3657600" algn="l" defTabSz="914400" rtl="0" eaLnBrk="1" latinLnBrk="0" hangingPunct="1">
+      <a:defRPr sz="1200" kern="1200">
+        <a:solidFill>
+          <a:schemeClr val="tx1"/>
+        </a:solidFill>
+        <a:latin typeface="+mn-lt"/>
+        <a:ea typeface="+mn-ea"/>
+        <a:cs typeface="+mn-cs"/>
+      </a:defRPr>
+    </a:lvl9pPr>
+  </p:notesStyle>
+</p:notesMaster>
+</file>
+
+<file path=ppt/notesSlides/notesSlide1.xml><?xml version="1.0" encoding="utf-8"?>
+<p:notes xmlns:a="http://schemas.openxmlformats.org/drawingml/2006/main" xmlns:r="http://schemas.openxmlformats.org/officeDocument/2006/relationships" xmlns:p="http://schemas.openxmlformats.org/presentationml/2006/main">
+  <p:cSld>
+    <p:spTree>
+      <p:nvGrpSpPr>
+        <p:cNvPr id="1" name=""/>
+        <p:cNvGrpSpPr/>
+        <p:nvPr/>
+      </p:nvGrpSpPr>
+      <p:grpSpPr>
+        <a:xfrm>
+          <a:off x="0" y="0"/>
+          <a:ext cx="0" cy="0"/>
+          <a:chOff x="0" y="0"/>
+          <a:chExt cx="0" cy="0"/>
+        </a:xfrm>
+      </p:grpSpPr>
+      <p:sp>
+        <p:nvSpPr>
+          <p:cNvPr id="2" name="Slide Image Placeholder 1"/>
+          <p:cNvSpPr>
+            <a:spLocks noGrp="1" noRot="1" noChangeAspect="1"/>
+          </p:cNvSpPr>
+          <p:nvPr>
+            <p:ph type="sldImg"/>
+          </p:nvPr>
+        </p:nvSpPr>
+        <p:spPr/>
+      </p:sp>
+      <p:sp>
+        <p:nvSpPr>
+          <p:cNvPr id="3" name="Notes Placeholder 2"/>
+          <p:cNvSpPr>
+            <a:spLocks noGrp="1"/>
+          </p:cNvSpPr>
+          <p:nvPr>
+            <p:ph type="body" idx="1"/>
+          </p:nvPr>
+        </p:nvSpPr>
+        <p:spPr/>
+        <p:txBody>
+          <a:bodyPr/>
+          <a:lstStyle/>
+          <a:p>
+            <a:pPr marL="342900" indent="-342900">
+              <a:buAutoNum type="arabicPeriod"/>
+            </a:pPr>
+            <a:r>
+              <a:rPr lang="en-US" dirty="0"/>
+              <a:t>Frequently performed imaging procedure globally for diagnosing various thoracic conditions like pneumonia, pneumothorax</a:t>
+            </a:r>
+          </a:p>
+          <a:p>
+            <a:pPr marL="342900" indent="-342900">
+              <a:buAutoNum type="arabicPeriod"/>
+            </a:pPr>
+            <a:r>
+              <a:rPr lang="en-US" dirty="0"/>
+              <a:t>In US alone, 173% increase in chest imaging utilization per 1000 ED visits between 1994 to 2015</a:t>
+            </a:r>
+          </a:p>
+          <a:p>
+            <a:pPr marL="342900" indent="-342900">
+              <a:buAutoNum type="arabicPeriod"/>
+            </a:pPr>
+            <a:r>
+              <a:rPr lang="en-US" dirty="0"/>
+              <a:t>42% - underreading, 22% satisfaction-of-search, 9% faculty reasoning errors</a:t>
+            </a:r>
+          </a:p>
+          <a:p>
+            <a:pPr marL="342900" indent="-342900">
+              <a:buAutoNum type="arabicPeriod"/>
+            </a:pPr>
+            <a:r>
+              <a:rPr lang="en-US" dirty="0"/>
+              <a:t>Recent study in 2023 says, radiologists who made diagnostic errors had an avg. of 121% daily workload</a:t>
+            </a:r>
+          </a:p>
+          <a:p>
+            <a:pPr marL="342900" indent="-342900">
+              <a:buAutoNum type="arabicPeriod"/>
+            </a:pPr>
+            <a:r>
+              <a:rPr lang="en-US" dirty="0"/>
+              <a:t>Hence, call for radiology assistant</a:t>
+            </a:r>
+          </a:p>
+          <a:p>
+            <a:pPr marL="342900" indent="-342900">
+              <a:buAutoNum type="arabicPeriod"/>
+            </a:pPr>
+            <a:r>
+              <a:rPr lang="en-US" dirty="0"/>
+              <a:t>Deep Learning based approaches such as DenseNet121 CNN showcased reliability of 97.3% in pneumonia detection</a:t>
+            </a:r>
+          </a:p>
+          <a:p>
+            <a:pPr marL="342900" indent="-342900">
+              <a:buAutoNum type="arabicPeriod"/>
+            </a:pPr>
+            <a:r>
+              <a:rPr lang="en-US" dirty="0"/>
+              <a:t>Furthermore, an LLM attached to above diagnosis results to generate clinical reasoning serve quick and better patient care</a:t>
+            </a:r>
+          </a:p>
+          <a:p>
+            <a:endParaRPr lang="en-US" dirty="0"/>
+          </a:p>
+        </p:txBody>
+      </p:sp>
+      <p:sp>
+        <p:nvSpPr>
+          <p:cNvPr id="4" name="Slide Number Placeholder 3"/>
+          <p:cNvSpPr>
+            <a:spLocks noGrp="1"/>
+          </p:cNvSpPr>
+          <p:nvPr>
+            <p:ph type="sldNum" sz="quarter" idx="5"/>
+          </p:nvPr>
+        </p:nvSpPr>
+        <p:spPr/>
+        <p:txBody>
+          <a:bodyPr/>
+          <a:lstStyle/>
+          <a:p>
+            <a:fld id="{E99BF244-69D7-024A-B6A5-545898448B30}" type="slidenum">
+              <a:rPr lang="en-US" smtClean="0"/>
+              <a:t>3</a:t>
+            </a:fld>
+            <a:endParaRPr lang="en-US"/>
+          </a:p>
+        </p:txBody>
+      </p:sp>
+    </p:spTree>
+    <p:extLst>
+      <p:ext uri="{BB962C8B-B14F-4D97-AF65-F5344CB8AC3E}">
+        <p14:creationId xmlns:p14="http://schemas.microsoft.com/office/powerpoint/2010/main" val="4010404133"/>
+      </p:ext>
+    </p:extLst>
+  </p:cSld>
+  <p:clrMapOvr>
+    <a:masterClrMapping/>
+  </p:clrMapOvr>
+</p:notes>
 </file>
 
 <file path=ppt/slideLayouts/slideLayout1.xml><?xml version="1.0" encoding="utf-8"?>
@@ -259,7 +768,7 @@
           <a:p>
             <a:fld id="{E0ADF483-D3D6-8A4A-BB74-78EECF92337A}" type="datetimeFigureOut">
               <a:rPr lang="en-US" smtClean="0"/>
-              <a:t>10/16/25</a:t>
+              <a:t>11/16/25</a:t>
             </a:fld>
             <a:endParaRPr lang="en-US"/>
           </a:p>
@@ -459,7 +968,7 @@
           <a:p>
             <a:fld id="{E0ADF483-D3D6-8A4A-BB74-78EECF92337A}" type="datetimeFigureOut">
               <a:rPr lang="en-US" smtClean="0"/>
-              <a:t>10/16/25</a:t>
+              <a:t>11/16/25</a:t>
             </a:fld>
             <a:endParaRPr lang="en-US"/>
           </a:p>
@@ -669,7 +1178,7 @@
           <a:p>
             <a:fld id="{E0ADF483-D3D6-8A4A-BB74-78EECF92337A}" type="datetimeFigureOut">
               <a:rPr lang="en-US" smtClean="0"/>
-              <a:t>10/16/25</a:t>
+              <a:t>11/16/25</a:t>
             </a:fld>
             <a:endParaRPr lang="en-US"/>
           </a:p>
@@ -869,7 +1378,7 @@
           <a:p>
             <a:fld id="{E0ADF483-D3D6-8A4A-BB74-78EECF92337A}" type="datetimeFigureOut">
               <a:rPr lang="en-US" smtClean="0"/>
-              <a:t>10/16/25</a:t>
+              <a:t>11/16/25</a:t>
             </a:fld>
             <a:endParaRPr lang="en-US"/>
           </a:p>
@@ -1145,7 +1654,7 @@
           <a:p>
             <a:fld id="{E0ADF483-D3D6-8A4A-BB74-78EECF92337A}" type="datetimeFigureOut">
               <a:rPr lang="en-US" smtClean="0"/>
-              <a:t>10/16/25</a:t>
+              <a:t>11/16/25</a:t>
             </a:fld>
             <a:endParaRPr lang="en-US"/>
           </a:p>
@@ -1413,7 +1922,7 @@
           <a:p>
             <a:fld id="{E0ADF483-D3D6-8A4A-BB74-78EECF92337A}" type="datetimeFigureOut">
               <a:rPr lang="en-US" smtClean="0"/>
-              <a:t>10/16/25</a:t>
+              <a:t>11/16/25</a:t>
             </a:fld>
             <a:endParaRPr lang="en-US"/>
           </a:p>
@@ -1828,7 +2337,7 @@
           <a:p>
             <a:fld id="{E0ADF483-D3D6-8A4A-BB74-78EECF92337A}" type="datetimeFigureOut">
               <a:rPr lang="en-US" smtClean="0"/>
-              <a:t>10/16/25</a:t>
+              <a:t>11/16/25</a:t>
             </a:fld>
             <a:endParaRPr lang="en-US"/>
           </a:p>
@@ -1970,7 +2479,7 @@
           <a:p>
             <a:fld id="{E0ADF483-D3D6-8A4A-BB74-78EECF92337A}" type="datetimeFigureOut">
               <a:rPr lang="en-US" smtClean="0"/>
-              <a:t>10/16/25</a:t>
+              <a:t>11/16/25</a:t>
             </a:fld>
             <a:endParaRPr lang="en-US"/>
           </a:p>
@@ -2083,7 +2592,7 @@
           <a:p>
             <a:fld id="{E0ADF483-D3D6-8A4A-BB74-78EECF92337A}" type="datetimeFigureOut">
               <a:rPr lang="en-US" smtClean="0"/>
-              <a:t>10/16/25</a:t>
+              <a:t>11/16/25</a:t>
             </a:fld>
             <a:endParaRPr lang="en-US"/>
           </a:p>
@@ -2396,7 +2905,7 @@
           <a:p>
             <a:fld id="{E0ADF483-D3D6-8A4A-BB74-78EECF92337A}" type="datetimeFigureOut">
               <a:rPr lang="en-US" smtClean="0"/>
-              <a:t>10/16/25</a:t>
+              <a:t>11/16/25</a:t>
             </a:fld>
             <a:endParaRPr lang="en-US"/>
           </a:p>
@@ -2685,7 +3194,7 @@
           <a:p>
             <a:fld id="{E0ADF483-D3D6-8A4A-BB74-78EECF92337A}" type="datetimeFigureOut">
               <a:rPr lang="en-US" smtClean="0"/>
-              <a:t>10/16/25</a:t>
+              <a:t>11/16/25</a:t>
             </a:fld>
             <a:endParaRPr lang="en-US"/>
           </a:p>
@@ -2928,7 +3437,7 @@
           <a:p>
             <a:fld id="{E0ADF483-D3D6-8A4A-BB74-78EECF92337A}" type="datetimeFigureOut">
               <a:rPr lang="en-US" smtClean="0"/>
-              <a:t>10/16/25</a:t>
+              <a:t>11/16/25</a:t>
             </a:fld>
             <a:endParaRPr lang="en-US"/>
           </a:p>
@@ -3373,6 +3882,14 @@
           <a:prstGeom prst="rect">
             <a:avLst/>
           </a:prstGeom>
+          <a:solidFill>
+            <a:schemeClr val="bg1"/>
+          </a:solidFill>
+          <a:ln>
+            <a:solidFill>
+              <a:schemeClr val="dk1"/>
+            </a:solidFill>
+          </a:ln>
         </p:spPr>
       </p:pic>
       <p:pic>
@@ -3436,6 +3953,47 @@
           </a:prstGeom>
         </p:spPr>
       </p:pic>
+      <p:sp>
+        <p:nvSpPr>
+          <p:cNvPr id="2" name="TextBox 1">
+            <a:extLst>
+              <a:ext uri="{FF2B5EF4-FFF2-40B4-BE49-F238E27FC236}">
+                <a16:creationId xmlns:a16="http://schemas.microsoft.com/office/drawing/2014/main" id="{6018368F-53F0-503C-05A1-2D82F8EE15F4}"/>
+              </a:ext>
+            </a:extLst>
+          </p:cNvPr>
+          <p:cNvSpPr txBox="1"/>
+          <p:nvPr/>
+        </p:nvSpPr>
+        <p:spPr>
+          <a:xfrm>
+            <a:off x="7752441" y="5508702"/>
+            <a:ext cx="3171894" cy="646331"/>
+          </a:xfrm>
+          <a:prstGeom prst="rect">
+            <a:avLst/>
+          </a:prstGeom>
+          <a:noFill/>
+        </p:spPr>
+        <p:txBody>
+          <a:bodyPr wrap="none" rtlCol="0">
+            <a:spAutoFit/>
+          </a:bodyPr>
+          <a:lstStyle/>
+          <a:p>
+            <a:r>
+              <a:rPr lang="en-US" b="1" dirty="0"/>
+              <a:t>Surya Chandra Raju Kurapati</a:t>
+            </a:r>
+          </a:p>
+          <a:p>
+            <a:r>
+              <a:rPr lang="en-US" b="1" dirty="0"/>
+              <a:t>x23396920</a:t>
+            </a:r>
+          </a:p>
+        </p:txBody>
+      </p:sp>
     </p:spTree>
     <p:extLst>
       <p:ext uri="{BB962C8B-B14F-4D97-AF65-F5344CB8AC3E}">
@@ -3454,13 +4012,7 @@
   <p:cSld>
     <p:spTree>
       <p:nvGrpSpPr>
-        <p:cNvPr id="1" name="">
-          <a:extLst>
-            <a:ext uri="{FF2B5EF4-FFF2-40B4-BE49-F238E27FC236}">
-              <a16:creationId xmlns:a16="http://schemas.microsoft.com/office/drawing/2014/main" id="{D64A06DD-C14A-82A2-E9D8-D5B12DB422CE}"/>
-            </a:ext>
-          </a:extLst>
-        </p:cNvPr>
+        <p:cNvPr id="1" name=""/>
         <p:cNvGrpSpPr/>
         <p:nvPr/>
       </p:nvGrpSpPr>
@@ -3474,10 +4026,10 @@
       </p:grpSpPr>
       <p:pic>
         <p:nvPicPr>
-          <p:cNvPr id="2" name="Picture 1">
-            <a:extLst>
-              <a:ext uri="{FF2B5EF4-FFF2-40B4-BE49-F238E27FC236}">
-                <a16:creationId xmlns:a16="http://schemas.microsoft.com/office/drawing/2014/main" id="{6FAAD847-93D5-ED47-A62B-E21C0BF199FE}"/>
+          <p:cNvPr id="3" name="Picture 2">
+            <a:extLst>
+              <a:ext uri="{FF2B5EF4-FFF2-40B4-BE49-F238E27FC236}">
+                <a16:creationId xmlns:a16="http://schemas.microsoft.com/office/drawing/2014/main" id="{F699585F-251F-EDD7-5D16-2D476BAC7ACF}"/>
               </a:ext>
             </a:extLst>
           </p:cNvPr>
@@ -3488,87 +4040,26 @@
         </p:nvPicPr>
         <p:blipFill>
           <a:blip r:embed="rId2"/>
-          <a:srcRect r="12023"/>
           <a:stretch>
             <a:fillRect/>
           </a:stretch>
         </p:blipFill>
         <p:spPr>
           <a:xfrm>
-            <a:off x="524065" y="3106155"/>
-            <a:ext cx="1188984" cy="1271976"/>
+            <a:off x="858126" y="3687803"/>
+            <a:ext cx="850705" cy="1042462"/>
           </a:xfrm>
           <a:prstGeom prst="rect">
             <a:avLst/>
           </a:prstGeom>
         </p:spPr>
       </p:pic>
-      <p:pic>
-        <p:nvPicPr>
-          <p:cNvPr id="3" name="Picture 2">
-            <a:extLst>
-              <a:ext uri="{FF2B5EF4-FFF2-40B4-BE49-F238E27FC236}">
-                <a16:creationId xmlns:a16="http://schemas.microsoft.com/office/drawing/2014/main" id="{9EDEB55D-28B2-9E2F-80E0-37E1E561FF75}"/>
-              </a:ext>
-            </a:extLst>
-          </p:cNvPr>
-          <p:cNvPicPr>
-            <a:picLocks noChangeAspect="1"/>
-          </p:cNvPicPr>
-          <p:nvPr/>
-        </p:nvPicPr>
-        <p:blipFill>
-          <a:blip r:embed="rId3"/>
-          <a:stretch>
-            <a:fillRect/>
-          </a:stretch>
-        </p:blipFill>
-        <p:spPr>
-          <a:xfrm>
-            <a:off x="2723923" y="1822188"/>
-            <a:ext cx="1910397" cy="1682164"/>
-          </a:xfrm>
-          <a:prstGeom prst="rect">
-            <a:avLst/>
-          </a:prstGeom>
-        </p:spPr>
-      </p:pic>
-      <p:pic>
-        <p:nvPicPr>
-          <p:cNvPr id="4" name="Picture 3">
-            <a:extLst>
-              <a:ext uri="{FF2B5EF4-FFF2-40B4-BE49-F238E27FC236}">
-                <a16:creationId xmlns:a16="http://schemas.microsoft.com/office/drawing/2014/main" id="{99592FB4-4CD9-67C1-DA46-5DEE02341884}"/>
-              </a:ext>
-            </a:extLst>
-          </p:cNvPr>
-          <p:cNvPicPr>
-            <a:picLocks noChangeAspect="1"/>
-          </p:cNvPicPr>
-          <p:nvPr/>
-        </p:nvPicPr>
-        <p:blipFill>
-          <a:blip r:embed="rId4"/>
-          <a:stretch>
-            <a:fillRect/>
-          </a:stretch>
-        </p:blipFill>
-        <p:spPr>
-          <a:xfrm>
-            <a:off x="2723923" y="3850141"/>
-            <a:ext cx="1910397" cy="1682164"/>
-          </a:xfrm>
-          <a:prstGeom prst="rect">
-            <a:avLst/>
-          </a:prstGeom>
-        </p:spPr>
-      </p:pic>
-      <p:sp>
-        <p:nvSpPr>
-          <p:cNvPr id="6" name="TextBox 5">
-            <a:extLst>
-              <a:ext uri="{FF2B5EF4-FFF2-40B4-BE49-F238E27FC236}">
-                <a16:creationId xmlns:a16="http://schemas.microsoft.com/office/drawing/2014/main" id="{B6C59935-A133-35E5-D1BB-73CC27EDA1C9}"/>
+      <p:sp>
+        <p:nvSpPr>
+          <p:cNvPr id="4" name="TextBox 3">
+            <a:extLst>
+              <a:ext uri="{FF2B5EF4-FFF2-40B4-BE49-F238E27FC236}">
+                <a16:creationId xmlns:a16="http://schemas.microsoft.com/office/drawing/2014/main" id="{3C602E6E-80E3-6EB6-6695-959BE3E7CE1A}"/>
               </a:ext>
             </a:extLst>
           </p:cNvPr>
@@ -3577,8 +4068,8 @@
         </p:nvSpPr>
         <p:spPr>
           <a:xfrm>
-            <a:off x="523912" y="4285532"/>
-            <a:ext cx="1455353" cy="261610"/>
+            <a:off x="694701" y="4707115"/>
+            <a:ext cx="1232573" cy="261610"/>
           </a:xfrm>
           <a:prstGeom prst="rect">
             <a:avLst/>
@@ -3596,613 +4087,39 @@
                 <a:latin typeface="Times New Roman" panose="02020603050405020304" pitchFamily="18" charset="0"/>
                 <a:cs typeface="Times New Roman" panose="02020603050405020304" pitchFamily="18" charset="0"/>
               </a:rPr>
-              <a:t>Domain: </a:t>
+              <a:t>User: </a:t>
             </a:r>
             <a:r>
               <a:rPr lang="en-US" sz="1100" b="1" dirty="0">
                 <a:latin typeface="Times New Roman" panose="02020603050405020304" pitchFamily="18" charset="0"/>
                 <a:cs typeface="Times New Roman" panose="02020603050405020304" pitchFamily="18" charset="0"/>
               </a:rPr>
-              <a:t>Healthcare</a:t>
-            </a:r>
-          </a:p>
-        </p:txBody>
-      </p:sp>
-      <p:sp>
-        <p:nvSpPr>
-          <p:cNvPr id="7" name="TextBox 6">
-            <a:extLst>
-              <a:ext uri="{FF2B5EF4-FFF2-40B4-BE49-F238E27FC236}">
-                <a16:creationId xmlns:a16="http://schemas.microsoft.com/office/drawing/2014/main" id="{649287BE-FF4C-7B6F-7450-EFD9CD97FDA1}"/>
-              </a:ext>
-            </a:extLst>
-          </p:cNvPr>
-          <p:cNvSpPr txBox="1"/>
-          <p:nvPr/>
-        </p:nvSpPr>
-        <p:spPr>
-          <a:xfrm>
-            <a:off x="2656406" y="3492777"/>
-            <a:ext cx="2042910" cy="261610"/>
-          </a:xfrm>
-          <a:prstGeom prst="rect">
-            <a:avLst/>
-          </a:prstGeom>
-          <a:noFill/>
-        </p:spPr>
-        <p:txBody>
-          <a:bodyPr wrap="square" rtlCol="0">
-            <a:spAutoFit/>
-          </a:bodyPr>
-          <a:lstStyle/>
-          <a:p>
-            <a:r>
-              <a:rPr lang="en-US" sz="1100" dirty="0">
-                <a:latin typeface="Times New Roman" panose="02020603050405020304" pitchFamily="18" charset="0"/>
-                <a:cs typeface="Times New Roman" panose="02020603050405020304" pitchFamily="18" charset="0"/>
-              </a:rPr>
-              <a:t>Department: </a:t>
-            </a:r>
-            <a:r>
-              <a:rPr lang="en-US" sz="1100" b="1" dirty="0">
-                <a:latin typeface="Times New Roman" panose="02020603050405020304" pitchFamily="18" charset="0"/>
-                <a:cs typeface="Times New Roman" panose="02020603050405020304" pitchFamily="18" charset="0"/>
-              </a:rPr>
-              <a:t>Radiology (X-Ray)</a:t>
-            </a:r>
-          </a:p>
-        </p:txBody>
-      </p:sp>
-      <p:sp>
-        <p:nvSpPr>
-          <p:cNvPr id="8" name="TextBox 7">
-            <a:extLst>
-              <a:ext uri="{FF2B5EF4-FFF2-40B4-BE49-F238E27FC236}">
-                <a16:creationId xmlns:a16="http://schemas.microsoft.com/office/drawing/2014/main" id="{EADA7FFA-110C-CA2F-D93D-11E779F4C937}"/>
-              </a:ext>
-            </a:extLst>
-          </p:cNvPr>
-          <p:cNvSpPr txBox="1"/>
-          <p:nvPr/>
-        </p:nvSpPr>
-        <p:spPr>
-          <a:xfrm>
-            <a:off x="2608173" y="5530017"/>
-            <a:ext cx="2160585" cy="261610"/>
-          </a:xfrm>
-          <a:prstGeom prst="rect">
-            <a:avLst/>
-          </a:prstGeom>
-          <a:noFill/>
-        </p:spPr>
-        <p:txBody>
-          <a:bodyPr wrap="square" rtlCol="0">
-            <a:spAutoFit/>
-          </a:bodyPr>
-          <a:lstStyle/>
-          <a:p>
-            <a:r>
-              <a:rPr lang="en-US" sz="1100" dirty="0">
-                <a:latin typeface="Times New Roman" panose="02020603050405020304" pitchFamily="18" charset="0"/>
-                <a:cs typeface="Times New Roman" panose="02020603050405020304" pitchFamily="18" charset="0"/>
-              </a:rPr>
-              <a:t>Technology: </a:t>
-            </a:r>
-            <a:r>
-              <a:rPr lang="en-US" sz="1100" b="1" dirty="0">
-                <a:latin typeface="Times New Roman" panose="02020603050405020304" pitchFamily="18" charset="0"/>
-                <a:cs typeface="Times New Roman" panose="02020603050405020304" pitchFamily="18" charset="0"/>
-              </a:rPr>
-              <a:t>A</a:t>
-            </a:r>
-            <a:r>
-              <a:rPr lang="en-US" sz="1100" dirty="0">
-                <a:latin typeface="Times New Roman" panose="02020603050405020304" pitchFamily="18" charset="0"/>
-                <a:cs typeface="Times New Roman" panose="02020603050405020304" pitchFamily="18" charset="0"/>
-              </a:rPr>
-              <a:t>rtificial </a:t>
-            </a:r>
-            <a:r>
-              <a:rPr lang="en-US" sz="1100" b="1" dirty="0">
-                <a:latin typeface="Times New Roman" panose="02020603050405020304" pitchFamily="18" charset="0"/>
-                <a:cs typeface="Times New Roman" panose="02020603050405020304" pitchFamily="18" charset="0"/>
-              </a:rPr>
-              <a:t>I</a:t>
-            </a:r>
-            <a:r>
-              <a:rPr lang="en-US" sz="1100" dirty="0">
-                <a:latin typeface="Times New Roman" panose="02020603050405020304" pitchFamily="18" charset="0"/>
-                <a:cs typeface="Times New Roman" panose="02020603050405020304" pitchFamily="18" charset="0"/>
-              </a:rPr>
-              <a:t>ntelligence</a:t>
-            </a:r>
-          </a:p>
-        </p:txBody>
-      </p:sp>
-      <p:sp>
-        <p:nvSpPr>
-          <p:cNvPr id="9" name="TextBox 8">
-            <a:extLst>
-              <a:ext uri="{FF2B5EF4-FFF2-40B4-BE49-F238E27FC236}">
-                <a16:creationId xmlns:a16="http://schemas.microsoft.com/office/drawing/2014/main" id="{6669EA88-993E-AE78-2C25-AD4CB6D059B0}"/>
-              </a:ext>
-            </a:extLst>
-          </p:cNvPr>
-          <p:cNvSpPr txBox="1"/>
-          <p:nvPr/>
-        </p:nvSpPr>
-        <p:spPr>
-          <a:xfrm>
-            <a:off x="5705705" y="4324710"/>
-            <a:ext cx="2160585" cy="261610"/>
-          </a:xfrm>
-          <a:prstGeom prst="rect">
-            <a:avLst/>
-          </a:prstGeom>
-          <a:noFill/>
-        </p:spPr>
-        <p:txBody>
-          <a:bodyPr wrap="square" rtlCol="0">
-            <a:spAutoFit/>
-          </a:bodyPr>
-          <a:lstStyle/>
-          <a:p>
-            <a:r>
-              <a:rPr lang="en-US" sz="1100" dirty="0">
-                <a:latin typeface="Times New Roman" panose="02020603050405020304" pitchFamily="18" charset="0"/>
-                <a:cs typeface="Times New Roman" panose="02020603050405020304" pitchFamily="18" charset="0"/>
-              </a:rPr>
-              <a:t>Product: </a:t>
-            </a:r>
-            <a:r>
-              <a:rPr lang="en-US" sz="1100" b="1" dirty="0">
-                <a:latin typeface="Times New Roman" panose="02020603050405020304" pitchFamily="18" charset="0"/>
-                <a:cs typeface="Times New Roman" panose="02020603050405020304" pitchFamily="18" charset="0"/>
-              </a:rPr>
-              <a:t>Rad</a:t>
-            </a:r>
-            <a:r>
-              <a:rPr lang="en-US" sz="1100" dirty="0">
-                <a:latin typeface="Times New Roman" panose="02020603050405020304" pitchFamily="18" charset="0"/>
-                <a:cs typeface="Times New Roman" panose="02020603050405020304" pitchFamily="18" charset="0"/>
-              </a:rPr>
-              <a:t>iology </a:t>
-            </a:r>
-            <a:r>
-              <a:rPr lang="en-US" sz="1100" b="1" dirty="0">
-                <a:latin typeface="Times New Roman" panose="02020603050405020304" pitchFamily="18" charset="0"/>
-                <a:cs typeface="Times New Roman" panose="02020603050405020304" pitchFamily="18" charset="0"/>
-              </a:rPr>
-              <a:t>Assist</a:t>
-            </a:r>
-            <a:r>
-              <a:rPr lang="en-US" sz="1100" dirty="0">
-                <a:latin typeface="Times New Roman" panose="02020603050405020304" pitchFamily="18" charset="0"/>
-                <a:cs typeface="Times New Roman" panose="02020603050405020304" pitchFamily="18" charset="0"/>
-              </a:rPr>
-              <a:t>ant </a:t>
-            </a:r>
-            <a:r>
-              <a:rPr lang="en-US" sz="1100" b="1" dirty="0">
-                <a:latin typeface="Times New Roman" panose="02020603050405020304" pitchFamily="18" charset="0"/>
-                <a:cs typeface="Times New Roman" panose="02020603050405020304" pitchFamily="18" charset="0"/>
-              </a:rPr>
-              <a:t>IQ</a:t>
-            </a:r>
-          </a:p>
-        </p:txBody>
-      </p:sp>
-      <p:sp>
-        <p:nvSpPr>
-          <p:cNvPr id="11" name="Oval 10">
-            <a:extLst>
-              <a:ext uri="{FF2B5EF4-FFF2-40B4-BE49-F238E27FC236}">
-                <a16:creationId xmlns:a16="http://schemas.microsoft.com/office/drawing/2014/main" id="{7AC6F3EE-7429-8CD1-8886-D01A490A61F3}"/>
-              </a:ext>
-            </a:extLst>
-          </p:cNvPr>
-          <p:cNvSpPr/>
-          <p:nvPr/>
-        </p:nvSpPr>
-        <p:spPr>
-          <a:xfrm>
-            <a:off x="9259750" y="2384398"/>
-            <a:ext cx="2048719" cy="668547"/>
-          </a:xfrm>
-          <a:prstGeom prst="ellipse">
-            <a:avLst/>
-          </a:prstGeom>
-          <a:solidFill>
-            <a:srgbClr val="757575"/>
-          </a:solidFill>
-        </p:spPr>
-        <p:style>
-          <a:lnRef idx="2">
-            <a:schemeClr val="accent1">
-              <a:shade val="15000"/>
-            </a:schemeClr>
-          </a:lnRef>
-          <a:fillRef idx="1">
-            <a:schemeClr val="accent1"/>
-          </a:fillRef>
-          <a:effectRef idx="0">
-            <a:schemeClr val="accent1"/>
-          </a:effectRef>
-          <a:fontRef idx="minor">
-            <a:schemeClr val="lt1"/>
-          </a:fontRef>
-        </p:style>
-        <p:txBody>
-          <a:bodyPr rtlCol="0" anchor="ctr"/>
-          <a:lstStyle/>
-          <a:p>
-            <a:pPr algn="ctr"/>
-            <a:endParaRPr lang="en-US"/>
-          </a:p>
-        </p:txBody>
-      </p:sp>
-      <p:sp>
-        <p:nvSpPr>
-          <p:cNvPr id="12" name="Oval 11">
-            <a:extLst>
-              <a:ext uri="{FF2B5EF4-FFF2-40B4-BE49-F238E27FC236}">
-                <a16:creationId xmlns:a16="http://schemas.microsoft.com/office/drawing/2014/main" id="{CE01B447-F61A-25BE-38E3-1EF737668BDA}"/>
-              </a:ext>
-            </a:extLst>
-          </p:cNvPr>
-          <p:cNvSpPr/>
-          <p:nvPr/>
-        </p:nvSpPr>
-        <p:spPr>
-          <a:xfrm>
-            <a:off x="9259750" y="3801711"/>
-            <a:ext cx="2048719" cy="668547"/>
-          </a:xfrm>
-          <a:prstGeom prst="ellipse">
-            <a:avLst/>
-          </a:prstGeom>
-          <a:solidFill>
-            <a:srgbClr val="757575"/>
-          </a:solidFill>
-        </p:spPr>
-        <p:style>
-          <a:lnRef idx="2">
-            <a:schemeClr val="accent1">
-              <a:shade val="15000"/>
-            </a:schemeClr>
-          </a:lnRef>
-          <a:fillRef idx="1">
-            <a:schemeClr val="accent1"/>
-          </a:fillRef>
-          <a:effectRef idx="0">
-            <a:schemeClr val="accent1"/>
-          </a:effectRef>
-          <a:fontRef idx="minor">
-            <a:schemeClr val="lt1"/>
-          </a:fontRef>
-        </p:style>
-        <p:txBody>
-          <a:bodyPr rtlCol="0" anchor="ctr"/>
-          <a:lstStyle/>
-          <a:p>
-            <a:pPr algn="ctr"/>
-            <a:endParaRPr lang="en-US"/>
-          </a:p>
-        </p:txBody>
-      </p:sp>
-      <p:sp>
-        <p:nvSpPr>
-          <p:cNvPr id="13" name="TextBox 12">
-            <a:extLst>
-              <a:ext uri="{FF2B5EF4-FFF2-40B4-BE49-F238E27FC236}">
-                <a16:creationId xmlns:a16="http://schemas.microsoft.com/office/drawing/2014/main" id="{0378F6CF-3225-6AA5-C6BA-7A3D4F3174D5}"/>
-              </a:ext>
-            </a:extLst>
-          </p:cNvPr>
-          <p:cNvSpPr txBox="1"/>
-          <p:nvPr/>
-        </p:nvSpPr>
-        <p:spPr>
-          <a:xfrm>
-            <a:off x="9259744" y="2581165"/>
-            <a:ext cx="2199192" cy="261610"/>
-          </a:xfrm>
-          <a:prstGeom prst="rect">
-            <a:avLst/>
-          </a:prstGeom>
-          <a:noFill/>
-        </p:spPr>
-        <p:txBody>
-          <a:bodyPr wrap="square" rtlCol="0">
-            <a:spAutoFit/>
-          </a:bodyPr>
-          <a:lstStyle/>
-          <a:p>
-            <a:r>
-              <a:rPr lang="en-US" sz="1100" dirty="0">
-                <a:solidFill>
-                  <a:schemeClr val="bg1"/>
-                </a:solidFill>
-                <a:latin typeface="Times New Roman" panose="02020603050405020304" pitchFamily="18" charset="0"/>
-                <a:cs typeface="Times New Roman" panose="02020603050405020304" pitchFamily="18" charset="0"/>
-              </a:rPr>
-              <a:t>Concept 1: Explainable AI (</a:t>
-            </a:r>
-            <a:r>
-              <a:rPr lang="en-US" sz="1100" b="1" dirty="0">
-                <a:solidFill>
-                  <a:schemeClr val="bg1"/>
-                </a:solidFill>
-                <a:latin typeface="Times New Roman" panose="02020603050405020304" pitchFamily="18" charset="0"/>
-                <a:cs typeface="Times New Roman" panose="02020603050405020304" pitchFamily="18" charset="0"/>
-              </a:rPr>
-              <a:t>XAI</a:t>
-            </a:r>
-            <a:r>
-              <a:rPr lang="en-US" sz="1100" dirty="0">
-                <a:solidFill>
-                  <a:schemeClr val="bg1"/>
-                </a:solidFill>
-                <a:latin typeface="Times New Roman" panose="02020603050405020304" pitchFamily="18" charset="0"/>
-                <a:cs typeface="Times New Roman" panose="02020603050405020304" pitchFamily="18" charset="0"/>
-              </a:rPr>
-              <a:t>)</a:t>
-            </a:r>
-          </a:p>
-        </p:txBody>
-      </p:sp>
-      <p:sp>
-        <p:nvSpPr>
-          <p:cNvPr id="14" name="TextBox 13">
-            <a:extLst>
-              <a:ext uri="{FF2B5EF4-FFF2-40B4-BE49-F238E27FC236}">
-                <a16:creationId xmlns:a16="http://schemas.microsoft.com/office/drawing/2014/main" id="{826B6DA4-1B52-0018-EB8D-94E1B9FC2DE8}"/>
-              </a:ext>
-            </a:extLst>
-          </p:cNvPr>
-          <p:cNvSpPr txBox="1"/>
-          <p:nvPr/>
-        </p:nvSpPr>
-        <p:spPr>
-          <a:xfrm>
-            <a:off x="9225019" y="4012355"/>
-            <a:ext cx="2199192" cy="261610"/>
-          </a:xfrm>
-          <a:prstGeom prst="rect">
-            <a:avLst/>
-          </a:prstGeom>
-          <a:noFill/>
-        </p:spPr>
-        <p:txBody>
-          <a:bodyPr wrap="square" rtlCol="0">
-            <a:spAutoFit/>
-          </a:bodyPr>
-          <a:lstStyle/>
-          <a:p>
-            <a:r>
-              <a:rPr lang="en-US" sz="1100" dirty="0">
-                <a:solidFill>
-                  <a:schemeClr val="bg1"/>
-                </a:solidFill>
-                <a:latin typeface="Times New Roman" panose="02020603050405020304" pitchFamily="18" charset="0"/>
-                <a:cs typeface="Times New Roman" panose="02020603050405020304" pitchFamily="18" charset="0"/>
-              </a:rPr>
-              <a:t>Concept 2: Generative AI (</a:t>
-            </a:r>
-            <a:r>
-              <a:rPr lang="en-US" sz="1100" b="1" dirty="0">
-                <a:solidFill>
-                  <a:schemeClr val="bg1"/>
-                </a:solidFill>
-                <a:latin typeface="Times New Roman" panose="02020603050405020304" pitchFamily="18" charset="0"/>
-                <a:cs typeface="Times New Roman" panose="02020603050405020304" pitchFamily="18" charset="0"/>
-              </a:rPr>
-              <a:t>GenAI</a:t>
-            </a:r>
-            <a:r>
-              <a:rPr lang="en-US" sz="1100" dirty="0">
-                <a:solidFill>
-                  <a:schemeClr val="bg1"/>
-                </a:solidFill>
-                <a:latin typeface="Times New Roman" panose="02020603050405020304" pitchFamily="18" charset="0"/>
-                <a:cs typeface="Times New Roman" panose="02020603050405020304" pitchFamily="18" charset="0"/>
-              </a:rPr>
-              <a:t>)</a:t>
-            </a:r>
-          </a:p>
-        </p:txBody>
-      </p:sp>
-      <p:sp>
-        <p:nvSpPr>
-          <p:cNvPr id="15" name="TextBox 14">
-            <a:extLst>
-              <a:ext uri="{FF2B5EF4-FFF2-40B4-BE49-F238E27FC236}">
-                <a16:creationId xmlns:a16="http://schemas.microsoft.com/office/drawing/2014/main" id="{AE697931-32B6-6997-9891-DECD73F17DA9}"/>
-              </a:ext>
-            </a:extLst>
-          </p:cNvPr>
-          <p:cNvSpPr txBox="1"/>
-          <p:nvPr/>
-        </p:nvSpPr>
-        <p:spPr>
-          <a:xfrm>
-            <a:off x="10359340" y="5300201"/>
-            <a:ext cx="1620455" cy="430887"/>
-          </a:xfrm>
-          <a:prstGeom prst="rect">
-            <a:avLst/>
-          </a:prstGeom>
-          <a:noFill/>
-        </p:spPr>
-        <p:txBody>
-          <a:bodyPr wrap="square" rtlCol="0">
-            <a:spAutoFit/>
-          </a:bodyPr>
-          <a:lstStyle/>
-          <a:p>
-            <a:pPr algn="ctr"/>
-            <a:r>
-              <a:rPr lang="en-US" sz="1100" b="1" dirty="0">
-                <a:latin typeface="Times New Roman" panose="02020603050405020304" pitchFamily="18" charset="0"/>
-                <a:cs typeface="Times New Roman" panose="02020603050405020304" pitchFamily="18" charset="0"/>
-              </a:rPr>
-              <a:t>L</a:t>
-            </a:r>
-            <a:r>
-              <a:rPr lang="en-US" sz="1100" dirty="0">
-                <a:latin typeface="Times New Roman" panose="02020603050405020304" pitchFamily="18" charset="0"/>
-                <a:cs typeface="Times New Roman" panose="02020603050405020304" pitchFamily="18" charset="0"/>
-              </a:rPr>
-              <a:t>arge </a:t>
-            </a:r>
-            <a:r>
-              <a:rPr lang="en-US" sz="1100" b="1" dirty="0">
-                <a:latin typeface="Times New Roman" panose="02020603050405020304" pitchFamily="18" charset="0"/>
-                <a:cs typeface="Times New Roman" panose="02020603050405020304" pitchFamily="18" charset="0"/>
-              </a:rPr>
-              <a:t>L</a:t>
-            </a:r>
-            <a:r>
-              <a:rPr lang="en-US" sz="1100" dirty="0">
-                <a:latin typeface="Times New Roman" panose="02020603050405020304" pitchFamily="18" charset="0"/>
-                <a:cs typeface="Times New Roman" panose="02020603050405020304" pitchFamily="18" charset="0"/>
-              </a:rPr>
-              <a:t>anguage </a:t>
-            </a:r>
-            <a:r>
-              <a:rPr lang="en-US" sz="1100" b="1" dirty="0">
-                <a:latin typeface="Times New Roman" panose="02020603050405020304" pitchFamily="18" charset="0"/>
-                <a:cs typeface="Times New Roman" panose="02020603050405020304" pitchFamily="18" charset="0"/>
-              </a:rPr>
-              <a:t>M</a:t>
-            </a:r>
-            <a:r>
-              <a:rPr lang="en-US" sz="1100" dirty="0">
-                <a:latin typeface="Times New Roman" panose="02020603050405020304" pitchFamily="18" charset="0"/>
-                <a:cs typeface="Times New Roman" panose="02020603050405020304" pitchFamily="18" charset="0"/>
-              </a:rPr>
-              <a:t>odel</a:t>
-            </a:r>
-          </a:p>
-          <a:p>
-            <a:pPr algn="ctr"/>
-            <a:r>
-              <a:rPr lang="en-US" sz="1100" dirty="0">
-                <a:latin typeface="Times New Roman" panose="02020603050405020304" pitchFamily="18" charset="0"/>
-                <a:cs typeface="Times New Roman" panose="02020603050405020304" pitchFamily="18" charset="0"/>
-              </a:rPr>
-              <a:t>(gemini-1.5-pro)</a:t>
-            </a:r>
-          </a:p>
-        </p:txBody>
-      </p:sp>
-      <p:sp>
-        <p:nvSpPr>
-          <p:cNvPr id="16" name="TextBox 15">
-            <a:extLst>
-              <a:ext uri="{FF2B5EF4-FFF2-40B4-BE49-F238E27FC236}">
-                <a16:creationId xmlns:a16="http://schemas.microsoft.com/office/drawing/2014/main" id="{C124CB56-246D-2208-AFAC-A8BA44261DD9}"/>
-              </a:ext>
-            </a:extLst>
-          </p:cNvPr>
-          <p:cNvSpPr txBox="1"/>
-          <p:nvPr/>
-        </p:nvSpPr>
-        <p:spPr>
-          <a:xfrm>
-            <a:off x="8599987" y="4928794"/>
-            <a:ext cx="2048719" cy="430887"/>
-          </a:xfrm>
-          <a:prstGeom prst="rect">
-            <a:avLst/>
-          </a:prstGeom>
-          <a:noFill/>
-        </p:spPr>
-        <p:txBody>
-          <a:bodyPr wrap="square" rtlCol="0">
-            <a:spAutoFit/>
-          </a:bodyPr>
-          <a:lstStyle/>
-          <a:p>
-            <a:pPr algn="ctr"/>
-            <a:r>
-              <a:rPr lang="en-US" sz="1100" b="1" dirty="0">
-                <a:latin typeface="Times New Roman" panose="02020603050405020304" pitchFamily="18" charset="0"/>
-                <a:cs typeface="Times New Roman" panose="02020603050405020304" pitchFamily="18" charset="0"/>
-              </a:rPr>
-              <a:t>C</a:t>
-            </a:r>
-            <a:r>
-              <a:rPr lang="en-US" sz="1100" dirty="0">
-                <a:latin typeface="Times New Roman" panose="02020603050405020304" pitchFamily="18" charset="0"/>
-                <a:cs typeface="Times New Roman" panose="02020603050405020304" pitchFamily="18" charset="0"/>
-              </a:rPr>
-              <a:t>onvolutional </a:t>
-            </a:r>
-            <a:r>
-              <a:rPr lang="en-US" sz="1100" b="1" dirty="0">
-                <a:latin typeface="Times New Roman" panose="02020603050405020304" pitchFamily="18" charset="0"/>
-                <a:cs typeface="Times New Roman" panose="02020603050405020304" pitchFamily="18" charset="0"/>
-              </a:rPr>
-              <a:t>N</a:t>
-            </a:r>
-            <a:r>
-              <a:rPr lang="en-US" sz="1100" dirty="0">
-                <a:latin typeface="Times New Roman" panose="02020603050405020304" pitchFamily="18" charset="0"/>
-                <a:cs typeface="Times New Roman" panose="02020603050405020304" pitchFamily="18" charset="0"/>
-              </a:rPr>
-              <a:t>eural </a:t>
-            </a:r>
-            <a:r>
-              <a:rPr lang="en-US" sz="1100" b="1" dirty="0">
-                <a:latin typeface="Times New Roman" panose="02020603050405020304" pitchFamily="18" charset="0"/>
-                <a:cs typeface="Times New Roman" panose="02020603050405020304" pitchFamily="18" charset="0"/>
-              </a:rPr>
-              <a:t>N</a:t>
-            </a:r>
-            <a:r>
-              <a:rPr lang="en-US" sz="1100" dirty="0">
-                <a:latin typeface="Times New Roman" panose="02020603050405020304" pitchFamily="18" charset="0"/>
-                <a:cs typeface="Times New Roman" panose="02020603050405020304" pitchFamily="18" charset="0"/>
-              </a:rPr>
-              <a:t>etwork</a:t>
-            </a:r>
-          </a:p>
-          <a:p>
-            <a:pPr algn="ctr"/>
-            <a:r>
-              <a:rPr lang="en-US" sz="1100" dirty="0">
-                <a:latin typeface="Times New Roman" panose="02020603050405020304" pitchFamily="18" charset="0"/>
-                <a:cs typeface="Times New Roman" panose="02020603050405020304" pitchFamily="18" charset="0"/>
-              </a:rPr>
-              <a:t>(DenseNet121)</a:t>
+              <a:t>Radiologist</a:t>
             </a:r>
           </a:p>
         </p:txBody>
       </p:sp>
       <p:cxnSp>
         <p:nvCxnSpPr>
-          <p:cNvPr id="18" name="Straight Arrow Connector 17">
-            <a:extLst>
-              <a:ext uri="{FF2B5EF4-FFF2-40B4-BE49-F238E27FC236}">
-                <a16:creationId xmlns:a16="http://schemas.microsoft.com/office/drawing/2014/main" id="{7DB93178-2C09-4595-42CB-0845D751F285}"/>
-              </a:ext>
-            </a:extLst>
-          </p:cNvPr>
-          <p:cNvCxnSpPr>
-            <a:cxnSpLocks/>
-            <a:stCxn id="12" idx="4"/>
-            <a:endCxn id="16" idx="0"/>
-          </p:cNvCxnSpPr>
+          <p:cNvPr id="12" name="Elbow Connector 11">
+            <a:extLst>
+              <a:ext uri="{FF2B5EF4-FFF2-40B4-BE49-F238E27FC236}">
+                <a16:creationId xmlns:a16="http://schemas.microsoft.com/office/drawing/2014/main" id="{128F1D74-004D-96F7-8BA7-7A1FAEBE4193}"/>
+              </a:ext>
+            </a:extLst>
+          </p:cNvPr>
+          <p:cNvCxnSpPr/>
           <p:nvPr/>
         </p:nvCxnSpPr>
         <p:spPr>
-          <a:xfrm flipH="1">
-            <a:off x="9624347" y="4470258"/>
-            <a:ext cx="659763" cy="458536"/>
-          </a:xfrm>
-          <a:prstGeom prst="straightConnector1">
-            <a:avLst/>
+          <a:xfrm flipV="1">
+            <a:off x="1294228" y="2419643"/>
+            <a:ext cx="1026941" cy="844062"/>
+          </a:xfrm>
+          <a:prstGeom prst="bentConnector3">
+            <a:avLst>
+              <a:gd name="adj1" fmla="val -685"/>
+            </a:avLst>
           </a:prstGeom>
           <a:ln>
             <a:solidFill>
@@ -4228,26 +4145,25 @@
       </p:cxnSp>
       <p:cxnSp>
         <p:nvCxnSpPr>
-          <p:cNvPr id="20" name="Straight Arrow Connector 19">
-            <a:extLst>
-              <a:ext uri="{FF2B5EF4-FFF2-40B4-BE49-F238E27FC236}">
-                <a16:creationId xmlns:a16="http://schemas.microsoft.com/office/drawing/2014/main" id="{0E2124EA-18D9-3244-A0FB-ECA3D75E4FD3}"/>
-              </a:ext>
-            </a:extLst>
-          </p:cNvPr>
-          <p:cNvCxnSpPr>
-            <a:stCxn id="12" idx="4"/>
-            <a:endCxn id="15" idx="0"/>
-          </p:cNvCxnSpPr>
+          <p:cNvPr id="15" name="Elbow Connector 14">
+            <a:extLst>
+              <a:ext uri="{FF2B5EF4-FFF2-40B4-BE49-F238E27FC236}">
+                <a16:creationId xmlns:a16="http://schemas.microsoft.com/office/drawing/2014/main" id="{810A133B-F7FD-F003-1182-9318191E657E}"/>
+              </a:ext>
+            </a:extLst>
+          </p:cNvPr>
+          <p:cNvCxnSpPr/>
           <p:nvPr/>
         </p:nvCxnSpPr>
         <p:spPr>
-          <a:xfrm>
-            <a:off x="10284110" y="4470258"/>
-            <a:ext cx="885458" cy="829943"/>
-          </a:xfrm>
-          <a:prstGeom prst="straightConnector1">
-            <a:avLst/>
+          <a:xfrm rot="16200000" flipH="1">
+            <a:off x="9263573" y="2736166"/>
+            <a:ext cx="1547446" cy="914400"/>
+          </a:xfrm>
+          <a:prstGeom prst="bentConnector3">
+            <a:avLst>
+              <a:gd name="adj1" fmla="val 0"/>
+            </a:avLst>
           </a:prstGeom>
           <a:ln>
             <a:solidFill>
@@ -4271,104 +4187,143 @@
           </a:fontRef>
         </p:style>
       </p:cxnSp>
-      <p:cxnSp>
-        <p:nvCxnSpPr>
-          <p:cNvPr id="27" name="Straight Arrow Connector 26">
-            <a:extLst>
-              <a:ext uri="{FF2B5EF4-FFF2-40B4-BE49-F238E27FC236}">
-                <a16:creationId xmlns:a16="http://schemas.microsoft.com/office/drawing/2014/main" id="{5993FBC0-96E2-3CDE-8044-D05256C01469}"/>
-              </a:ext>
-            </a:extLst>
-          </p:cNvPr>
-          <p:cNvCxnSpPr>
-            <a:cxnSpLocks/>
-            <a:stCxn id="2" idx="3"/>
-            <a:endCxn id="3" idx="1"/>
-          </p:cNvCxnSpPr>
-          <p:nvPr/>
-        </p:nvCxnSpPr>
-        <p:spPr>
-          <a:xfrm flipV="1">
-            <a:off x="1713049" y="2663270"/>
-            <a:ext cx="1010874" cy="1078873"/>
-          </a:xfrm>
-          <a:prstGeom prst="straightConnector1">
-            <a:avLst/>
-          </a:prstGeom>
-          <a:ln>
-            <a:solidFill>
-              <a:srgbClr val="757575"/>
-            </a:solidFill>
-            <a:tailEnd type="triangle"/>
-          </a:ln>
-        </p:spPr>
-        <p:style>
-          <a:lnRef idx="2">
-            <a:schemeClr val="accent1"/>
-          </a:lnRef>
-          <a:fillRef idx="0">
-            <a:schemeClr val="accent1"/>
-          </a:fillRef>
-          <a:effectRef idx="1">
-            <a:schemeClr val="accent1"/>
-          </a:effectRef>
-          <a:fontRef idx="minor">
-            <a:schemeClr val="tx1"/>
-          </a:fontRef>
-        </p:style>
-      </p:cxnSp>
-      <p:cxnSp>
-        <p:nvCxnSpPr>
-          <p:cNvPr id="29" name="Straight Arrow Connector 28">
-            <a:extLst>
-              <a:ext uri="{FF2B5EF4-FFF2-40B4-BE49-F238E27FC236}">
-                <a16:creationId xmlns:a16="http://schemas.microsoft.com/office/drawing/2014/main" id="{B10018A6-7D38-F1F2-5AB2-6D03D77EFFBA}"/>
-              </a:ext>
-            </a:extLst>
-          </p:cNvPr>
-          <p:cNvCxnSpPr>
-            <a:cxnSpLocks/>
-            <a:stCxn id="2" idx="3"/>
-            <a:endCxn id="4" idx="1"/>
-          </p:cNvCxnSpPr>
-          <p:nvPr/>
-        </p:nvCxnSpPr>
-        <p:spPr>
-          <a:xfrm>
-            <a:off x="1713049" y="3742143"/>
-            <a:ext cx="1010874" cy="949080"/>
-          </a:xfrm>
-          <a:prstGeom prst="straightConnector1">
-            <a:avLst/>
-          </a:prstGeom>
-          <a:ln>
-            <a:solidFill>
-              <a:srgbClr val="757575"/>
-            </a:solidFill>
-            <a:tailEnd type="triangle"/>
-          </a:ln>
-        </p:spPr>
-        <p:style>
-          <a:lnRef idx="2">
-            <a:schemeClr val="accent1"/>
-          </a:lnRef>
-          <a:fillRef idx="0">
-            <a:schemeClr val="accent1"/>
-          </a:fillRef>
-          <a:effectRef idx="1">
-            <a:schemeClr val="accent1"/>
-          </a:effectRef>
-          <a:fontRef idx="minor">
-            <a:schemeClr val="tx1"/>
-          </a:fontRef>
-        </p:style>
-      </p:cxnSp>
+      <p:sp>
+        <p:nvSpPr>
+          <p:cNvPr id="17" name="TextBox 16">
+            <a:extLst>
+              <a:ext uri="{FF2B5EF4-FFF2-40B4-BE49-F238E27FC236}">
+                <a16:creationId xmlns:a16="http://schemas.microsoft.com/office/drawing/2014/main" id="{D22739F9-D39D-FA0A-2EDE-1D83AD563B6A}"/>
+              </a:ext>
+            </a:extLst>
+          </p:cNvPr>
+          <p:cNvSpPr txBox="1"/>
+          <p:nvPr/>
+        </p:nvSpPr>
+        <p:spPr>
+          <a:xfrm>
+            <a:off x="1261751" y="2076789"/>
+            <a:ext cx="1200094" cy="261610"/>
+          </a:xfrm>
+          <a:prstGeom prst="rect">
+            <a:avLst/>
+          </a:prstGeom>
+          <a:noFill/>
+        </p:spPr>
+        <p:txBody>
+          <a:bodyPr wrap="square" rtlCol="0">
+            <a:spAutoFit/>
+          </a:bodyPr>
+          <a:lstStyle/>
+          <a:p>
+            <a:r>
+              <a:rPr lang="en-US" sz="1100" b="1" dirty="0">
+                <a:solidFill>
+                  <a:srgbClr val="6E6E6E"/>
+                </a:solidFill>
+                <a:latin typeface="Times New Roman" panose="02020603050405020304" pitchFamily="18" charset="0"/>
+                <a:cs typeface="Times New Roman" panose="02020603050405020304" pitchFamily="18" charset="0"/>
+              </a:rPr>
+              <a:t>Input Request</a:t>
+            </a:r>
+          </a:p>
+        </p:txBody>
+      </p:sp>
+      <p:sp>
+        <p:nvSpPr>
+          <p:cNvPr id="18" name="TextBox 17">
+            <a:extLst>
+              <a:ext uri="{FF2B5EF4-FFF2-40B4-BE49-F238E27FC236}">
+                <a16:creationId xmlns:a16="http://schemas.microsoft.com/office/drawing/2014/main" id="{FF25F06D-ED35-FCE4-9259-3D3B53C2E71C}"/>
+              </a:ext>
+            </a:extLst>
+          </p:cNvPr>
+          <p:cNvSpPr txBox="1"/>
+          <p:nvPr/>
+        </p:nvSpPr>
+        <p:spPr>
+          <a:xfrm>
+            <a:off x="10530073" y="3034425"/>
+            <a:ext cx="766282" cy="261610"/>
+          </a:xfrm>
+          <a:prstGeom prst="rect">
+            <a:avLst/>
+          </a:prstGeom>
+          <a:noFill/>
+        </p:spPr>
+        <p:txBody>
+          <a:bodyPr wrap="square" rtlCol="0">
+            <a:spAutoFit/>
+          </a:bodyPr>
+          <a:lstStyle/>
+          <a:p>
+            <a:r>
+              <a:rPr lang="en-US" sz="1100" b="1" dirty="0">
+                <a:solidFill>
+                  <a:srgbClr val="6E6E6E"/>
+                </a:solidFill>
+                <a:latin typeface="Times New Roman" panose="02020603050405020304" pitchFamily="18" charset="0"/>
+                <a:cs typeface="Times New Roman" panose="02020603050405020304" pitchFamily="18" charset="0"/>
+              </a:rPr>
+              <a:t>Response</a:t>
+            </a:r>
+          </a:p>
+        </p:txBody>
+      </p:sp>
+      <p:sp>
+        <p:nvSpPr>
+          <p:cNvPr id="19" name="TextBox 18">
+            <a:extLst>
+              <a:ext uri="{FF2B5EF4-FFF2-40B4-BE49-F238E27FC236}">
+                <a16:creationId xmlns:a16="http://schemas.microsoft.com/office/drawing/2014/main" id="{4B76557E-C6E8-5357-CD1C-776605FCA4E0}"/>
+              </a:ext>
+            </a:extLst>
+          </p:cNvPr>
+          <p:cNvSpPr txBox="1"/>
+          <p:nvPr/>
+        </p:nvSpPr>
+        <p:spPr>
+          <a:xfrm>
+            <a:off x="4143738" y="407846"/>
+            <a:ext cx="3240910" cy="661720"/>
+          </a:xfrm>
+          <a:prstGeom prst="rect">
+            <a:avLst/>
+          </a:prstGeom>
+          <a:noFill/>
+        </p:spPr>
+        <p:txBody>
+          <a:bodyPr wrap="square" rtlCol="0">
+            <a:spAutoFit/>
+          </a:bodyPr>
+          <a:lstStyle/>
+          <a:p>
+            <a:pPr algn="ctr"/>
+            <a:r>
+              <a:rPr lang="en-US" sz="2500" b="1" dirty="0">
+                <a:latin typeface="Times New Roman" panose="02020603050405020304" pitchFamily="18" charset="0"/>
+                <a:cs typeface="Times New Roman" panose="02020603050405020304" pitchFamily="18" charset="0"/>
+              </a:rPr>
+              <a:t>What is the product?</a:t>
+            </a:r>
+          </a:p>
+          <a:p>
+            <a:pPr algn="ctr"/>
+            <a:r>
+              <a:rPr lang="en-US" sz="1200" b="1" dirty="0">
+                <a:latin typeface="Times New Roman" panose="02020603050405020304" pitchFamily="18" charset="0"/>
+                <a:cs typeface="Times New Roman" panose="02020603050405020304" pitchFamily="18" charset="0"/>
+              </a:rPr>
+              <a:t>Product Overview</a:t>
+            </a:r>
+          </a:p>
+        </p:txBody>
+      </p:sp>
       <p:pic>
         <p:nvPicPr>
-          <p:cNvPr id="35" name="Picture 34">
-            <a:extLst>
-              <a:ext uri="{FF2B5EF4-FFF2-40B4-BE49-F238E27FC236}">
-                <a16:creationId xmlns:a16="http://schemas.microsoft.com/office/drawing/2014/main" id="{D3D1A9A7-37A2-0851-FD21-035E2ADB21F9}"/>
+          <p:cNvPr id="20" name="Picture 19">
+            <a:extLst>
+              <a:ext uri="{FF2B5EF4-FFF2-40B4-BE49-F238E27FC236}">
+                <a16:creationId xmlns:a16="http://schemas.microsoft.com/office/drawing/2014/main" id="{62FCD204-BAB0-F2CB-EC1C-6AF66313CFB7}"/>
               </a:ext>
             </a:extLst>
           </p:cNvPr>
@@ -4378,268 +4333,55 @@
           <p:nvPr/>
         </p:nvPicPr>
         <p:blipFill>
-          <a:blip r:embed="rId5"/>
+          <a:blip r:embed="rId3"/>
           <a:stretch>
             <a:fillRect/>
           </a:stretch>
         </p:blipFill>
         <p:spPr>
           <a:xfrm>
-            <a:off x="5597080" y="3202706"/>
-            <a:ext cx="2330948" cy="1134009"/>
+            <a:off x="2356746" y="1659822"/>
+            <a:ext cx="7099267" cy="2027981"/>
           </a:xfrm>
           <a:prstGeom prst="rect">
             <a:avLst/>
           </a:prstGeom>
         </p:spPr>
       </p:pic>
-      <p:cxnSp>
-        <p:nvCxnSpPr>
-          <p:cNvPr id="10" name="Straight Connector 9">
-            <a:extLst>
-              <a:ext uri="{FF2B5EF4-FFF2-40B4-BE49-F238E27FC236}">
-                <a16:creationId xmlns:a16="http://schemas.microsoft.com/office/drawing/2014/main" id="{CA483101-29BD-8E55-CAE2-FD3F5D2AB3F9}"/>
-              </a:ext>
-            </a:extLst>
-          </p:cNvPr>
-          <p:cNvCxnSpPr/>
-          <p:nvPr/>
-        </p:nvCxnSpPr>
-        <p:spPr>
-          <a:xfrm>
-            <a:off x="5116007" y="1215342"/>
-            <a:ext cx="0" cy="5092861"/>
-          </a:xfrm>
-          <a:prstGeom prst="line">
-            <a:avLst/>
-          </a:prstGeom>
-          <a:ln>
-            <a:solidFill>
-              <a:srgbClr val="757575"/>
-            </a:solidFill>
-          </a:ln>
-        </p:spPr>
-        <p:style>
-          <a:lnRef idx="2">
-            <a:schemeClr val="accent1"/>
-          </a:lnRef>
-          <a:fillRef idx="0">
-            <a:schemeClr val="accent1"/>
-          </a:fillRef>
-          <a:effectRef idx="1">
-            <a:schemeClr val="accent1"/>
-          </a:effectRef>
-          <a:fontRef idx="minor">
-            <a:schemeClr val="tx1"/>
-          </a:fontRef>
-        </p:style>
-      </p:cxnSp>
-      <p:cxnSp>
-        <p:nvCxnSpPr>
-          <p:cNvPr id="17" name="Straight Connector 16">
-            <a:extLst>
-              <a:ext uri="{FF2B5EF4-FFF2-40B4-BE49-F238E27FC236}">
-                <a16:creationId xmlns:a16="http://schemas.microsoft.com/office/drawing/2014/main" id="{05E8E1D6-CC92-6774-378B-FC33676D26CD}"/>
-              </a:ext>
-            </a:extLst>
-          </p:cNvPr>
-          <p:cNvCxnSpPr/>
-          <p:nvPr/>
-        </p:nvCxnSpPr>
-        <p:spPr>
-          <a:xfrm>
-            <a:off x="8370422" y="1221473"/>
-            <a:ext cx="0" cy="5092861"/>
-          </a:xfrm>
-          <a:prstGeom prst="line">
-            <a:avLst/>
-          </a:prstGeom>
-          <a:ln>
-            <a:solidFill>
-              <a:srgbClr val="757575"/>
-            </a:solidFill>
-          </a:ln>
-        </p:spPr>
-        <p:style>
-          <a:lnRef idx="2">
-            <a:schemeClr val="accent1"/>
-          </a:lnRef>
-          <a:fillRef idx="0">
-            <a:schemeClr val="accent1"/>
-          </a:fillRef>
-          <a:effectRef idx="1">
-            <a:schemeClr val="accent1"/>
-          </a:effectRef>
-          <a:fontRef idx="minor">
-            <a:schemeClr val="tx1"/>
-          </a:fontRef>
-        </p:style>
-      </p:cxnSp>
-      <p:sp>
-        <p:nvSpPr>
-          <p:cNvPr id="21" name="TextBox 20">
-            <a:extLst>
-              <a:ext uri="{FF2B5EF4-FFF2-40B4-BE49-F238E27FC236}">
-                <a16:creationId xmlns:a16="http://schemas.microsoft.com/office/drawing/2014/main" id="{792DF4A2-2466-735B-3260-DF4733E10028}"/>
-              </a:ext>
-            </a:extLst>
-          </p:cNvPr>
-          <p:cNvSpPr txBox="1"/>
-          <p:nvPr/>
-        </p:nvSpPr>
-        <p:spPr>
-          <a:xfrm>
-            <a:off x="1520167" y="1076574"/>
-            <a:ext cx="2407512" cy="369332"/>
+      <p:pic>
+        <p:nvPicPr>
+          <p:cNvPr id="22" name="Picture 21">
+            <a:extLst>
+              <a:ext uri="{FF2B5EF4-FFF2-40B4-BE49-F238E27FC236}">
+                <a16:creationId xmlns:a16="http://schemas.microsoft.com/office/drawing/2014/main" id="{1B09A284-3EFE-E968-4348-15401C582893}"/>
+              </a:ext>
+            </a:extLst>
+          </p:cNvPr>
+          <p:cNvPicPr>
+            <a:picLocks noChangeAspect="1"/>
+          </p:cNvPicPr>
+          <p:nvPr/>
+        </p:nvPicPr>
+        <p:blipFill>
+          <a:blip r:embed="rId4"/>
+          <a:stretch>
+            <a:fillRect/>
+          </a:stretch>
+        </p:blipFill>
+        <p:spPr>
+          <a:xfrm>
+            <a:off x="4143738" y="4092335"/>
+            <a:ext cx="7772400" cy="2463560"/>
           </a:xfrm>
           <a:prstGeom prst="rect">
             <a:avLst/>
           </a:prstGeom>
-          <a:noFill/>
-        </p:spPr>
-        <p:txBody>
-          <a:bodyPr wrap="square" rtlCol="0">
-            <a:spAutoFit/>
-          </a:bodyPr>
-          <a:lstStyle/>
-          <a:p>
-            <a:r>
-              <a:rPr lang="en-US" b="1" dirty="0">
-                <a:solidFill>
-                  <a:srgbClr val="6E6E6E"/>
-                </a:solidFill>
-                <a:latin typeface="Times New Roman" panose="02020603050405020304" pitchFamily="18" charset="0"/>
-                <a:cs typeface="Times New Roman" panose="02020603050405020304" pitchFamily="18" charset="0"/>
-              </a:rPr>
-              <a:t>Domain &amp; Technology</a:t>
-            </a:r>
-          </a:p>
-        </p:txBody>
-      </p:sp>
-      <p:sp>
-        <p:nvSpPr>
-          <p:cNvPr id="22" name="TextBox 21">
-            <a:extLst>
-              <a:ext uri="{FF2B5EF4-FFF2-40B4-BE49-F238E27FC236}">
-                <a16:creationId xmlns:a16="http://schemas.microsoft.com/office/drawing/2014/main" id="{55E842A5-9880-DEDB-B6A1-C5D49D0CF13D}"/>
-              </a:ext>
-            </a:extLst>
-          </p:cNvPr>
-          <p:cNvSpPr txBox="1"/>
-          <p:nvPr/>
-        </p:nvSpPr>
-        <p:spPr>
-          <a:xfrm>
-            <a:off x="6070918" y="1076574"/>
-            <a:ext cx="1045580" cy="369332"/>
-          </a:xfrm>
-          <a:prstGeom prst="rect">
-            <a:avLst/>
-          </a:prstGeom>
-          <a:noFill/>
-        </p:spPr>
-        <p:txBody>
-          <a:bodyPr wrap="square" rtlCol="0">
-            <a:spAutoFit/>
-          </a:bodyPr>
-          <a:lstStyle/>
-          <a:p>
-            <a:r>
-              <a:rPr lang="en-US" b="1" dirty="0">
-                <a:solidFill>
-                  <a:srgbClr val="6E6E6E"/>
-                </a:solidFill>
-                <a:latin typeface="Times New Roman" panose="02020603050405020304" pitchFamily="18" charset="0"/>
-                <a:cs typeface="Times New Roman" panose="02020603050405020304" pitchFamily="18" charset="0"/>
-              </a:rPr>
-              <a:t>Product</a:t>
-            </a:r>
-          </a:p>
-        </p:txBody>
-      </p:sp>
-      <p:sp>
-        <p:nvSpPr>
-          <p:cNvPr id="24" name="TextBox 23">
-            <a:extLst>
-              <a:ext uri="{FF2B5EF4-FFF2-40B4-BE49-F238E27FC236}">
-                <a16:creationId xmlns:a16="http://schemas.microsoft.com/office/drawing/2014/main" id="{9598A33F-5B52-CE72-CFC1-CA69BDD6E659}"/>
-              </a:ext>
-            </a:extLst>
-          </p:cNvPr>
-          <p:cNvSpPr txBox="1"/>
-          <p:nvPr/>
-        </p:nvSpPr>
-        <p:spPr>
-          <a:xfrm>
-            <a:off x="9355231" y="1076574"/>
-            <a:ext cx="1684122" cy="369332"/>
-          </a:xfrm>
-          <a:prstGeom prst="rect">
-            <a:avLst/>
-          </a:prstGeom>
-          <a:noFill/>
-        </p:spPr>
-        <p:txBody>
-          <a:bodyPr wrap="square" rtlCol="0">
-            <a:spAutoFit/>
-          </a:bodyPr>
-          <a:lstStyle/>
-          <a:p>
-            <a:r>
-              <a:rPr lang="en-US" b="1" dirty="0">
-                <a:solidFill>
-                  <a:srgbClr val="6E6E6E"/>
-                </a:solidFill>
-                <a:latin typeface="Times New Roman" panose="02020603050405020304" pitchFamily="18" charset="0"/>
-                <a:cs typeface="Times New Roman" panose="02020603050405020304" pitchFamily="18" charset="0"/>
-              </a:rPr>
-              <a:t>Core Concepts</a:t>
-            </a:r>
-          </a:p>
-        </p:txBody>
-      </p:sp>
-      <p:sp>
-        <p:nvSpPr>
-          <p:cNvPr id="26" name="TextBox 25">
-            <a:extLst>
-              <a:ext uri="{FF2B5EF4-FFF2-40B4-BE49-F238E27FC236}">
-                <a16:creationId xmlns:a16="http://schemas.microsoft.com/office/drawing/2014/main" id="{E32B08A6-B97E-B691-EF8C-8E96D24559D1}"/>
-              </a:ext>
-            </a:extLst>
-          </p:cNvPr>
-          <p:cNvSpPr txBox="1"/>
-          <p:nvPr/>
-        </p:nvSpPr>
-        <p:spPr>
-          <a:xfrm>
-            <a:off x="3784928" y="241947"/>
-            <a:ext cx="4791908" cy="477054"/>
-          </a:xfrm>
-          <a:prstGeom prst="rect">
-            <a:avLst/>
-          </a:prstGeom>
-          <a:noFill/>
-        </p:spPr>
-        <p:txBody>
-          <a:bodyPr wrap="square" rtlCol="0">
-            <a:spAutoFit/>
-          </a:bodyPr>
-          <a:lstStyle/>
-          <a:p>
-            <a:r>
-              <a:rPr lang="en-US" sz="2500" b="1" dirty="0">
-                <a:latin typeface="Times New Roman" panose="02020603050405020304" pitchFamily="18" charset="0"/>
-                <a:cs typeface="Times New Roman" panose="02020603050405020304" pitchFamily="18" charset="0"/>
-              </a:rPr>
-              <a:t>High-Level Product Architecture</a:t>
-            </a:r>
-          </a:p>
-        </p:txBody>
-      </p:sp>
+        </p:spPr>
+      </p:pic>
     </p:spTree>
     <p:extLst>
       <p:ext uri="{BB962C8B-B14F-4D97-AF65-F5344CB8AC3E}">
-        <p14:creationId xmlns:p14="http://schemas.microsoft.com/office/powerpoint/2010/main" val="1674306470"/>
+        <p14:creationId xmlns:p14="http://schemas.microsoft.com/office/powerpoint/2010/main" val="3821872091"/>
       </p:ext>
     </p:extLst>
   </p:cSld>
@@ -4666,12 +4408,415 @@
           <a:chExt cx="0" cy="0"/>
         </a:xfrm>
       </p:grpSpPr>
+      <p:sp>
+        <p:nvSpPr>
+          <p:cNvPr id="2" name="TextBox 1">
+            <a:extLst>
+              <a:ext uri="{FF2B5EF4-FFF2-40B4-BE49-F238E27FC236}">
+                <a16:creationId xmlns:a16="http://schemas.microsoft.com/office/drawing/2014/main" id="{1B819549-A688-AF8D-0903-9A199920F706}"/>
+              </a:ext>
+            </a:extLst>
+          </p:cNvPr>
+          <p:cNvSpPr txBox="1"/>
+          <p:nvPr/>
+        </p:nvSpPr>
+        <p:spPr>
+          <a:xfrm>
+            <a:off x="4286731" y="470245"/>
+            <a:ext cx="4791908" cy="477054"/>
+          </a:xfrm>
+          <a:prstGeom prst="rect">
+            <a:avLst/>
+          </a:prstGeom>
+          <a:noFill/>
+        </p:spPr>
+        <p:txBody>
+          <a:bodyPr wrap="square" rtlCol="0">
+            <a:spAutoFit/>
+          </a:bodyPr>
+          <a:lstStyle/>
+          <a:p>
+            <a:r>
+              <a:rPr lang="en-US" sz="2500" b="1" dirty="0">
+                <a:latin typeface="Times New Roman" panose="02020603050405020304" pitchFamily="18" charset="0"/>
+                <a:cs typeface="Times New Roman" panose="02020603050405020304" pitchFamily="18" charset="0"/>
+              </a:rPr>
+              <a:t>Motivation</a:t>
+            </a:r>
+          </a:p>
+        </p:txBody>
+      </p:sp>
+      <p:sp>
+        <p:nvSpPr>
+          <p:cNvPr id="8" name="TextBox 7">
+            <a:extLst>
+              <a:ext uri="{FF2B5EF4-FFF2-40B4-BE49-F238E27FC236}">
+                <a16:creationId xmlns:a16="http://schemas.microsoft.com/office/drawing/2014/main" id="{13BF581C-B7F0-1C87-66E8-37947C30326C}"/>
+              </a:ext>
+            </a:extLst>
+          </p:cNvPr>
+          <p:cNvSpPr txBox="1"/>
+          <p:nvPr/>
+        </p:nvSpPr>
+        <p:spPr>
+          <a:xfrm>
+            <a:off x="2788621" y="1508565"/>
+            <a:ext cx="4769254" cy="246221"/>
+          </a:xfrm>
+          <a:prstGeom prst="rect">
+            <a:avLst/>
+          </a:prstGeom>
+          <a:noFill/>
+        </p:spPr>
+        <p:txBody>
+          <a:bodyPr wrap="none" rtlCol="0">
+            <a:spAutoFit/>
+          </a:bodyPr>
+          <a:lstStyle/>
+          <a:p>
+            <a:r>
+              <a:rPr lang="en-IN" sz="1000" dirty="0">
+                <a:latin typeface="Times New Roman" panose="02020603050405020304" pitchFamily="18" charset="0"/>
+                <a:cs typeface="Times New Roman" panose="02020603050405020304" pitchFamily="18" charset="0"/>
+                <a:hlinkClick r:id="rId3"/>
+              </a:rPr>
+              <a:t>Increasing utilization of chest imaging in US emergency departments from 1994 to 2015 </a:t>
+            </a:r>
+            <a:endParaRPr lang="en-IN" sz="1000" dirty="0">
+              <a:latin typeface="Times New Roman" panose="02020603050405020304" pitchFamily="18" charset="0"/>
+              <a:cs typeface="Times New Roman" panose="02020603050405020304" pitchFamily="18" charset="0"/>
+            </a:endParaRPr>
+          </a:p>
+        </p:txBody>
+      </p:sp>
+      <p:sp>
+        <p:nvSpPr>
+          <p:cNvPr id="10" name="TextBox 9">
+            <a:extLst>
+              <a:ext uri="{FF2B5EF4-FFF2-40B4-BE49-F238E27FC236}">
+                <a16:creationId xmlns:a16="http://schemas.microsoft.com/office/drawing/2014/main" id="{89D0E622-C4C6-1061-E29C-416ECE4A0ACE}"/>
+              </a:ext>
+            </a:extLst>
+          </p:cNvPr>
+          <p:cNvSpPr txBox="1"/>
+          <p:nvPr/>
+        </p:nvSpPr>
+        <p:spPr>
+          <a:xfrm>
+            <a:off x="2925597" y="1785825"/>
+            <a:ext cx="2449710" cy="246221"/>
+          </a:xfrm>
+          <a:prstGeom prst="rect">
+            <a:avLst/>
+          </a:prstGeom>
+          <a:noFill/>
+        </p:spPr>
+        <p:txBody>
+          <a:bodyPr wrap="none" rtlCol="0">
+            <a:spAutoFit/>
+          </a:bodyPr>
+          <a:lstStyle/>
+          <a:p>
+            <a:r>
+              <a:rPr lang="en-US" sz="1000" dirty="0">
+                <a:latin typeface="Times New Roman" panose="02020603050405020304" pitchFamily="18" charset="0"/>
+                <a:cs typeface="Times New Roman" panose="02020603050405020304" pitchFamily="18" charset="0"/>
+              </a:rPr>
+              <a:t>(173% of chest imaging per 1000 ED visits)</a:t>
+            </a:r>
+          </a:p>
+        </p:txBody>
+      </p:sp>
+      <p:cxnSp>
+        <p:nvCxnSpPr>
+          <p:cNvPr id="13" name="Straight Arrow Connector 12">
+            <a:extLst>
+              <a:ext uri="{FF2B5EF4-FFF2-40B4-BE49-F238E27FC236}">
+                <a16:creationId xmlns:a16="http://schemas.microsoft.com/office/drawing/2014/main" id="{ADDA080A-43CB-689A-5B20-E22924085E11}"/>
+              </a:ext>
+            </a:extLst>
+          </p:cNvPr>
+          <p:cNvCxnSpPr>
+            <a:cxnSpLocks/>
+          </p:cNvCxnSpPr>
+          <p:nvPr/>
+        </p:nvCxnSpPr>
+        <p:spPr>
+          <a:xfrm flipV="1">
+            <a:off x="2925597" y="1785824"/>
+            <a:ext cx="0" cy="246221"/>
+          </a:xfrm>
+          <a:prstGeom prst="straightConnector1">
+            <a:avLst/>
+          </a:prstGeom>
+          <a:ln>
+            <a:tailEnd type="triangle"/>
+          </a:ln>
+        </p:spPr>
+        <p:style>
+          <a:lnRef idx="2">
+            <a:schemeClr val="dk1"/>
+          </a:lnRef>
+          <a:fillRef idx="0">
+            <a:schemeClr val="dk1"/>
+          </a:fillRef>
+          <a:effectRef idx="1">
+            <a:schemeClr val="dk1"/>
+          </a:effectRef>
+          <a:fontRef idx="minor">
+            <a:schemeClr val="tx1"/>
+          </a:fontRef>
+        </p:style>
+      </p:cxnSp>
+      <p:sp>
+        <p:nvSpPr>
+          <p:cNvPr id="15" name="TextBox 14">
+            <a:extLst>
+              <a:ext uri="{FF2B5EF4-FFF2-40B4-BE49-F238E27FC236}">
+                <a16:creationId xmlns:a16="http://schemas.microsoft.com/office/drawing/2014/main" id="{BDA68628-9317-0E26-3E35-991C6CA72217}"/>
+              </a:ext>
+            </a:extLst>
+          </p:cNvPr>
+          <p:cNvSpPr txBox="1"/>
+          <p:nvPr/>
+        </p:nvSpPr>
+        <p:spPr>
+          <a:xfrm>
+            <a:off x="3912569" y="2502924"/>
+            <a:ext cx="2310248" cy="246221"/>
+          </a:xfrm>
+          <a:prstGeom prst="rect">
+            <a:avLst/>
+          </a:prstGeom>
+          <a:noFill/>
+        </p:spPr>
+        <p:txBody>
+          <a:bodyPr wrap="none" rtlCol="0">
+            <a:spAutoFit/>
+          </a:bodyPr>
+          <a:lstStyle/>
+          <a:p>
+            <a:r>
+              <a:rPr lang="en-IN" sz="1000" dirty="0">
+                <a:latin typeface="Times New Roman" panose="02020603050405020304" pitchFamily="18" charset="0"/>
+                <a:cs typeface="Times New Roman" panose="02020603050405020304" pitchFamily="18" charset="0"/>
+                <a:hlinkClick r:id="rId4"/>
+              </a:rPr>
+              <a:t>Errors in Radiology: A Standard Review </a:t>
+            </a:r>
+            <a:endParaRPr lang="en-IN" sz="1000" dirty="0">
+              <a:latin typeface="Times New Roman" panose="02020603050405020304" pitchFamily="18" charset="0"/>
+              <a:cs typeface="Times New Roman" panose="02020603050405020304" pitchFamily="18" charset="0"/>
+            </a:endParaRPr>
+          </a:p>
+        </p:txBody>
+      </p:sp>
+      <p:sp>
+        <p:nvSpPr>
+          <p:cNvPr id="17" name="TextBox 16">
+            <a:extLst>
+              <a:ext uri="{FF2B5EF4-FFF2-40B4-BE49-F238E27FC236}">
+                <a16:creationId xmlns:a16="http://schemas.microsoft.com/office/drawing/2014/main" id="{EFED45EE-6F7E-2F3F-0C84-FF7F69C27DF1}"/>
+              </a:ext>
+            </a:extLst>
+          </p:cNvPr>
+          <p:cNvSpPr txBox="1"/>
+          <p:nvPr/>
+        </p:nvSpPr>
+        <p:spPr>
+          <a:xfrm>
+            <a:off x="3912569" y="2769679"/>
+            <a:ext cx="4225837" cy="246221"/>
+          </a:xfrm>
+          <a:prstGeom prst="rect">
+            <a:avLst/>
+          </a:prstGeom>
+          <a:noFill/>
+        </p:spPr>
+        <p:txBody>
+          <a:bodyPr wrap="none" rtlCol="0">
+            <a:spAutoFit/>
+          </a:bodyPr>
+          <a:lstStyle/>
+          <a:p>
+            <a:r>
+              <a:rPr lang="en-US" sz="1000" dirty="0">
+                <a:latin typeface="Times New Roman" panose="02020603050405020304" pitchFamily="18" charset="0"/>
+                <a:cs typeface="Times New Roman" panose="02020603050405020304" pitchFamily="18" charset="0"/>
+              </a:rPr>
+              <a:t>(42% - underreading, 22% satisfaction-of-search, 9% faculty reasoning errors)</a:t>
+            </a:r>
+          </a:p>
+        </p:txBody>
+      </p:sp>
+      <p:sp>
+        <p:nvSpPr>
+          <p:cNvPr id="18" name="TextBox 17">
+            <a:extLst>
+              <a:ext uri="{FF2B5EF4-FFF2-40B4-BE49-F238E27FC236}">
+                <a16:creationId xmlns:a16="http://schemas.microsoft.com/office/drawing/2014/main" id="{93E98F2E-ACAF-9E37-12EB-06AB8F718162}"/>
+              </a:ext>
+            </a:extLst>
+          </p:cNvPr>
+          <p:cNvSpPr txBox="1"/>
+          <p:nvPr/>
+        </p:nvSpPr>
+        <p:spPr>
+          <a:xfrm>
+            <a:off x="5053827" y="3557905"/>
+            <a:ext cx="2759089" cy="246221"/>
+          </a:xfrm>
+          <a:prstGeom prst="rect">
+            <a:avLst/>
+          </a:prstGeom>
+          <a:noFill/>
+        </p:spPr>
+        <p:txBody>
+          <a:bodyPr wrap="none" rtlCol="0">
+            <a:spAutoFit/>
+          </a:bodyPr>
+          <a:lstStyle/>
+          <a:p>
+            <a:r>
+              <a:rPr lang="en-IN" sz="1000" dirty="0">
+                <a:latin typeface="Times New Roman" panose="02020603050405020304" pitchFamily="18" charset="0"/>
+                <a:cs typeface="Times New Roman" panose="02020603050405020304" pitchFamily="18" charset="0"/>
+                <a:hlinkClick r:id="rId5"/>
+              </a:rPr>
+              <a:t>Work overload and diagnostic errors in radiology </a:t>
+            </a:r>
+            <a:endParaRPr lang="en-IN" sz="1000" dirty="0">
+              <a:latin typeface="Times New Roman" panose="02020603050405020304" pitchFamily="18" charset="0"/>
+              <a:cs typeface="Times New Roman" panose="02020603050405020304" pitchFamily="18" charset="0"/>
+            </a:endParaRPr>
+          </a:p>
+        </p:txBody>
+      </p:sp>
+      <p:sp>
+        <p:nvSpPr>
+          <p:cNvPr id="19" name="TextBox 18">
+            <a:extLst>
+              <a:ext uri="{FF2B5EF4-FFF2-40B4-BE49-F238E27FC236}">
+                <a16:creationId xmlns:a16="http://schemas.microsoft.com/office/drawing/2014/main" id="{D386BC7E-F179-9243-0D12-F6D044E0643A}"/>
+              </a:ext>
+            </a:extLst>
+          </p:cNvPr>
+          <p:cNvSpPr txBox="1"/>
+          <p:nvPr/>
+        </p:nvSpPr>
+        <p:spPr>
+          <a:xfrm>
+            <a:off x="5053827" y="3815693"/>
+            <a:ext cx="5630067" cy="246221"/>
+          </a:xfrm>
+          <a:prstGeom prst="rect">
+            <a:avLst/>
+          </a:prstGeom>
+          <a:noFill/>
+        </p:spPr>
+        <p:txBody>
+          <a:bodyPr wrap="none" rtlCol="0">
+            <a:spAutoFit/>
+          </a:bodyPr>
+          <a:lstStyle/>
+          <a:p>
+            <a:r>
+              <a:rPr lang="en-US" sz="1000" dirty="0">
+                <a:latin typeface="Times New Roman" panose="02020603050405020304" pitchFamily="18" charset="0"/>
+                <a:cs typeface="Times New Roman" panose="02020603050405020304" pitchFamily="18" charset="0"/>
+              </a:rPr>
+              <a:t>(Recent study in 2023 says, radiologists who made diagnostic errors had an avg. of 121% daily workload)</a:t>
+            </a:r>
+          </a:p>
+        </p:txBody>
+      </p:sp>
+      <p:sp>
+        <p:nvSpPr>
+          <p:cNvPr id="20" name="TextBox 19">
+            <a:extLst>
+              <a:ext uri="{FF2B5EF4-FFF2-40B4-BE49-F238E27FC236}">
+                <a16:creationId xmlns:a16="http://schemas.microsoft.com/office/drawing/2014/main" id="{94B4B2BD-2C5E-2407-0FF6-C52EB6C9F83A}"/>
+              </a:ext>
+            </a:extLst>
+          </p:cNvPr>
+          <p:cNvSpPr txBox="1"/>
+          <p:nvPr/>
+        </p:nvSpPr>
+        <p:spPr>
+          <a:xfrm>
+            <a:off x="6156913" y="4634528"/>
+            <a:ext cx="5020926" cy="246221"/>
+          </a:xfrm>
+          <a:prstGeom prst="rect">
+            <a:avLst/>
+          </a:prstGeom>
+          <a:noFill/>
+        </p:spPr>
+        <p:txBody>
+          <a:bodyPr wrap="none" rtlCol="0">
+            <a:spAutoFit/>
+          </a:bodyPr>
+          <a:lstStyle/>
+          <a:p>
+            <a:r>
+              <a:rPr lang="en-IN" sz="1000" dirty="0">
+                <a:latin typeface="Times New Roman" panose="02020603050405020304" pitchFamily="18" charset="0"/>
+                <a:cs typeface="Times New Roman" panose="02020603050405020304" pitchFamily="18" charset="0"/>
+                <a:hlinkClick r:id="rId6"/>
+              </a:rPr>
+              <a:t>Classification of Paediatric Pneumonia Using Modified DenseNet-121 Deep-Learning Model </a:t>
+            </a:r>
+            <a:endParaRPr lang="en-IN" sz="1000" dirty="0">
+              <a:latin typeface="Times New Roman" panose="02020603050405020304" pitchFamily="18" charset="0"/>
+              <a:cs typeface="Times New Roman" panose="02020603050405020304" pitchFamily="18" charset="0"/>
+            </a:endParaRPr>
+          </a:p>
+        </p:txBody>
+      </p:sp>
+      <p:sp>
+        <p:nvSpPr>
+          <p:cNvPr id="21" name="TextBox 20">
+            <a:extLst>
+              <a:ext uri="{FF2B5EF4-FFF2-40B4-BE49-F238E27FC236}">
+                <a16:creationId xmlns:a16="http://schemas.microsoft.com/office/drawing/2014/main" id="{76157C13-0851-C82B-60EA-F9B9751DBE1C}"/>
+              </a:ext>
+            </a:extLst>
+          </p:cNvPr>
+          <p:cNvSpPr txBox="1"/>
+          <p:nvPr/>
+        </p:nvSpPr>
+        <p:spPr>
+          <a:xfrm>
+            <a:off x="6156913" y="4880749"/>
+            <a:ext cx="4562890" cy="400110"/>
+          </a:xfrm>
+          <a:prstGeom prst="rect">
+            <a:avLst/>
+          </a:prstGeom>
+          <a:noFill/>
+        </p:spPr>
+        <p:txBody>
+          <a:bodyPr wrap="square" rtlCol="0">
+            <a:spAutoFit/>
+          </a:bodyPr>
+          <a:lstStyle/>
+          <a:p>
+            <a:r>
+              <a:rPr lang="en-US" sz="1000" dirty="0">
+                <a:latin typeface="Times New Roman" panose="02020603050405020304" pitchFamily="18" charset="0"/>
+                <a:cs typeface="Times New Roman" panose="02020603050405020304" pitchFamily="18" charset="0"/>
+              </a:rPr>
+              <a:t>(Deep Learning based approaches such as DenseNet121 CNN showcased reliability of 97.3% in pneumonia detection)</a:t>
+            </a:r>
+          </a:p>
+        </p:txBody>
+      </p:sp>
       <p:pic>
         <p:nvPicPr>
-          <p:cNvPr id="3" name="Picture 2">
-            <a:extLst>
-              <a:ext uri="{FF2B5EF4-FFF2-40B4-BE49-F238E27FC236}">
-                <a16:creationId xmlns:a16="http://schemas.microsoft.com/office/drawing/2014/main" id="{F699585F-251F-EDD7-5D16-2D476BAC7ACF}"/>
+          <p:cNvPr id="22" name="Picture 21">
+            <a:extLst>
+              <a:ext uri="{FF2B5EF4-FFF2-40B4-BE49-F238E27FC236}">
+                <a16:creationId xmlns:a16="http://schemas.microsoft.com/office/drawing/2014/main" id="{2B11B61F-C02B-310C-8DF8-6FFF41E43391}"/>
               </a:ext>
             </a:extLst>
           </p:cNvPr>
@@ -4681,27 +4826,144 @@
           <p:nvPr/>
         </p:nvPicPr>
         <p:blipFill>
-          <a:blip r:embed="rId2"/>
+          <a:blip r:embed="rId7"/>
           <a:stretch>
             <a:fillRect/>
           </a:stretch>
         </p:blipFill>
         <p:spPr>
           <a:xfrm>
-            <a:off x="858126" y="3687803"/>
-            <a:ext cx="850705" cy="1042462"/>
+            <a:off x="1045746" y="2823948"/>
+            <a:ext cx="1374289" cy="1210104"/>
           </a:xfrm>
           <a:prstGeom prst="rect">
             <a:avLst/>
           </a:prstGeom>
         </p:spPr>
       </p:pic>
-      <p:sp>
-        <p:nvSpPr>
-          <p:cNvPr id="4" name="TextBox 3">
-            <a:extLst>
-              <a:ext uri="{FF2B5EF4-FFF2-40B4-BE49-F238E27FC236}">
-                <a16:creationId xmlns:a16="http://schemas.microsoft.com/office/drawing/2014/main" id="{3C602E6E-80E3-6EB6-6695-959BE3E7CE1A}"/>
+      <p:cxnSp>
+        <p:nvCxnSpPr>
+          <p:cNvPr id="28" name="Straight Arrow Connector 27">
+            <a:extLst>
+              <a:ext uri="{FF2B5EF4-FFF2-40B4-BE49-F238E27FC236}">
+                <a16:creationId xmlns:a16="http://schemas.microsoft.com/office/drawing/2014/main" id="{8A9D49C2-071B-5CF8-327B-0C0DCD44E599}"/>
+              </a:ext>
+            </a:extLst>
+          </p:cNvPr>
+          <p:cNvCxnSpPr/>
+          <p:nvPr/>
+        </p:nvCxnSpPr>
+        <p:spPr>
+          <a:xfrm>
+            <a:off x="5173248" y="2032045"/>
+            <a:ext cx="0" cy="333784"/>
+          </a:xfrm>
+          <a:prstGeom prst="straightConnector1">
+            <a:avLst/>
+          </a:prstGeom>
+          <a:ln>
+            <a:tailEnd type="triangle"/>
+          </a:ln>
+        </p:spPr>
+        <p:style>
+          <a:lnRef idx="2">
+            <a:schemeClr val="dk1"/>
+          </a:lnRef>
+          <a:fillRef idx="0">
+            <a:schemeClr val="dk1"/>
+          </a:fillRef>
+          <a:effectRef idx="1">
+            <a:schemeClr val="dk1"/>
+          </a:effectRef>
+          <a:fontRef idx="minor">
+            <a:schemeClr val="tx1"/>
+          </a:fontRef>
+        </p:style>
+      </p:cxnSp>
+      <p:cxnSp>
+        <p:nvCxnSpPr>
+          <p:cNvPr id="29" name="Straight Arrow Connector 28">
+            <a:extLst>
+              <a:ext uri="{FF2B5EF4-FFF2-40B4-BE49-F238E27FC236}">
+                <a16:creationId xmlns:a16="http://schemas.microsoft.com/office/drawing/2014/main" id="{32C4FA03-A765-3796-DC6E-72AA5EA6FD85}"/>
+              </a:ext>
+            </a:extLst>
+          </p:cNvPr>
+          <p:cNvCxnSpPr/>
+          <p:nvPr/>
+        </p:nvCxnSpPr>
+        <p:spPr>
+          <a:xfrm>
+            <a:off x="6096000" y="3124244"/>
+            <a:ext cx="0" cy="333784"/>
+          </a:xfrm>
+          <a:prstGeom prst="straightConnector1">
+            <a:avLst/>
+          </a:prstGeom>
+          <a:ln>
+            <a:tailEnd type="triangle"/>
+          </a:ln>
+        </p:spPr>
+        <p:style>
+          <a:lnRef idx="2">
+            <a:schemeClr val="dk1"/>
+          </a:lnRef>
+          <a:fillRef idx="0">
+            <a:schemeClr val="dk1"/>
+          </a:fillRef>
+          <a:effectRef idx="1">
+            <a:schemeClr val="dk1"/>
+          </a:effectRef>
+          <a:fontRef idx="minor">
+            <a:schemeClr val="tx1"/>
+          </a:fontRef>
+        </p:style>
+      </p:cxnSp>
+      <p:cxnSp>
+        <p:nvCxnSpPr>
+          <p:cNvPr id="30" name="Straight Arrow Connector 29">
+            <a:extLst>
+              <a:ext uri="{FF2B5EF4-FFF2-40B4-BE49-F238E27FC236}">
+                <a16:creationId xmlns:a16="http://schemas.microsoft.com/office/drawing/2014/main" id="{9408774D-A67B-BDAE-3F97-597D45B6DE89}"/>
+              </a:ext>
+            </a:extLst>
+          </p:cNvPr>
+          <p:cNvCxnSpPr/>
+          <p:nvPr/>
+        </p:nvCxnSpPr>
+        <p:spPr>
+          <a:xfrm>
+            <a:off x="7235374" y="4228174"/>
+            <a:ext cx="0" cy="333784"/>
+          </a:xfrm>
+          <a:prstGeom prst="straightConnector1">
+            <a:avLst/>
+          </a:prstGeom>
+          <a:ln>
+            <a:tailEnd type="triangle"/>
+          </a:ln>
+        </p:spPr>
+        <p:style>
+          <a:lnRef idx="2">
+            <a:schemeClr val="dk1"/>
+          </a:lnRef>
+          <a:fillRef idx="0">
+            <a:schemeClr val="dk1"/>
+          </a:fillRef>
+          <a:effectRef idx="1">
+            <a:schemeClr val="dk1"/>
+          </a:effectRef>
+          <a:fontRef idx="minor">
+            <a:schemeClr val="tx1"/>
+          </a:fontRef>
+        </p:style>
+      </p:cxnSp>
+      <p:sp>
+        <p:nvSpPr>
+          <p:cNvPr id="31" name="TextBox 30">
+            <a:extLst>
+              <a:ext uri="{FF2B5EF4-FFF2-40B4-BE49-F238E27FC236}">
+                <a16:creationId xmlns:a16="http://schemas.microsoft.com/office/drawing/2014/main" id="{8850401A-A55E-C708-DFC8-FC7C069673E4}"/>
               </a:ext>
             </a:extLst>
           </p:cNvPr>
@@ -4710,8 +4972,8 @@
         </p:nvSpPr>
         <p:spPr>
           <a:xfrm>
-            <a:off x="694701" y="4707115"/>
-            <a:ext cx="1232573" cy="261610"/>
+            <a:off x="344056" y="4150754"/>
+            <a:ext cx="3189372" cy="553998"/>
           </a:xfrm>
           <a:prstGeom prst="rect">
             <a:avLst/>
@@ -4724,29 +4986,105 @@
           </a:bodyPr>
           <a:lstStyle/>
           <a:p>
-            <a:r>
-              <a:rPr lang="en-US" sz="1100" dirty="0">
-                <a:latin typeface="Times New Roman" panose="02020603050405020304" pitchFamily="18" charset="0"/>
-                <a:cs typeface="Times New Roman" panose="02020603050405020304" pitchFamily="18" charset="0"/>
-              </a:rPr>
-              <a:t>User: </a:t>
-            </a:r>
-            <a:r>
-              <a:rPr lang="en-US" sz="1100" b="1" dirty="0">
-                <a:latin typeface="Times New Roman" panose="02020603050405020304" pitchFamily="18" charset="0"/>
-                <a:cs typeface="Times New Roman" panose="02020603050405020304" pitchFamily="18" charset="0"/>
-              </a:rPr>
-              <a:t>Radiologist</a:t>
+            <a:pPr algn="just"/>
+            <a:r>
+              <a:rPr lang="en-US" sz="1000" dirty="0">
+                <a:latin typeface="Times New Roman" panose="02020603050405020304" pitchFamily="18" charset="0"/>
+                <a:cs typeface="Times New Roman" panose="02020603050405020304" pitchFamily="18" charset="0"/>
+              </a:rPr>
+              <a:t>(Frequently used imaging procedure globally in diagnosing various thoracic conditions like pneumonia, infiltration, consolidation, hernia)</a:t>
+            </a:r>
+          </a:p>
+        </p:txBody>
+      </p:sp>
+      <p:sp>
+        <p:nvSpPr>
+          <p:cNvPr id="33" name="TextBox 32">
+            <a:extLst>
+              <a:ext uri="{FF2B5EF4-FFF2-40B4-BE49-F238E27FC236}">
+                <a16:creationId xmlns:a16="http://schemas.microsoft.com/office/drawing/2014/main" id="{82DB16B6-CC20-4053-FEF9-3146E567EED1}"/>
+              </a:ext>
+            </a:extLst>
+          </p:cNvPr>
+          <p:cNvSpPr txBox="1"/>
+          <p:nvPr/>
+        </p:nvSpPr>
+        <p:spPr>
+          <a:xfrm>
+            <a:off x="6156913" y="3177056"/>
+            <a:ext cx="3483646" cy="400110"/>
+          </a:xfrm>
+          <a:prstGeom prst="rect">
+            <a:avLst/>
+          </a:prstGeom>
+          <a:noFill/>
+        </p:spPr>
+        <p:txBody>
+          <a:bodyPr wrap="none" rtlCol="0">
+            <a:spAutoFit/>
+          </a:bodyPr>
+          <a:lstStyle/>
+          <a:p>
+            <a:r>
+              <a:rPr lang="en-US" sz="1000" b="1" dirty="0">
+                <a:latin typeface="Times New Roman" panose="02020603050405020304" pitchFamily="18" charset="0"/>
+                <a:cs typeface="Times New Roman" panose="02020603050405020304" pitchFamily="18" charset="0"/>
+              </a:rPr>
+              <a:t>Radiologist’s inefficiencies leading to X-ray reading errors ?</a:t>
+            </a:r>
+          </a:p>
+          <a:p>
+            <a:endParaRPr lang="en-US" sz="1000" dirty="0">
+              <a:latin typeface="Times New Roman" panose="02020603050405020304" pitchFamily="18" charset="0"/>
+              <a:cs typeface="Times New Roman" panose="02020603050405020304" pitchFamily="18" charset="0"/>
+            </a:endParaRPr>
+          </a:p>
+        </p:txBody>
+      </p:sp>
+      <p:sp>
+        <p:nvSpPr>
+          <p:cNvPr id="34" name="TextBox 33">
+            <a:extLst>
+              <a:ext uri="{FF2B5EF4-FFF2-40B4-BE49-F238E27FC236}">
+                <a16:creationId xmlns:a16="http://schemas.microsoft.com/office/drawing/2014/main" id="{4EEB2BDA-1000-00FD-2687-F31178B60B57}"/>
+              </a:ext>
+            </a:extLst>
+          </p:cNvPr>
+          <p:cNvSpPr txBox="1"/>
+          <p:nvPr/>
+        </p:nvSpPr>
+        <p:spPr>
+          <a:xfrm>
+            <a:off x="7315201" y="4271955"/>
+            <a:ext cx="1281120" cy="246221"/>
+          </a:xfrm>
+          <a:prstGeom prst="rect">
+            <a:avLst/>
+          </a:prstGeom>
+          <a:noFill/>
+        </p:spPr>
+        <p:txBody>
+          <a:bodyPr wrap="none" rtlCol="0">
+            <a:spAutoFit/>
+          </a:bodyPr>
+          <a:lstStyle/>
+          <a:p>
+            <a:r>
+              <a:rPr lang="en-US" sz="1000" b="1" dirty="0">
+                <a:latin typeface="Times New Roman" panose="02020603050405020304" pitchFamily="18" charset="0"/>
+                <a:cs typeface="Times New Roman" panose="02020603050405020304" pitchFamily="18" charset="0"/>
+              </a:rPr>
+              <a:t>Accuracy at speed ?</a:t>
             </a:r>
           </a:p>
         </p:txBody>
       </p:sp>
       <p:cxnSp>
         <p:nvCxnSpPr>
-          <p:cNvPr id="12" name="Elbow Connector 11">
-            <a:extLst>
-              <a:ext uri="{FF2B5EF4-FFF2-40B4-BE49-F238E27FC236}">
-                <a16:creationId xmlns:a16="http://schemas.microsoft.com/office/drawing/2014/main" id="{128F1D74-004D-96F7-8BA7-7A1FAEBE4193}"/>
+          <p:cNvPr id="35" name="Straight Arrow Connector 34">
+            <a:extLst>
+              <a:ext uri="{FF2B5EF4-FFF2-40B4-BE49-F238E27FC236}">
+                <a16:creationId xmlns:a16="http://schemas.microsoft.com/office/drawing/2014/main" id="{6AA3AE22-79BA-1081-0FF7-9E6B29BCCC5F}"/>
               </a:ext>
             </a:extLst>
           </p:cNvPr>
@@ -4754,14 +5092,923 @@
           <p:nvPr/>
         </p:nvCxnSpPr>
         <p:spPr>
-          <a:xfrm flipV="1">
-            <a:off x="1294228" y="2419643"/>
-            <a:ext cx="1026941" cy="844062"/>
-          </a:xfrm>
-          <a:prstGeom prst="bentConnector3">
-            <a:avLst>
-              <a:gd name="adj1" fmla="val -685"/>
-            </a:avLst>
+          <a:xfrm>
+            <a:off x="8056847" y="5439940"/>
+            <a:ext cx="0" cy="333784"/>
+          </a:xfrm>
+          <a:prstGeom prst="straightConnector1">
+            <a:avLst/>
+          </a:prstGeom>
+          <a:ln>
+            <a:tailEnd type="triangle"/>
+          </a:ln>
+        </p:spPr>
+        <p:style>
+          <a:lnRef idx="2">
+            <a:schemeClr val="dk1"/>
+          </a:lnRef>
+          <a:fillRef idx="0">
+            <a:schemeClr val="dk1"/>
+          </a:fillRef>
+          <a:effectRef idx="1">
+            <a:schemeClr val="dk1"/>
+          </a:effectRef>
+          <a:fontRef idx="minor">
+            <a:schemeClr val="tx1"/>
+          </a:fontRef>
+        </p:style>
+      </p:cxnSp>
+      <p:sp>
+        <p:nvSpPr>
+          <p:cNvPr id="38" name="TextBox 37">
+            <a:extLst>
+              <a:ext uri="{FF2B5EF4-FFF2-40B4-BE49-F238E27FC236}">
+                <a16:creationId xmlns:a16="http://schemas.microsoft.com/office/drawing/2014/main" id="{47E46E34-1561-F2DB-B1C1-B1B1E2F515BD}"/>
+              </a:ext>
+            </a:extLst>
+          </p:cNvPr>
+          <p:cNvSpPr txBox="1"/>
+          <p:nvPr/>
+        </p:nvSpPr>
+        <p:spPr>
+          <a:xfrm>
+            <a:off x="6025487" y="5956441"/>
+            <a:ext cx="4761240" cy="246221"/>
+          </a:xfrm>
+          <a:prstGeom prst="rect">
+            <a:avLst/>
+          </a:prstGeom>
+          <a:noFill/>
+        </p:spPr>
+        <p:txBody>
+          <a:bodyPr wrap="none" rtlCol="0">
+            <a:spAutoFit/>
+          </a:bodyPr>
+          <a:lstStyle/>
+          <a:p>
+            <a:r>
+              <a:rPr lang="en-IN" sz="1000" b="1" dirty="0">
+                <a:latin typeface="Times New Roman" panose="02020603050405020304" pitchFamily="18" charset="0"/>
+                <a:cs typeface="Times New Roman" panose="02020603050405020304" pitchFamily="18" charset="0"/>
+              </a:rPr>
+              <a:t>Call for an reliable, interpretable, rapid, and accurate thoracic-condition detector ?</a:t>
+            </a:r>
+            <a:endParaRPr lang="en-US" sz="1000" b="1" dirty="0">
+              <a:latin typeface="Times New Roman" panose="02020603050405020304" pitchFamily="18" charset="0"/>
+              <a:cs typeface="Times New Roman" panose="02020603050405020304" pitchFamily="18" charset="0"/>
+            </a:endParaRPr>
+          </a:p>
+        </p:txBody>
+      </p:sp>
+      <p:sp>
+        <p:nvSpPr>
+          <p:cNvPr id="39" name="TextBox 38">
+            <a:extLst>
+              <a:ext uri="{FF2B5EF4-FFF2-40B4-BE49-F238E27FC236}">
+                <a16:creationId xmlns:a16="http://schemas.microsoft.com/office/drawing/2014/main" id="{A42892D2-DC68-3D5F-9965-F61CF90D1B24}"/>
+              </a:ext>
+            </a:extLst>
+          </p:cNvPr>
+          <p:cNvSpPr txBox="1"/>
+          <p:nvPr/>
+        </p:nvSpPr>
+        <p:spPr>
+          <a:xfrm>
+            <a:off x="8121671" y="5463576"/>
+            <a:ext cx="2757486" cy="246221"/>
+          </a:xfrm>
+          <a:prstGeom prst="rect">
+            <a:avLst/>
+          </a:prstGeom>
+          <a:noFill/>
+        </p:spPr>
+        <p:txBody>
+          <a:bodyPr wrap="none" rtlCol="0">
+            <a:spAutoFit/>
+          </a:bodyPr>
+          <a:lstStyle/>
+          <a:p>
+            <a:r>
+              <a:rPr lang="en-US" sz="1000" b="1" dirty="0">
+                <a:latin typeface="Times New Roman" panose="02020603050405020304" pitchFamily="18" charset="0"/>
+                <a:cs typeface="Times New Roman" panose="02020603050405020304" pitchFamily="18" charset="0"/>
+              </a:rPr>
+              <a:t>Certainly reliable, how about interpretability ?</a:t>
+            </a:r>
+          </a:p>
+        </p:txBody>
+      </p:sp>
+      <p:sp>
+        <p:nvSpPr>
+          <p:cNvPr id="40" name="TextBox 39">
+            <a:extLst>
+              <a:ext uri="{FF2B5EF4-FFF2-40B4-BE49-F238E27FC236}">
+                <a16:creationId xmlns:a16="http://schemas.microsoft.com/office/drawing/2014/main" id="{92E4599A-528A-581C-F318-55C3A1FF1BFC}"/>
+              </a:ext>
+            </a:extLst>
+          </p:cNvPr>
+          <p:cNvSpPr txBox="1"/>
+          <p:nvPr/>
+        </p:nvSpPr>
+        <p:spPr>
+          <a:xfrm>
+            <a:off x="5297249" y="2064494"/>
+            <a:ext cx="1919115" cy="400110"/>
+          </a:xfrm>
+          <a:prstGeom prst="rect">
+            <a:avLst/>
+          </a:prstGeom>
+          <a:noFill/>
+        </p:spPr>
+        <p:txBody>
+          <a:bodyPr wrap="none" rtlCol="0">
+            <a:spAutoFit/>
+          </a:bodyPr>
+          <a:lstStyle/>
+          <a:p>
+            <a:r>
+              <a:rPr lang="en-US" sz="1000" b="1" dirty="0">
+                <a:latin typeface="Times New Roman" panose="02020603050405020304" pitchFamily="18" charset="0"/>
+                <a:cs typeface="Times New Roman" panose="02020603050405020304" pitchFamily="18" charset="0"/>
+              </a:rPr>
+              <a:t>Great, but what’s the concern ?</a:t>
+            </a:r>
+          </a:p>
+          <a:p>
+            <a:endParaRPr lang="en-US" sz="1000" b="1" dirty="0">
+              <a:latin typeface="Times New Roman" panose="02020603050405020304" pitchFamily="18" charset="0"/>
+              <a:cs typeface="Times New Roman" panose="02020603050405020304" pitchFamily="18" charset="0"/>
+            </a:endParaRPr>
+          </a:p>
+        </p:txBody>
+      </p:sp>
+    </p:spTree>
+    <p:extLst>
+      <p:ext uri="{BB962C8B-B14F-4D97-AF65-F5344CB8AC3E}">
+        <p14:creationId xmlns:p14="http://schemas.microsoft.com/office/powerpoint/2010/main" val="1053059505"/>
+      </p:ext>
+    </p:extLst>
+  </p:cSld>
+  <p:clrMapOvr>
+    <a:masterClrMapping/>
+  </p:clrMapOvr>
+</p:sld>
+</file>
+
+<file path=ppt/slides/slide4.xml><?xml version="1.0" encoding="utf-8"?>
+<p:sld xmlns:a="http://schemas.openxmlformats.org/drawingml/2006/main" xmlns:r="http://schemas.openxmlformats.org/officeDocument/2006/relationships" xmlns:p="http://schemas.openxmlformats.org/presentationml/2006/main">
+  <p:cSld>
+    <p:spTree>
+      <p:nvGrpSpPr>
+        <p:cNvPr id="1" name="">
+          <a:extLst>
+            <a:ext uri="{FF2B5EF4-FFF2-40B4-BE49-F238E27FC236}">
+              <a16:creationId xmlns:a16="http://schemas.microsoft.com/office/drawing/2014/main" id="{D64A06DD-C14A-82A2-E9D8-D5B12DB422CE}"/>
+            </a:ext>
+          </a:extLst>
+        </p:cNvPr>
+        <p:cNvGrpSpPr/>
+        <p:nvPr/>
+      </p:nvGrpSpPr>
+      <p:grpSpPr>
+        <a:xfrm>
+          <a:off x="0" y="0"/>
+          <a:ext cx="0" cy="0"/>
+          <a:chOff x="0" y="0"/>
+          <a:chExt cx="0" cy="0"/>
+        </a:xfrm>
+      </p:grpSpPr>
+      <p:pic>
+        <p:nvPicPr>
+          <p:cNvPr id="2" name="Picture 1">
+            <a:extLst>
+              <a:ext uri="{FF2B5EF4-FFF2-40B4-BE49-F238E27FC236}">
+                <a16:creationId xmlns:a16="http://schemas.microsoft.com/office/drawing/2014/main" id="{6FAAD847-93D5-ED47-A62B-E21C0BF199FE}"/>
+              </a:ext>
+            </a:extLst>
+          </p:cNvPr>
+          <p:cNvPicPr>
+            <a:picLocks noChangeAspect="1"/>
+          </p:cNvPicPr>
+          <p:nvPr/>
+        </p:nvPicPr>
+        <p:blipFill>
+          <a:blip r:embed="rId2"/>
+          <a:srcRect r="12023"/>
+          <a:stretch>
+            <a:fillRect/>
+          </a:stretch>
+        </p:blipFill>
+        <p:spPr>
+          <a:xfrm>
+            <a:off x="524065" y="3106155"/>
+            <a:ext cx="1188984" cy="1271976"/>
+          </a:xfrm>
+          <a:prstGeom prst="rect">
+            <a:avLst/>
+          </a:prstGeom>
+        </p:spPr>
+      </p:pic>
+      <p:pic>
+        <p:nvPicPr>
+          <p:cNvPr id="3" name="Picture 2">
+            <a:extLst>
+              <a:ext uri="{FF2B5EF4-FFF2-40B4-BE49-F238E27FC236}">
+                <a16:creationId xmlns:a16="http://schemas.microsoft.com/office/drawing/2014/main" id="{9EDEB55D-28B2-9E2F-80E0-37E1E561FF75}"/>
+              </a:ext>
+            </a:extLst>
+          </p:cNvPr>
+          <p:cNvPicPr>
+            <a:picLocks noChangeAspect="1"/>
+          </p:cNvPicPr>
+          <p:nvPr/>
+        </p:nvPicPr>
+        <p:blipFill>
+          <a:blip r:embed="rId3"/>
+          <a:stretch>
+            <a:fillRect/>
+          </a:stretch>
+        </p:blipFill>
+        <p:spPr>
+          <a:xfrm>
+            <a:off x="2723923" y="1822188"/>
+            <a:ext cx="1910397" cy="1682164"/>
+          </a:xfrm>
+          <a:prstGeom prst="rect">
+            <a:avLst/>
+          </a:prstGeom>
+        </p:spPr>
+      </p:pic>
+      <p:pic>
+        <p:nvPicPr>
+          <p:cNvPr id="4" name="Picture 3">
+            <a:extLst>
+              <a:ext uri="{FF2B5EF4-FFF2-40B4-BE49-F238E27FC236}">
+                <a16:creationId xmlns:a16="http://schemas.microsoft.com/office/drawing/2014/main" id="{99592FB4-4CD9-67C1-DA46-5DEE02341884}"/>
+              </a:ext>
+            </a:extLst>
+          </p:cNvPr>
+          <p:cNvPicPr>
+            <a:picLocks noChangeAspect="1"/>
+          </p:cNvPicPr>
+          <p:nvPr/>
+        </p:nvPicPr>
+        <p:blipFill>
+          <a:blip r:embed="rId4"/>
+          <a:stretch>
+            <a:fillRect/>
+          </a:stretch>
+        </p:blipFill>
+        <p:spPr>
+          <a:xfrm>
+            <a:off x="2723923" y="3850141"/>
+            <a:ext cx="1910397" cy="1682164"/>
+          </a:xfrm>
+          <a:prstGeom prst="rect">
+            <a:avLst/>
+          </a:prstGeom>
+        </p:spPr>
+      </p:pic>
+      <p:sp>
+        <p:nvSpPr>
+          <p:cNvPr id="6" name="TextBox 5">
+            <a:extLst>
+              <a:ext uri="{FF2B5EF4-FFF2-40B4-BE49-F238E27FC236}">
+                <a16:creationId xmlns:a16="http://schemas.microsoft.com/office/drawing/2014/main" id="{B6C59935-A133-35E5-D1BB-73CC27EDA1C9}"/>
+              </a:ext>
+            </a:extLst>
+          </p:cNvPr>
+          <p:cNvSpPr txBox="1"/>
+          <p:nvPr/>
+        </p:nvSpPr>
+        <p:spPr>
+          <a:xfrm>
+            <a:off x="523912" y="4285532"/>
+            <a:ext cx="1455353" cy="261610"/>
+          </a:xfrm>
+          <a:prstGeom prst="rect">
+            <a:avLst/>
+          </a:prstGeom>
+          <a:noFill/>
+        </p:spPr>
+        <p:txBody>
+          <a:bodyPr wrap="square" rtlCol="0">
+            <a:spAutoFit/>
+          </a:bodyPr>
+          <a:lstStyle/>
+          <a:p>
+            <a:r>
+              <a:rPr lang="en-US" sz="1100" dirty="0">
+                <a:latin typeface="Times New Roman" panose="02020603050405020304" pitchFamily="18" charset="0"/>
+                <a:cs typeface="Times New Roman" panose="02020603050405020304" pitchFamily="18" charset="0"/>
+              </a:rPr>
+              <a:t>Domain: </a:t>
+            </a:r>
+            <a:r>
+              <a:rPr lang="en-US" sz="1100" b="1" dirty="0">
+                <a:latin typeface="Times New Roman" panose="02020603050405020304" pitchFamily="18" charset="0"/>
+                <a:cs typeface="Times New Roman" panose="02020603050405020304" pitchFamily="18" charset="0"/>
+              </a:rPr>
+              <a:t>Healthcare</a:t>
+            </a:r>
+          </a:p>
+        </p:txBody>
+      </p:sp>
+      <p:sp>
+        <p:nvSpPr>
+          <p:cNvPr id="7" name="TextBox 6">
+            <a:extLst>
+              <a:ext uri="{FF2B5EF4-FFF2-40B4-BE49-F238E27FC236}">
+                <a16:creationId xmlns:a16="http://schemas.microsoft.com/office/drawing/2014/main" id="{649287BE-FF4C-7B6F-7450-EFD9CD97FDA1}"/>
+              </a:ext>
+            </a:extLst>
+          </p:cNvPr>
+          <p:cNvSpPr txBox="1"/>
+          <p:nvPr/>
+        </p:nvSpPr>
+        <p:spPr>
+          <a:xfrm>
+            <a:off x="2656406" y="3492777"/>
+            <a:ext cx="2042910" cy="261610"/>
+          </a:xfrm>
+          <a:prstGeom prst="rect">
+            <a:avLst/>
+          </a:prstGeom>
+          <a:noFill/>
+        </p:spPr>
+        <p:txBody>
+          <a:bodyPr wrap="square" rtlCol="0">
+            <a:spAutoFit/>
+          </a:bodyPr>
+          <a:lstStyle/>
+          <a:p>
+            <a:r>
+              <a:rPr lang="en-US" sz="1100" dirty="0">
+                <a:latin typeface="Times New Roman" panose="02020603050405020304" pitchFamily="18" charset="0"/>
+                <a:cs typeface="Times New Roman" panose="02020603050405020304" pitchFamily="18" charset="0"/>
+              </a:rPr>
+              <a:t>Department: </a:t>
+            </a:r>
+            <a:r>
+              <a:rPr lang="en-US" sz="1100" b="1" dirty="0">
+                <a:latin typeface="Times New Roman" panose="02020603050405020304" pitchFamily="18" charset="0"/>
+                <a:cs typeface="Times New Roman" panose="02020603050405020304" pitchFamily="18" charset="0"/>
+              </a:rPr>
+              <a:t>Radiology (X-Ray)</a:t>
+            </a:r>
+          </a:p>
+        </p:txBody>
+      </p:sp>
+      <p:sp>
+        <p:nvSpPr>
+          <p:cNvPr id="8" name="TextBox 7">
+            <a:extLst>
+              <a:ext uri="{FF2B5EF4-FFF2-40B4-BE49-F238E27FC236}">
+                <a16:creationId xmlns:a16="http://schemas.microsoft.com/office/drawing/2014/main" id="{EADA7FFA-110C-CA2F-D93D-11E779F4C937}"/>
+              </a:ext>
+            </a:extLst>
+          </p:cNvPr>
+          <p:cNvSpPr txBox="1"/>
+          <p:nvPr/>
+        </p:nvSpPr>
+        <p:spPr>
+          <a:xfrm>
+            <a:off x="2608173" y="5530017"/>
+            <a:ext cx="2160585" cy="261610"/>
+          </a:xfrm>
+          <a:prstGeom prst="rect">
+            <a:avLst/>
+          </a:prstGeom>
+          <a:noFill/>
+        </p:spPr>
+        <p:txBody>
+          <a:bodyPr wrap="square" rtlCol="0">
+            <a:spAutoFit/>
+          </a:bodyPr>
+          <a:lstStyle/>
+          <a:p>
+            <a:r>
+              <a:rPr lang="en-US" sz="1100" dirty="0">
+                <a:latin typeface="Times New Roman" panose="02020603050405020304" pitchFamily="18" charset="0"/>
+                <a:cs typeface="Times New Roman" panose="02020603050405020304" pitchFamily="18" charset="0"/>
+              </a:rPr>
+              <a:t>Technology: </a:t>
+            </a:r>
+            <a:r>
+              <a:rPr lang="en-US" sz="1100" b="1" dirty="0">
+                <a:latin typeface="Times New Roman" panose="02020603050405020304" pitchFamily="18" charset="0"/>
+                <a:cs typeface="Times New Roman" panose="02020603050405020304" pitchFamily="18" charset="0"/>
+              </a:rPr>
+              <a:t>A</a:t>
+            </a:r>
+            <a:r>
+              <a:rPr lang="en-US" sz="1100" dirty="0">
+                <a:latin typeface="Times New Roman" panose="02020603050405020304" pitchFamily="18" charset="0"/>
+                <a:cs typeface="Times New Roman" panose="02020603050405020304" pitchFamily="18" charset="0"/>
+              </a:rPr>
+              <a:t>rtificial </a:t>
+            </a:r>
+            <a:r>
+              <a:rPr lang="en-US" sz="1100" b="1" dirty="0">
+                <a:latin typeface="Times New Roman" panose="02020603050405020304" pitchFamily="18" charset="0"/>
+                <a:cs typeface="Times New Roman" panose="02020603050405020304" pitchFamily="18" charset="0"/>
+              </a:rPr>
+              <a:t>I</a:t>
+            </a:r>
+            <a:r>
+              <a:rPr lang="en-US" sz="1100" dirty="0">
+                <a:latin typeface="Times New Roman" panose="02020603050405020304" pitchFamily="18" charset="0"/>
+                <a:cs typeface="Times New Roman" panose="02020603050405020304" pitchFamily="18" charset="0"/>
+              </a:rPr>
+              <a:t>ntelligence</a:t>
+            </a:r>
+          </a:p>
+        </p:txBody>
+      </p:sp>
+      <p:sp>
+        <p:nvSpPr>
+          <p:cNvPr id="9" name="TextBox 8">
+            <a:extLst>
+              <a:ext uri="{FF2B5EF4-FFF2-40B4-BE49-F238E27FC236}">
+                <a16:creationId xmlns:a16="http://schemas.microsoft.com/office/drawing/2014/main" id="{6669EA88-993E-AE78-2C25-AD4CB6D059B0}"/>
+              </a:ext>
+            </a:extLst>
+          </p:cNvPr>
+          <p:cNvSpPr txBox="1"/>
+          <p:nvPr/>
+        </p:nvSpPr>
+        <p:spPr>
+          <a:xfrm>
+            <a:off x="5705705" y="4324710"/>
+            <a:ext cx="2160585" cy="261610"/>
+          </a:xfrm>
+          <a:prstGeom prst="rect">
+            <a:avLst/>
+          </a:prstGeom>
+          <a:noFill/>
+        </p:spPr>
+        <p:txBody>
+          <a:bodyPr wrap="square" rtlCol="0">
+            <a:spAutoFit/>
+          </a:bodyPr>
+          <a:lstStyle/>
+          <a:p>
+            <a:r>
+              <a:rPr lang="en-US" sz="1100" dirty="0">
+                <a:latin typeface="Times New Roman" panose="02020603050405020304" pitchFamily="18" charset="0"/>
+                <a:cs typeface="Times New Roman" panose="02020603050405020304" pitchFamily="18" charset="0"/>
+              </a:rPr>
+              <a:t>Product: </a:t>
+            </a:r>
+            <a:r>
+              <a:rPr lang="en-US" sz="1100" b="1" dirty="0">
+                <a:latin typeface="Times New Roman" panose="02020603050405020304" pitchFamily="18" charset="0"/>
+                <a:cs typeface="Times New Roman" panose="02020603050405020304" pitchFamily="18" charset="0"/>
+              </a:rPr>
+              <a:t>Rad</a:t>
+            </a:r>
+            <a:r>
+              <a:rPr lang="en-US" sz="1100" dirty="0">
+                <a:latin typeface="Times New Roman" panose="02020603050405020304" pitchFamily="18" charset="0"/>
+                <a:cs typeface="Times New Roman" panose="02020603050405020304" pitchFamily="18" charset="0"/>
+              </a:rPr>
+              <a:t>iology </a:t>
+            </a:r>
+            <a:r>
+              <a:rPr lang="en-US" sz="1100" b="1" dirty="0">
+                <a:latin typeface="Times New Roman" panose="02020603050405020304" pitchFamily="18" charset="0"/>
+                <a:cs typeface="Times New Roman" panose="02020603050405020304" pitchFamily="18" charset="0"/>
+              </a:rPr>
+              <a:t>Assist</a:t>
+            </a:r>
+            <a:r>
+              <a:rPr lang="en-US" sz="1100" dirty="0">
+                <a:latin typeface="Times New Roman" panose="02020603050405020304" pitchFamily="18" charset="0"/>
+                <a:cs typeface="Times New Roman" panose="02020603050405020304" pitchFamily="18" charset="0"/>
+              </a:rPr>
+              <a:t>ant </a:t>
+            </a:r>
+            <a:r>
+              <a:rPr lang="en-US" sz="1100" b="1" dirty="0">
+                <a:latin typeface="Times New Roman" panose="02020603050405020304" pitchFamily="18" charset="0"/>
+                <a:cs typeface="Times New Roman" panose="02020603050405020304" pitchFamily="18" charset="0"/>
+              </a:rPr>
+              <a:t>IQ</a:t>
+            </a:r>
+          </a:p>
+        </p:txBody>
+      </p:sp>
+      <p:sp>
+        <p:nvSpPr>
+          <p:cNvPr id="11" name="Oval 10">
+            <a:extLst>
+              <a:ext uri="{FF2B5EF4-FFF2-40B4-BE49-F238E27FC236}">
+                <a16:creationId xmlns:a16="http://schemas.microsoft.com/office/drawing/2014/main" id="{7AC6F3EE-7429-8CD1-8886-D01A490A61F3}"/>
+              </a:ext>
+            </a:extLst>
+          </p:cNvPr>
+          <p:cNvSpPr/>
+          <p:nvPr/>
+        </p:nvSpPr>
+        <p:spPr>
+          <a:xfrm>
+            <a:off x="9259750" y="2384398"/>
+            <a:ext cx="2048719" cy="668547"/>
+          </a:xfrm>
+          <a:prstGeom prst="ellipse">
+            <a:avLst/>
+          </a:prstGeom>
+          <a:solidFill>
+            <a:srgbClr val="757575"/>
+          </a:solidFill>
+        </p:spPr>
+        <p:style>
+          <a:lnRef idx="2">
+            <a:schemeClr val="accent1">
+              <a:shade val="15000"/>
+            </a:schemeClr>
+          </a:lnRef>
+          <a:fillRef idx="1">
+            <a:schemeClr val="accent1"/>
+          </a:fillRef>
+          <a:effectRef idx="0">
+            <a:schemeClr val="accent1"/>
+          </a:effectRef>
+          <a:fontRef idx="minor">
+            <a:schemeClr val="lt1"/>
+          </a:fontRef>
+        </p:style>
+        <p:txBody>
+          <a:bodyPr rtlCol="0" anchor="ctr"/>
+          <a:lstStyle/>
+          <a:p>
+            <a:pPr algn="ctr"/>
+            <a:endParaRPr lang="en-US"/>
+          </a:p>
+        </p:txBody>
+      </p:sp>
+      <p:sp>
+        <p:nvSpPr>
+          <p:cNvPr id="12" name="Oval 11">
+            <a:extLst>
+              <a:ext uri="{FF2B5EF4-FFF2-40B4-BE49-F238E27FC236}">
+                <a16:creationId xmlns:a16="http://schemas.microsoft.com/office/drawing/2014/main" id="{CE01B447-F61A-25BE-38E3-1EF737668BDA}"/>
+              </a:ext>
+            </a:extLst>
+          </p:cNvPr>
+          <p:cNvSpPr/>
+          <p:nvPr/>
+        </p:nvSpPr>
+        <p:spPr>
+          <a:xfrm>
+            <a:off x="9259750" y="3801711"/>
+            <a:ext cx="2048719" cy="668547"/>
+          </a:xfrm>
+          <a:prstGeom prst="ellipse">
+            <a:avLst/>
+          </a:prstGeom>
+          <a:solidFill>
+            <a:srgbClr val="757575"/>
+          </a:solidFill>
+        </p:spPr>
+        <p:style>
+          <a:lnRef idx="2">
+            <a:schemeClr val="accent1">
+              <a:shade val="15000"/>
+            </a:schemeClr>
+          </a:lnRef>
+          <a:fillRef idx="1">
+            <a:schemeClr val="accent1"/>
+          </a:fillRef>
+          <a:effectRef idx="0">
+            <a:schemeClr val="accent1"/>
+          </a:effectRef>
+          <a:fontRef idx="minor">
+            <a:schemeClr val="lt1"/>
+          </a:fontRef>
+        </p:style>
+        <p:txBody>
+          <a:bodyPr rtlCol="0" anchor="ctr"/>
+          <a:lstStyle/>
+          <a:p>
+            <a:pPr algn="ctr"/>
+            <a:endParaRPr lang="en-US"/>
+          </a:p>
+        </p:txBody>
+      </p:sp>
+      <p:sp>
+        <p:nvSpPr>
+          <p:cNvPr id="13" name="TextBox 12">
+            <a:extLst>
+              <a:ext uri="{FF2B5EF4-FFF2-40B4-BE49-F238E27FC236}">
+                <a16:creationId xmlns:a16="http://schemas.microsoft.com/office/drawing/2014/main" id="{0378F6CF-3225-6AA5-C6BA-7A3D4F3174D5}"/>
+              </a:ext>
+            </a:extLst>
+          </p:cNvPr>
+          <p:cNvSpPr txBox="1"/>
+          <p:nvPr/>
+        </p:nvSpPr>
+        <p:spPr>
+          <a:xfrm>
+            <a:off x="9259744" y="2581165"/>
+            <a:ext cx="2199192" cy="261610"/>
+          </a:xfrm>
+          <a:prstGeom prst="rect">
+            <a:avLst/>
+          </a:prstGeom>
+          <a:noFill/>
+        </p:spPr>
+        <p:txBody>
+          <a:bodyPr wrap="square" rtlCol="0">
+            <a:spAutoFit/>
+          </a:bodyPr>
+          <a:lstStyle/>
+          <a:p>
+            <a:r>
+              <a:rPr lang="en-US" sz="1100" dirty="0">
+                <a:solidFill>
+                  <a:schemeClr val="bg1"/>
+                </a:solidFill>
+                <a:latin typeface="Times New Roman" panose="02020603050405020304" pitchFamily="18" charset="0"/>
+                <a:cs typeface="Times New Roman" panose="02020603050405020304" pitchFamily="18" charset="0"/>
+              </a:rPr>
+              <a:t>Concept 1: Explainable AI (</a:t>
+            </a:r>
+            <a:r>
+              <a:rPr lang="en-US" sz="1100" b="1" dirty="0">
+                <a:solidFill>
+                  <a:schemeClr val="bg1"/>
+                </a:solidFill>
+                <a:latin typeface="Times New Roman" panose="02020603050405020304" pitchFamily="18" charset="0"/>
+                <a:cs typeface="Times New Roman" panose="02020603050405020304" pitchFamily="18" charset="0"/>
+              </a:rPr>
+              <a:t>XAI</a:t>
+            </a:r>
+            <a:r>
+              <a:rPr lang="en-US" sz="1100" dirty="0">
+                <a:solidFill>
+                  <a:schemeClr val="bg1"/>
+                </a:solidFill>
+                <a:latin typeface="Times New Roman" panose="02020603050405020304" pitchFamily="18" charset="0"/>
+                <a:cs typeface="Times New Roman" panose="02020603050405020304" pitchFamily="18" charset="0"/>
+              </a:rPr>
+              <a:t>)</a:t>
+            </a:r>
+          </a:p>
+        </p:txBody>
+      </p:sp>
+      <p:sp>
+        <p:nvSpPr>
+          <p:cNvPr id="14" name="TextBox 13">
+            <a:extLst>
+              <a:ext uri="{FF2B5EF4-FFF2-40B4-BE49-F238E27FC236}">
+                <a16:creationId xmlns:a16="http://schemas.microsoft.com/office/drawing/2014/main" id="{826B6DA4-1B52-0018-EB8D-94E1B9FC2DE8}"/>
+              </a:ext>
+            </a:extLst>
+          </p:cNvPr>
+          <p:cNvSpPr txBox="1"/>
+          <p:nvPr/>
+        </p:nvSpPr>
+        <p:spPr>
+          <a:xfrm>
+            <a:off x="9225019" y="4012355"/>
+            <a:ext cx="2199192" cy="261610"/>
+          </a:xfrm>
+          <a:prstGeom prst="rect">
+            <a:avLst/>
+          </a:prstGeom>
+          <a:noFill/>
+        </p:spPr>
+        <p:txBody>
+          <a:bodyPr wrap="square" rtlCol="0">
+            <a:spAutoFit/>
+          </a:bodyPr>
+          <a:lstStyle/>
+          <a:p>
+            <a:r>
+              <a:rPr lang="en-US" sz="1100" dirty="0">
+                <a:solidFill>
+                  <a:schemeClr val="bg1"/>
+                </a:solidFill>
+                <a:latin typeface="Times New Roman" panose="02020603050405020304" pitchFamily="18" charset="0"/>
+                <a:cs typeface="Times New Roman" panose="02020603050405020304" pitchFamily="18" charset="0"/>
+              </a:rPr>
+              <a:t>Concept 2: Generative AI (</a:t>
+            </a:r>
+            <a:r>
+              <a:rPr lang="en-US" sz="1100" b="1" dirty="0">
+                <a:solidFill>
+                  <a:schemeClr val="bg1"/>
+                </a:solidFill>
+                <a:latin typeface="Times New Roman" panose="02020603050405020304" pitchFamily="18" charset="0"/>
+                <a:cs typeface="Times New Roman" panose="02020603050405020304" pitchFamily="18" charset="0"/>
+              </a:rPr>
+              <a:t>GenAI</a:t>
+            </a:r>
+            <a:r>
+              <a:rPr lang="en-US" sz="1100" dirty="0">
+                <a:solidFill>
+                  <a:schemeClr val="bg1"/>
+                </a:solidFill>
+                <a:latin typeface="Times New Roman" panose="02020603050405020304" pitchFamily="18" charset="0"/>
+                <a:cs typeface="Times New Roman" panose="02020603050405020304" pitchFamily="18" charset="0"/>
+              </a:rPr>
+              <a:t>)</a:t>
+            </a:r>
+          </a:p>
+        </p:txBody>
+      </p:sp>
+      <p:sp>
+        <p:nvSpPr>
+          <p:cNvPr id="15" name="TextBox 14">
+            <a:extLst>
+              <a:ext uri="{FF2B5EF4-FFF2-40B4-BE49-F238E27FC236}">
+                <a16:creationId xmlns:a16="http://schemas.microsoft.com/office/drawing/2014/main" id="{AE697931-32B6-6997-9891-DECD73F17DA9}"/>
+              </a:ext>
+            </a:extLst>
+          </p:cNvPr>
+          <p:cNvSpPr txBox="1"/>
+          <p:nvPr/>
+        </p:nvSpPr>
+        <p:spPr>
+          <a:xfrm>
+            <a:off x="10359340" y="5300201"/>
+            <a:ext cx="1620455" cy="430887"/>
+          </a:xfrm>
+          <a:prstGeom prst="rect">
+            <a:avLst/>
+          </a:prstGeom>
+          <a:noFill/>
+        </p:spPr>
+        <p:txBody>
+          <a:bodyPr wrap="square" rtlCol="0">
+            <a:spAutoFit/>
+          </a:bodyPr>
+          <a:lstStyle/>
+          <a:p>
+            <a:pPr algn="ctr"/>
+            <a:r>
+              <a:rPr lang="en-US" sz="1100" b="1" dirty="0">
+                <a:latin typeface="Times New Roman" panose="02020603050405020304" pitchFamily="18" charset="0"/>
+                <a:cs typeface="Times New Roman" panose="02020603050405020304" pitchFamily="18" charset="0"/>
+              </a:rPr>
+              <a:t>L</a:t>
+            </a:r>
+            <a:r>
+              <a:rPr lang="en-US" sz="1100" dirty="0">
+                <a:latin typeface="Times New Roman" panose="02020603050405020304" pitchFamily="18" charset="0"/>
+                <a:cs typeface="Times New Roman" panose="02020603050405020304" pitchFamily="18" charset="0"/>
+              </a:rPr>
+              <a:t>arge </a:t>
+            </a:r>
+            <a:r>
+              <a:rPr lang="en-US" sz="1100" b="1" dirty="0">
+                <a:latin typeface="Times New Roman" panose="02020603050405020304" pitchFamily="18" charset="0"/>
+                <a:cs typeface="Times New Roman" panose="02020603050405020304" pitchFamily="18" charset="0"/>
+              </a:rPr>
+              <a:t>L</a:t>
+            </a:r>
+            <a:r>
+              <a:rPr lang="en-US" sz="1100" dirty="0">
+                <a:latin typeface="Times New Roman" panose="02020603050405020304" pitchFamily="18" charset="0"/>
+                <a:cs typeface="Times New Roman" panose="02020603050405020304" pitchFamily="18" charset="0"/>
+              </a:rPr>
+              <a:t>anguage </a:t>
+            </a:r>
+            <a:r>
+              <a:rPr lang="en-US" sz="1100" b="1" dirty="0">
+                <a:latin typeface="Times New Roman" panose="02020603050405020304" pitchFamily="18" charset="0"/>
+                <a:cs typeface="Times New Roman" panose="02020603050405020304" pitchFamily="18" charset="0"/>
+              </a:rPr>
+              <a:t>M</a:t>
+            </a:r>
+            <a:r>
+              <a:rPr lang="en-US" sz="1100" dirty="0">
+                <a:latin typeface="Times New Roman" panose="02020603050405020304" pitchFamily="18" charset="0"/>
+                <a:cs typeface="Times New Roman" panose="02020603050405020304" pitchFamily="18" charset="0"/>
+              </a:rPr>
+              <a:t>odel</a:t>
+            </a:r>
+          </a:p>
+          <a:p>
+            <a:pPr algn="ctr"/>
+            <a:r>
+              <a:rPr lang="en-US" sz="1100" dirty="0">
+                <a:latin typeface="Times New Roman" panose="02020603050405020304" pitchFamily="18" charset="0"/>
+                <a:cs typeface="Times New Roman" panose="02020603050405020304" pitchFamily="18" charset="0"/>
+              </a:rPr>
+              <a:t>(gemini-2.5-pro)</a:t>
+            </a:r>
+          </a:p>
+        </p:txBody>
+      </p:sp>
+      <p:sp>
+        <p:nvSpPr>
+          <p:cNvPr id="16" name="TextBox 15">
+            <a:extLst>
+              <a:ext uri="{FF2B5EF4-FFF2-40B4-BE49-F238E27FC236}">
+                <a16:creationId xmlns:a16="http://schemas.microsoft.com/office/drawing/2014/main" id="{C124CB56-246D-2208-AFAC-A8BA44261DD9}"/>
+              </a:ext>
+            </a:extLst>
+          </p:cNvPr>
+          <p:cNvSpPr txBox="1"/>
+          <p:nvPr/>
+        </p:nvSpPr>
+        <p:spPr>
+          <a:xfrm>
+            <a:off x="8599987" y="4928794"/>
+            <a:ext cx="2048719" cy="430887"/>
+          </a:xfrm>
+          <a:prstGeom prst="rect">
+            <a:avLst/>
+          </a:prstGeom>
+          <a:noFill/>
+        </p:spPr>
+        <p:txBody>
+          <a:bodyPr wrap="square" rtlCol="0">
+            <a:spAutoFit/>
+          </a:bodyPr>
+          <a:lstStyle/>
+          <a:p>
+            <a:pPr algn="ctr"/>
+            <a:r>
+              <a:rPr lang="en-US" sz="1100" b="1" dirty="0">
+                <a:latin typeface="Times New Roman" panose="02020603050405020304" pitchFamily="18" charset="0"/>
+                <a:cs typeface="Times New Roman" panose="02020603050405020304" pitchFamily="18" charset="0"/>
+              </a:rPr>
+              <a:t>C</a:t>
+            </a:r>
+            <a:r>
+              <a:rPr lang="en-US" sz="1100" dirty="0">
+                <a:latin typeface="Times New Roman" panose="02020603050405020304" pitchFamily="18" charset="0"/>
+                <a:cs typeface="Times New Roman" panose="02020603050405020304" pitchFamily="18" charset="0"/>
+              </a:rPr>
+              <a:t>onvolutional </a:t>
+            </a:r>
+            <a:r>
+              <a:rPr lang="en-US" sz="1100" b="1" dirty="0">
+                <a:latin typeface="Times New Roman" panose="02020603050405020304" pitchFamily="18" charset="0"/>
+                <a:cs typeface="Times New Roman" panose="02020603050405020304" pitchFamily="18" charset="0"/>
+              </a:rPr>
+              <a:t>N</a:t>
+            </a:r>
+            <a:r>
+              <a:rPr lang="en-US" sz="1100" dirty="0">
+                <a:latin typeface="Times New Roman" panose="02020603050405020304" pitchFamily="18" charset="0"/>
+                <a:cs typeface="Times New Roman" panose="02020603050405020304" pitchFamily="18" charset="0"/>
+              </a:rPr>
+              <a:t>eural </a:t>
+            </a:r>
+            <a:r>
+              <a:rPr lang="en-US" sz="1100" b="1" dirty="0">
+                <a:latin typeface="Times New Roman" panose="02020603050405020304" pitchFamily="18" charset="0"/>
+                <a:cs typeface="Times New Roman" panose="02020603050405020304" pitchFamily="18" charset="0"/>
+              </a:rPr>
+              <a:t>N</a:t>
+            </a:r>
+            <a:r>
+              <a:rPr lang="en-US" sz="1100" dirty="0">
+                <a:latin typeface="Times New Roman" panose="02020603050405020304" pitchFamily="18" charset="0"/>
+                <a:cs typeface="Times New Roman" panose="02020603050405020304" pitchFamily="18" charset="0"/>
+              </a:rPr>
+              <a:t>etwork</a:t>
+            </a:r>
+          </a:p>
+          <a:p>
+            <a:pPr algn="ctr"/>
+            <a:r>
+              <a:rPr lang="en-US" sz="1100" dirty="0">
+                <a:latin typeface="Times New Roman" panose="02020603050405020304" pitchFamily="18" charset="0"/>
+                <a:cs typeface="Times New Roman" panose="02020603050405020304" pitchFamily="18" charset="0"/>
+              </a:rPr>
+              <a:t>(DenseNet121)</a:t>
+            </a:r>
+          </a:p>
+        </p:txBody>
+      </p:sp>
+      <p:cxnSp>
+        <p:nvCxnSpPr>
+          <p:cNvPr id="18" name="Straight Arrow Connector 17">
+            <a:extLst>
+              <a:ext uri="{FF2B5EF4-FFF2-40B4-BE49-F238E27FC236}">
+                <a16:creationId xmlns:a16="http://schemas.microsoft.com/office/drawing/2014/main" id="{7DB93178-2C09-4595-42CB-0845D751F285}"/>
+              </a:ext>
+            </a:extLst>
+          </p:cNvPr>
+          <p:cNvCxnSpPr>
+            <a:cxnSpLocks/>
+            <a:stCxn id="12" idx="4"/>
+            <a:endCxn id="16" idx="0"/>
+          </p:cNvCxnSpPr>
+          <p:nvPr/>
+        </p:nvCxnSpPr>
+        <p:spPr>
+          <a:xfrm flipH="1">
+            <a:off x="9624347" y="4470258"/>
+            <a:ext cx="659763" cy="458536"/>
+          </a:xfrm>
+          <a:prstGeom prst="straightConnector1">
+            <a:avLst/>
           </a:prstGeom>
           <a:ln>
             <a:solidFill>
@@ -4787,25 +6034,26 @@
       </p:cxnSp>
       <p:cxnSp>
         <p:nvCxnSpPr>
-          <p:cNvPr id="15" name="Elbow Connector 14">
-            <a:extLst>
-              <a:ext uri="{FF2B5EF4-FFF2-40B4-BE49-F238E27FC236}">
-                <a16:creationId xmlns:a16="http://schemas.microsoft.com/office/drawing/2014/main" id="{810A133B-F7FD-F003-1182-9318191E657E}"/>
-              </a:ext>
-            </a:extLst>
-          </p:cNvPr>
-          <p:cNvCxnSpPr/>
+          <p:cNvPr id="20" name="Straight Arrow Connector 19">
+            <a:extLst>
+              <a:ext uri="{FF2B5EF4-FFF2-40B4-BE49-F238E27FC236}">
+                <a16:creationId xmlns:a16="http://schemas.microsoft.com/office/drawing/2014/main" id="{0E2124EA-18D9-3244-A0FB-ECA3D75E4FD3}"/>
+              </a:ext>
+            </a:extLst>
+          </p:cNvPr>
+          <p:cNvCxnSpPr>
+            <a:stCxn id="12" idx="4"/>
+            <a:endCxn id="15" idx="0"/>
+          </p:cNvCxnSpPr>
           <p:nvPr/>
         </p:nvCxnSpPr>
         <p:spPr>
-          <a:xfrm rot="16200000" flipH="1">
-            <a:off x="9263573" y="2736166"/>
-            <a:ext cx="1547446" cy="914400"/>
-          </a:xfrm>
-          <a:prstGeom prst="bentConnector3">
-            <a:avLst>
-              <a:gd name="adj1" fmla="val 0"/>
-            </a:avLst>
+          <a:xfrm>
+            <a:off x="10284110" y="4470258"/>
+            <a:ext cx="885458" cy="829943"/>
+          </a:xfrm>
+          <a:prstGeom prst="straightConnector1">
+            <a:avLst/>
           </a:prstGeom>
           <a:ln>
             <a:solidFill>
@@ -4829,132 +6077,104 @@
           </a:fontRef>
         </p:style>
       </p:cxnSp>
-      <p:sp>
-        <p:nvSpPr>
-          <p:cNvPr id="17" name="TextBox 16">
-            <a:extLst>
-              <a:ext uri="{FF2B5EF4-FFF2-40B4-BE49-F238E27FC236}">
-                <a16:creationId xmlns:a16="http://schemas.microsoft.com/office/drawing/2014/main" id="{D22739F9-D39D-FA0A-2EDE-1D83AD563B6A}"/>
-              </a:ext>
-            </a:extLst>
-          </p:cNvPr>
-          <p:cNvSpPr txBox="1"/>
-          <p:nvPr/>
-        </p:nvSpPr>
-        <p:spPr>
-          <a:xfrm>
-            <a:off x="1261751" y="2076789"/>
-            <a:ext cx="1200094" cy="261610"/>
-          </a:xfrm>
-          <a:prstGeom prst="rect">
-            <a:avLst/>
-          </a:prstGeom>
-          <a:noFill/>
-        </p:spPr>
-        <p:txBody>
-          <a:bodyPr wrap="square" rtlCol="0">
-            <a:spAutoFit/>
-          </a:bodyPr>
-          <a:lstStyle/>
-          <a:p>
-            <a:r>
-              <a:rPr lang="en-US" sz="1100" b="1" dirty="0">
-                <a:solidFill>
-                  <a:srgbClr val="6E6E6E"/>
-                </a:solidFill>
-                <a:latin typeface="Times New Roman" panose="02020603050405020304" pitchFamily="18" charset="0"/>
-                <a:cs typeface="Times New Roman" panose="02020603050405020304" pitchFamily="18" charset="0"/>
-              </a:rPr>
-              <a:t>Input Request</a:t>
-            </a:r>
-          </a:p>
-        </p:txBody>
-      </p:sp>
-      <p:sp>
-        <p:nvSpPr>
-          <p:cNvPr id="18" name="TextBox 17">
-            <a:extLst>
-              <a:ext uri="{FF2B5EF4-FFF2-40B4-BE49-F238E27FC236}">
-                <a16:creationId xmlns:a16="http://schemas.microsoft.com/office/drawing/2014/main" id="{FF25F06D-ED35-FCE4-9259-3D3B53C2E71C}"/>
-              </a:ext>
-            </a:extLst>
-          </p:cNvPr>
-          <p:cNvSpPr txBox="1"/>
-          <p:nvPr/>
-        </p:nvSpPr>
-        <p:spPr>
-          <a:xfrm>
-            <a:off x="10530073" y="3034425"/>
-            <a:ext cx="766282" cy="261610"/>
-          </a:xfrm>
-          <a:prstGeom prst="rect">
-            <a:avLst/>
-          </a:prstGeom>
-          <a:noFill/>
-        </p:spPr>
-        <p:txBody>
-          <a:bodyPr wrap="square" rtlCol="0">
-            <a:spAutoFit/>
-          </a:bodyPr>
-          <a:lstStyle/>
-          <a:p>
-            <a:r>
-              <a:rPr lang="en-US" sz="1100" b="1" dirty="0">
-                <a:solidFill>
-                  <a:srgbClr val="6E6E6E"/>
-                </a:solidFill>
-                <a:latin typeface="Times New Roman" panose="02020603050405020304" pitchFamily="18" charset="0"/>
-                <a:cs typeface="Times New Roman" panose="02020603050405020304" pitchFamily="18" charset="0"/>
-              </a:rPr>
-              <a:t>Response</a:t>
-            </a:r>
-          </a:p>
-        </p:txBody>
-      </p:sp>
-      <p:sp>
-        <p:nvSpPr>
-          <p:cNvPr id="19" name="TextBox 18">
-            <a:extLst>
-              <a:ext uri="{FF2B5EF4-FFF2-40B4-BE49-F238E27FC236}">
-                <a16:creationId xmlns:a16="http://schemas.microsoft.com/office/drawing/2014/main" id="{4B76557E-C6E8-5357-CD1C-776605FCA4E0}"/>
-              </a:ext>
-            </a:extLst>
-          </p:cNvPr>
-          <p:cNvSpPr txBox="1"/>
-          <p:nvPr/>
-        </p:nvSpPr>
-        <p:spPr>
-          <a:xfrm>
-            <a:off x="4143738" y="407846"/>
-            <a:ext cx="3240910" cy="477054"/>
-          </a:xfrm>
-          <a:prstGeom prst="rect">
-            <a:avLst/>
-          </a:prstGeom>
-          <a:noFill/>
-        </p:spPr>
-        <p:txBody>
-          <a:bodyPr wrap="square" rtlCol="0">
-            <a:spAutoFit/>
-          </a:bodyPr>
-          <a:lstStyle/>
-          <a:p>
-            <a:r>
-              <a:rPr lang="en-US" sz="2500" b="1" dirty="0">
-                <a:latin typeface="Times New Roman" panose="02020603050405020304" pitchFamily="18" charset="0"/>
-                <a:cs typeface="Times New Roman" panose="02020603050405020304" pitchFamily="18" charset="0"/>
-              </a:rPr>
-              <a:t>End-to-End Workflow</a:t>
-            </a:r>
-          </a:p>
-        </p:txBody>
-      </p:sp>
+      <p:cxnSp>
+        <p:nvCxnSpPr>
+          <p:cNvPr id="27" name="Straight Arrow Connector 26">
+            <a:extLst>
+              <a:ext uri="{FF2B5EF4-FFF2-40B4-BE49-F238E27FC236}">
+                <a16:creationId xmlns:a16="http://schemas.microsoft.com/office/drawing/2014/main" id="{5993FBC0-96E2-3CDE-8044-D05256C01469}"/>
+              </a:ext>
+            </a:extLst>
+          </p:cNvPr>
+          <p:cNvCxnSpPr>
+            <a:cxnSpLocks/>
+            <a:stCxn id="2" idx="3"/>
+            <a:endCxn id="3" idx="1"/>
+          </p:cNvCxnSpPr>
+          <p:nvPr/>
+        </p:nvCxnSpPr>
+        <p:spPr>
+          <a:xfrm flipV="1">
+            <a:off x="1713049" y="2663270"/>
+            <a:ext cx="1010874" cy="1078873"/>
+          </a:xfrm>
+          <a:prstGeom prst="straightConnector1">
+            <a:avLst/>
+          </a:prstGeom>
+          <a:ln>
+            <a:solidFill>
+              <a:srgbClr val="757575"/>
+            </a:solidFill>
+            <a:tailEnd type="triangle"/>
+          </a:ln>
+        </p:spPr>
+        <p:style>
+          <a:lnRef idx="2">
+            <a:schemeClr val="accent1"/>
+          </a:lnRef>
+          <a:fillRef idx="0">
+            <a:schemeClr val="accent1"/>
+          </a:fillRef>
+          <a:effectRef idx="1">
+            <a:schemeClr val="accent1"/>
+          </a:effectRef>
+          <a:fontRef idx="minor">
+            <a:schemeClr val="tx1"/>
+          </a:fontRef>
+        </p:style>
+      </p:cxnSp>
+      <p:cxnSp>
+        <p:nvCxnSpPr>
+          <p:cNvPr id="29" name="Straight Arrow Connector 28">
+            <a:extLst>
+              <a:ext uri="{FF2B5EF4-FFF2-40B4-BE49-F238E27FC236}">
+                <a16:creationId xmlns:a16="http://schemas.microsoft.com/office/drawing/2014/main" id="{B10018A6-7D38-F1F2-5AB2-6D03D77EFFBA}"/>
+              </a:ext>
+            </a:extLst>
+          </p:cNvPr>
+          <p:cNvCxnSpPr>
+            <a:cxnSpLocks/>
+            <a:stCxn id="2" idx="3"/>
+            <a:endCxn id="4" idx="1"/>
+          </p:cNvCxnSpPr>
+          <p:nvPr/>
+        </p:nvCxnSpPr>
+        <p:spPr>
+          <a:xfrm>
+            <a:off x="1713049" y="3742143"/>
+            <a:ext cx="1010874" cy="949080"/>
+          </a:xfrm>
+          <a:prstGeom prst="straightConnector1">
+            <a:avLst/>
+          </a:prstGeom>
+          <a:ln>
+            <a:solidFill>
+              <a:srgbClr val="757575"/>
+            </a:solidFill>
+            <a:tailEnd type="triangle"/>
+          </a:ln>
+        </p:spPr>
+        <p:style>
+          <a:lnRef idx="2">
+            <a:schemeClr val="accent1"/>
+          </a:lnRef>
+          <a:fillRef idx="0">
+            <a:schemeClr val="accent1"/>
+          </a:fillRef>
+          <a:effectRef idx="1">
+            <a:schemeClr val="accent1"/>
+          </a:effectRef>
+          <a:fontRef idx="minor">
+            <a:schemeClr val="tx1"/>
+          </a:fontRef>
+        </p:style>
+      </p:cxnSp>
       <p:pic>
         <p:nvPicPr>
-          <p:cNvPr id="20" name="Picture 19">
-            <a:extLst>
-              <a:ext uri="{FF2B5EF4-FFF2-40B4-BE49-F238E27FC236}">
-                <a16:creationId xmlns:a16="http://schemas.microsoft.com/office/drawing/2014/main" id="{62FCD204-BAB0-F2CB-EC1C-6AF66313CFB7}"/>
+          <p:cNvPr id="35" name="Picture 34">
+            <a:extLst>
+              <a:ext uri="{FF2B5EF4-FFF2-40B4-BE49-F238E27FC236}">
+                <a16:creationId xmlns:a16="http://schemas.microsoft.com/office/drawing/2014/main" id="{D3D1A9A7-37A2-0851-FD21-035E2ADB21F9}"/>
               </a:ext>
             </a:extLst>
           </p:cNvPr>
@@ -4964,55 +6184,275 @@
           <p:nvPr/>
         </p:nvPicPr>
         <p:blipFill>
-          <a:blip r:embed="rId3"/>
+          <a:blip r:embed="rId5"/>
           <a:stretch>
             <a:fillRect/>
           </a:stretch>
         </p:blipFill>
         <p:spPr>
           <a:xfrm>
-            <a:off x="2356746" y="1659822"/>
-            <a:ext cx="7099267" cy="2027981"/>
+            <a:off x="5597080" y="3202706"/>
+            <a:ext cx="2330948" cy="1134009"/>
           </a:xfrm>
           <a:prstGeom prst="rect">
             <a:avLst/>
           </a:prstGeom>
         </p:spPr>
       </p:pic>
-      <p:pic>
-        <p:nvPicPr>
-          <p:cNvPr id="22" name="Picture 21">
-            <a:extLst>
-              <a:ext uri="{FF2B5EF4-FFF2-40B4-BE49-F238E27FC236}">
-                <a16:creationId xmlns:a16="http://schemas.microsoft.com/office/drawing/2014/main" id="{1B09A284-3EFE-E968-4348-15401C582893}"/>
-              </a:ext>
-            </a:extLst>
-          </p:cNvPr>
-          <p:cNvPicPr>
-            <a:picLocks noChangeAspect="1"/>
-          </p:cNvPicPr>
-          <p:nvPr/>
-        </p:nvPicPr>
-        <p:blipFill>
-          <a:blip r:embed="rId4"/>
-          <a:stretch>
-            <a:fillRect/>
-          </a:stretch>
-        </p:blipFill>
-        <p:spPr>
-          <a:xfrm>
-            <a:off x="4143738" y="4092335"/>
-            <a:ext cx="7772400" cy="2463560"/>
+      <p:cxnSp>
+        <p:nvCxnSpPr>
+          <p:cNvPr id="10" name="Straight Connector 9">
+            <a:extLst>
+              <a:ext uri="{FF2B5EF4-FFF2-40B4-BE49-F238E27FC236}">
+                <a16:creationId xmlns:a16="http://schemas.microsoft.com/office/drawing/2014/main" id="{CA483101-29BD-8E55-CAE2-FD3F5D2AB3F9}"/>
+              </a:ext>
+            </a:extLst>
+          </p:cNvPr>
+          <p:cNvCxnSpPr/>
+          <p:nvPr/>
+        </p:nvCxnSpPr>
+        <p:spPr>
+          <a:xfrm>
+            <a:off x="5116007" y="1215342"/>
+            <a:ext cx="0" cy="5092861"/>
+          </a:xfrm>
+          <a:prstGeom prst="line">
+            <a:avLst/>
+          </a:prstGeom>
+          <a:ln>
+            <a:solidFill>
+              <a:srgbClr val="757575"/>
+            </a:solidFill>
+          </a:ln>
+        </p:spPr>
+        <p:style>
+          <a:lnRef idx="2">
+            <a:schemeClr val="accent1"/>
+          </a:lnRef>
+          <a:fillRef idx="0">
+            <a:schemeClr val="accent1"/>
+          </a:fillRef>
+          <a:effectRef idx="1">
+            <a:schemeClr val="accent1"/>
+          </a:effectRef>
+          <a:fontRef idx="minor">
+            <a:schemeClr val="tx1"/>
+          </a:fontRef>
+        </p:style>
+      </p:cxnSp>
+      <p:cxnSp>
+        <p:nvCxnSpPr>
+          <p:cNvPr id="17" name="Straight Connector 16">
+            <a:extLst>
+              <a:ext uri="{FF2B5EF4-FFF2-40B4-BE49-F238E27FC236}">
+                <a16:creationId xmlns:a16="http://schemas.microsoft.com/office/drawing/2014/main" id="{05E8E1D6-CC92-6774-378B-FC33676D26CD}"/>
+              </a:ext>
+            </a:extLst>
+          </p:cNvPr>
+          <p:cNvCxnSpPr/>
+          <p:nvPr/>
+        </p:nvCxnSpPr>
+        <p:spPr>
+          <a:xfrm>
+            <a:off x="8370422" y="1221473"/>
+            <a:ext cx="0" cy="5092861"/>
+          </a:xfrm>
+          <a:prstGeom prst="line">
+            <a:avLst/>
+          </a:prstGeom>
+          <a:ln>
+            <a:solidFill>
+              <a:srgbClr val="757575"/>
+            </a:solidFill>
+          </a:ln>
+        </p:spPr>
+        <p:style>
+          <a:lnRef idx="2">
+            <a:schemeClr val="accent1"/>
+          </a:lnRef>
+          <a:fillRef idx="0">
+            <a:schemeClr val="accent1"/>
+          </a:fillRef>
+          <a:effectRef idx="1">
+            <a:schemeClr val="accent1"/>
+          </a:effectRef>
+          <a:fontRef idx="minor">
+            <a:schemeClr val="tx1"/>
+          </a:fontRef>
+        </p:style>
+      </p:cxnSp>
+      <p:sp>
+        <p:nvSpPr>
+          <p:cNvPr id="21" name="TextBox 20">
+            <a:extLst>
+              <a:ext uri="{FF2B5EF4-FFF2-40B4-BE49-F238E27FC236}">
+                <a16:creationId xmlns:a16="http://schemas.microsoft.com/office/drawing/2014/main" id="{792DF4A2-2466-735B-3260-DF4733E10028}"/>
+              </a:ext>
+            </a:extLst>
+          </p:cNvPr>
+          <p:cNvSpPr txBox="1"/>
+          <p:nvPr/>
+        </p:nvSpPr>
+        <p:spPr>
+          <a:xfrm>
+            <a:off x="1520167" y="1076574"/>
+            <a:ext cx="2407512" cy="369332"/>
           </a:xfrm>
           <a:prstGeom prst="rect">
             <a:avLst/>
           </a:prstGeom>
-        </p:spPr>
-      </p:pic>
+          <a:noFill/>
+        </p:spPr>
+        <p:txBody>
+          <a:bodyPr wrap="square" rtlCol="0">
+            <a:spAutoFit/>
+          </a:bodyPr>
+          <a:lstStyle/>
+          <a:p>
+            <a:r>
+              <a:rPr lang="en-US" b="1" dirty="0">
+                <a:solidFill>
+                  <a:srgbClr val="6E6E6E"/>
+                </a:solidFill>
+                <a:latin typeface="Times New Roman" panose="02020603050405020304" pitchFamily="18" charset="0"/>
+                <a:cs typeface="Times New Roman" panose="02020603050405020304" pitchFamily="18" charset="0"/>
+              </a:rPr>
+              <a:t>Domain &amp; Technology</a:t>
+            </a:r>
+          </a:p>
+        </p:txBody>
+      </p:sp>
+      <p:sp>
+        <p:nvSpPr>
+          <p:cNvPr id="22" name="TextBox 21">
+            <a:extLst>
+              <a:ext uri="{FF2B5EF4-FFF2-40B4-BE49-F238E27FC236}">
+                <a16:creationId xmlns:a16="http://schemas.microsoft.com/office/drawing/2014/main" id="{55E842A5-9880-DEDB-B6A1-C5D49D0CF13D}"/>
+              </a:ext>
+            </a:extLst>
+          </p:cNvPr>
+          <p:cNvSpPr txBox="1"/>
+          <p:nvPr/>
+        </p:nvSpPr>
+        <p:spPr>
+          <a:xfrm>
+            <a:off x="6070918" y="1076574"/>
+            <a:ext cx="1045580" cy="369332"/>
+          </a:xfrm>
+          <a:prstGeom prst="rect">
+            <a:avLst/>
+          </a:prstGeom>
+          <a:noFill/>
+        </p:spPr>
+        <p:txBody>
+          <a:bodyPr wrap="square" rtlCol="0">
+            <a:spAutoFit/>
+          </a:bodyPr>
+          <a:lstStyle/>
+          <a:p>
+            <a:r>
+              <a:rPr lang="en-US" b="1" dirty="0">
+                <a:solidFill>
+                  <a:srgbClr val="6E6E6E"/>
+                </a:solidFill>
+                <a:latin typeface="Times New Roman" panose="02020603050405020304" pitchFamily="18" charset="0"/>
+                <a:cs typeface="Times New Roman" panose="02020603050405020304" pitchFamily="18" charset="0"/>
+              </a:rPr>
+              <a:t>Product</a:t>
+            </a:r>
+          </a:p>
+        </p:txBody>
+      </p:sp>
+      <p:sp>
+        <p:nvSpPr>
+          <p:cNvPr id="24" name="TextBox 23">
+            <a:extLst>
+              <a:ext uri="{FF2B5EF4-FFF2-40B4-BE49-F238E27FC236}">
+                <a16:creationId xmlns:a16="http://schemas.microsoft.com/office/drawing/2014/main" id="{9598A33F-5B52-CE72-CFC1-CA69BDD6E659}"/>
+              </a:ext>
+            </a:extLst>
+          </p:cNvPr>
+          <p:cNvSpPr txBox="1"/>
+          <p:nvPr/>
+        </p:nvSpPr>
+        <p:spPr>
+          <a:xfrm>
+            <a:off x="9355231" y="1076574"/>
+            <a:ext cx="1684122" cy="369332"/>
+          </a:xfrm>
+          <a:prstGeom prst="rect">
+            <a:avLst/>
+          </a:prstGeom>
+          <a:noFill/>
+        </p:spPr>
+        <p:txBody>
+          <a:bodyPr wrap="square" rtlCol="0">
+            <a:spAutoFit/>
+          </a:bodyPr>
+          <a:lstStyle/>
+          <a:p>
+            <a:r>
+              <a:rPr lang="en-US" b="1" dirty="0">
+                <a:solidFill>
+                  <a:srgbClr val="6E6E6E"/>
+                </a:solidFill>
+                <a:latin typeface="Times New Roman" panose="02020603050405020304" pitchFamily="18" charset="0"/>
+                <a:cs typeface="Times New Roman" panose="02020603050405020304" pitchFamily="18" charset="0"/>
+              </a:rPr>
+              <a:t>Core Concepts</a:t>
+            </a:r>
+          </a:p>
+        </p:txBody>
+      </p:sp>
+      <p:sp>
+        <p:nvSpPr>
+          <p:cNvPr id="26" name="TextBox 25">
+            <a:extLst>
+              <a:ext uri="{FF2B5EF4-FFF2-40B4-BE49-F238E27FC236}">
+                <a16:creationId xmlns:a16="http://schemas.microsoft.com/office/drawing/2014/main" id="{E32B08A6-B97E-B691-EF8C-8E96D24559D1}"/>
+              </a:ext>
+            </a:extLst>
+          </p:cNvPr>
+          <p:cNvSpPr txBox="1"/>
+          <p:nvPr/>
+        </p:nvSpPr>
+        <p:spPr>
+          <a:xfrm>
+            <a:off x="3356403" y="189106"/>
+            <a:ext cx="6016987" cy="477054"/>
+          </a:xfrm>
+          <a:prstGeom prst="rect">
+            <a:avLst/>
+          </a:prstGeom>
+          <a:noFill/>
+        </p:spPr>
+        <p:txBody>
+          <a:bodyPr wrap="square" rtlCol="0">
+            <a:spAutoFit/>
+          </a:bodyPr>
+          <a:lstStyle/>
+          <a:p>
+            <a:r>
+              <a:rPr lang="en-US" sz="2500" b="1" dirty="0" err="1">
+                <a:latin typeface="Times New Roman" panose="02020603050405020304" pitchFamily="18" charset="0"/>
+                <a:cs typeface="Times New Roman" panose="02020603050405020304" pitchFamily="18" charset="0"/>
+              </a:rPr>
+              <a:t>RadAssistIQ</a:t>
+            </a:r>
+            <a:r>
+              <a:rPr lang="en-US" sz="2500" b="1" dirty="0">
+                <a:latin typeface="Times New Roman" panose="02020603050405020304" pitchFamily="18" charset="0"/>
+                <a:cs typeface="Times New Roman" panose="02020603050405020304" pitchFamily="18" charset="0"/>
+              </a:rPr>
+              <a:t> – High Level Understanding</a:t>
+            </a:r>
+          </a:p>
+        </p:txBody>
+      </p:sp>
     </p:spTree>
     <p:extLst>
       <p:ext uri="{BB962C8B-B14F-4D97-AF65-F5344CB8AC3E}">
-        <p14:creationId xmlns:p14="http://schemas.microsoft.com/office/powerpoint/2010/main" val="3821872091"/>
+        <p14:creationId xmlns:p14="http://schemas.microsoft.com/office/powerpoint/2010/main" val="1674306470"/>
       </p:ext>
     </p:extLst>
   </p:cSld>
@@ -5022,7 +6462,7 @@
 </p:sld>
 </file>
 
-<file path=ppt/slides/slide4.xml><?xml version="1.0" encoding="utf-8"?>
+<file path=ppt/slides/slide5.xml><?xml version="1.0" encoding="utf-8"?>
 <p:sld xmlns:a="http://schemas.openxmlformats.org/drawingml/2006/main" xmlns:r="http://schemas.openxmlformats.org/officeDocument/2006/relationships" xmlns:p="http://schemas.openxmlformats.org/presentationml/2006/main">
   <p:cSld>
     <p:spTree>
@@ -6596,8 +8036,8 @@
         </p:nvSpPr>
         <p:spPr>
           <a:xfrm>
-            <a:off x="4628210" y="407846"/>
-            <a:ext cx="2756437" cy="369332"/>
+            <a:off x="4248443" y="401748"/>
+            <a:ext cx="3266853" cy="477054"/>
           </a:xfrm>
           <a:prstGeom prst="rect">
             <a:avLst/>
@@ -6611,12 +8051,62 @@
           <a:lstStyle/>
           <a:p>
             <a:r>
-              <a:rPr lang="en-US" b="1" dirty="0">
+              <a:rPr lang="en-US" sz="2500" b="1" dirty="0">
                 <a:latin typeface="Times New Roman" panose="02020603050405020304" pitchFamily="18" charset="0"/>
                 <a:cs typeface="Times New Roman" panose="02020603050405020304" pitchFamily="18" charset="0"/>
               </a:rPr>
               <a:t>Technical Architecture</a:t>
             </a:r>
+          </a:p>
+        </p:txBody>
+      </p:sp>
+      <p:sp>
+        <p:nvSpPr>
+          <p:cNvPr id="2" name="TextBox 1">
+            <a:extLst>
+              <a:ext uri="{FF2B5EF4-FFF2-40B4-BE49-F238E27FC236}">
+                <a16:creationId xmlns:a16="http://schemas.microsoft.com/office/drawing/2014/main" id="{52B3C828-5937-CD2E-4E0A-43A7EBDD16F1}"/>
+              </a:ext>
+            </a:extLst>
+          </p:cNvPr>
+          <p:cNvSpPr txBox="1"/>
+          <p:nvPr/>
+        </p:nvSpPr>
+        <p:spPr>
+          <a:xfrm>
+            <a:off x="4157087" y="2276702"/>
+            <a:ext cx="1641796" cy="276999"/>
+          </a:xfrm>
+          <a:prstGeom prst="rect">
+            <a:avLst/>
+          </a:prstGeom>
+          <a:noFill/>
+        </p:spPr>
+        <p:txBody>
+          <a:bodyPr wrap="none" rtlCol="0">
+            <a:spAutoFit/>
+          </a:bodyPr>
+          <a:lstStyle/>
+          <a:p>
+            <a:r>
+              <a:rPr lang="en-US" sz="1200" dirty="0">
+                <a:latin typeface="Times New Roman" panose="02020603050405020304" pitchFamily="18" charset="0"/>
+                <a:cs typeface="Times New Roman" panose="02020603050405020304" pitchFamily="18" charset="0"/>
+              </a:rPr>
+              <a:t>Dataset Source: </a:t>
+            </a:r>
+            <a:r>
+              <a:rPr lang="en-US" sz="1200" dirty="0">
+                <a:latin typeface="Times New Roman" panose="02020603050405020304" pitchFamily="18" charset="0"/>
+                <a:cs typeface="Times New Roman" panose="02020603050405020304" pitchFamily="18" charset="0"/>
+                <a:hlinkClick r:id="rId2"/>
+              </a:rPr>
+              <a:t>Kaggle</a:t>
+            </a:r>
+            <a:endParaRPr lang="en-US" sz="1200" dirty="0">
+              <a:latin typeface="Times New Roman" panose="02020603050405020304" pitchFamily="18" charset="0"/>
+              <a:cs typeface="Times New Roman" panose="02020603050405020304" pitchFamily="18" charset="0"/>
+            </a:endParaRPr>
           </a:p>
         </p:txBody>
       </p:sp>
@@ -6624,6 +8114,652 @@
     <p:extLst>
       <p:ext uri="{BB962C8B-B14F-4D97-AF65-F5344CB8AC3E}">
         <p14:creationId xmlns:p14="http://schemas.microsoft.com/office/powerpoint/2010/main" val="2766181437"/>
+      </p:ext>
+    </p:extLst>
+  </p:cSld>
+  <p:clrMapOvr>
+    <a:masterClrMapping/>
+  </p:clrMapOvr>
+</p:sld>
+</file>
+
+<file path=ppt/slides/slide6.xml><?xml version="1.0" encoding="utf-8"?>
+<p:sld xmlns:a="http://schemas.openxmlformats.org/drawingml/2006/main" xmlns:r="http://schemas.openxmlformats.org/officeDocument/2006/relationships" xmlns:p="http://schemas.openxmlformats.org/presentationml/2006/main">
+  <p:cSld>
+    <p:spTree>
+      <p:nvGrpSpPr>
+        <p:cNvPr id="1" name=""/>
+        <p:cNvGrpSpPr/>
+        <p:nvPr/>
+      </p:nvGrpSpPr>
+      <p:grpSpPr>
+        <a:xfrm>
+          <a:off x="0" y="0"/>
+          <a:ext cx="0" cy="0"/>
+          <a:chOff x="0" y="0"/>
+          <a:chExt cx="0" cy="0"/>
+        </a:xfrm>
+      </p:grpSpPr>
+      <p:pic>
+        <p:nvPicPr>
+          <p:cNvPr id="2" name="Picture 1">
+            <a:extLst>
+              <a:ext uri="{FF2B5EF4-FFF2-40B4-BE49-F238E27FC236}">
+                <a16:creationId xmlns:a16="http://schemas.microsoft.com/office/drawing/2014/main" id="{E24AF7AB-B9C4-2A3E-C985-2D87CCB8314D}"/>
+              </a:ext>
+            </a:extLst>
+          </p:cNvPr>
+          <p:cNvPicPr>
+            <a:picLocks noChangeAspect="1"/>
+          </p:cNvPicPr>
+          <p:nvPr/>
+        </p:nvPicPr>
+        <p:blipFill>
+          <a:blip r:embed="rId2"/>
+          <a:stretch>
+            <a:fillRect/>
+          </a:stretch>
+        </p:blipFill>
+        <p:spPr>
+          <a:xfrm>
+            <a:off x="3468029" y="1441547"/>
+            <a:ext cx="4626000" cy="4252777"/>
+          </a:xfrm>
+          <a:prstGeom prst="rect">
+            <a:avLst/>
+          </a:prstGeom>
+          <a:solidFill>
+            <a:schemeClr val="bg1"/>
+          </a:solidFill>
+          <a:ln>
+            <a:solidFill>
+              <a:schemeClr val="dk1"/>
+            </a:solidFill>
+          </a:ln>
+        </p:spPr>
+      </p:pic>
+      <p:sp>
+        <p:nvSpPr>
+          <p:cNvPr id="3" name="TextBox 2">
+            <a:extLst>
+              <a:ext uri="{FF2B5EF4-FFF2-40B4-BE49-F238E27FC236}">
+                <a16:creationId xmlns:a16="http://schemas.microsoft.com/office/drawing/2014/main" id="{136E3E4B-05BC-3DCF-9284-E45E32CB6DFE}"/>
+              </a:ext>
+            </a:extLst>
+          </p:cNvPr>
+          <p:cNvSpPr txBox="1"/>
+          <p:nvPr/>
+        </p:nvSpPr>
+        <p:spPr>
+          <a:xfrm>
+            <a:off x="4961508" y="407847"/>
+            <a:ext cx="2756437" cy="477054"/>
+          </a:xfrm>
+          <a:prstGeom prst="rect">
+            <a:avLst/>
+          </a:prstGeom>
+          <a:noFill/>
+        </p:spPr>
+        <p:txBody>
+          <a:bodyPr wrap="square" rtlCol="0">
+            <a:spAutoFit/>
+          </a:bodyPr>
+          <a:lstStyle/>
+          <a:p>
+            <a:r>
+              <a:rPr lang="en-US" sz="2500" b="1" dirty="0">
+                <a:latin typeface="Times New Roman" panose="02020603050405020304" pitchFamily="18" charset="0"/>
+                <a:cs typeface="Times New Roman" panose="02020603050405020304" pitchFamily="18" charset="0"/>
+              </a:rPr>
+              <a:t>Evaluation</a:t>
+            </a:r>
+          </a:p>
+        </p:txBody>
+      </p:sp>
+    </p:spTree>
+    <p:extLst>
+      <p:ext uri="{BB962C8B-B14F-4D97-AF65-F5344CB8AC3E}">
+        <p14:creationId xmlns:p14="http://schemas.microsoft.com/office/powerpoint/2010/main" val="395111889"/>
+      </p:ext>
+    </p:extLst>
+  </p:cSld>
+  <p:clrMapOvr>
+    <a:masterClrMapping/>
+  </p:clrMapOvr>
+</p:sld>
+</file>
+
+<file path=ppt/slides/slide7.xml><?xml version="1.0" encoding="utf-8"?>
+<p:sld xmlns:a="http://schemas.openxmlformats.org/drawingml/2006/main" xmlns:r="http://schemas.openxmlformats.org/officeDocument/2006/relationships" xmlns:p="http://schemas.openxmlformats.org/presentationml/2006/main">
+  <p:cSld>
+    <p:spTree>
+      <p:nvGrpSpPr>
+        <p:cNvPr id="1" name=""/>
+        <p:cNvGrpSpPr/>
+        <p:nvPr/>
+      </p:nvGrpSpPr>
+      <p:grpSpPr>
+        <a:xfrm>
+          <a:off x="0" y="0"/>
+          <a:ext cx="0" cy="0"/>
+          <a:chOff x="0" y="0"/>
+          <a:chExt cx="0" cy="0"/>
+        </a:xfrm>
+      </p:grpSpPr>
+      <p:sp>
+        <p:nvSpPr>
+          <p:cNvPr id="2" name="TextBox 1">
+            <a:extLst>
+              <a:ext uri="{FF2B5EF4-FFF2-40B4-BE49-F238E27FC236}">
+                <a16:creationId xmlns:a16="http://schemas.microsoft.com/office/drawing/2014/main" id="{EB86585B-7485-0337-6DE0-DEDAF2AA5CB5}"/>
+              </a:ext>
+            </a:extLst>
+          </p:cNvPr>
+          <p:cNvSpPr txBox="1"/>
+          <p:nvPr/>
+        </p:nvSpPr>
+        <p:spPr>
+          <a:xfrm>
+            <a:off x="2709746" y="407847"/>
+            <a:ext cx="6779942" cy="477054"/>
+          </a:xfrm>
+          <a:prstGeom prst="rect">
+            <a:avLst/>
+          </a:prstGeom>
+          <a:noFill/>
+        </p:spPr>
+        <p:txBody>
+          <a:bodyPr wrap="square" rtlCol="0">
+            <a:spAutoFit/>
+          </a:bodyPr>
+          <a:lstStyle/>
+          <a:p>
+            <a:r>
+              <a:rPr lang="en-US" sz="2500" b="1" dirty="0">
+                <a:latin typeface="Times New Roman" panose="02020603050405020304" pitchFamily="18" charset="0"/>
+                <a:cs typeface="Times New Roman" panose="02020603050405020304" pitchFamily="18" charset="0"/>
+              </a:rPr>
+              <a:t>Future Enhancement &amp; Integrations</a:t>
+            </a:r>
+          </a:p>
+        </p:txBody>
+      </p:sp>
+      <p:sp>
+        <p:nvSpPr>
+          <p:cNvPr id="6" name="TextBox 5">
+            <a:extLst>
+              <a:ext uri="{FF2B5EF4-FFF2-40B4-BE49-F238E27FC236}">
+                <a16:creationId xmlns:a16="http://schemas.microsoft.com/office/drawing/2014/main" id="{CC3F5A56-9A7B-96DC-C6D4-C7A38D5F2D3C}"/>
+              </a:ext>
+            </a:extLst>
+          </p:cNvPr>
+          <p:cNvSpPr txBox="1"/>
+          <p:nvPr/>
+        </p:nvSpPr>
+        <p:spPr>
+          <a:xfrm>
+            <a:off x="947968" y="1698173"/>
+            <a:ext cx="5205271" cy="369332"/>
+          </a:xfrm>
+          <a:prstGeom prst="rect">
+            <a:avLst/>
+          </a:prstGeom>
+          <a:noFill/>
+        </p:spPr>
+        <p:txBody>
+          <a:bodyPr wrap="none" rtlCol="0">
+            <a:spAutoFit/>
+          </a:bodyPr>
+          <a:lstStyle/>
+          <a:p>
+            <a:r>
+              <a:rPr lang="en-US" b="1" dirty="0">
+                <a:latin typeface="Times New Roman" panose="02020603050405020304" pitchFamily="18" charset="0"/>
+                <a:cs typeface="Times New Roman" panose="02020603050405020304" pitchFamily="18" charset="0"/>
+              </a:rPr>
+              <a:t>Integrate</a:t>
+            </a:r>
+            <a:r>
+              <a:rPr lang="en-US" dirty="0">
+                <a:latin typeface="Times New Roman" panose="02020603050405020304" pitchFamily="18" charset="0"/>
+                <a:cs typeface="Times New Roman" panose="02020603050405020304" pitchFamily="18" charset="0"/>
+              </a:rPr>
+              <a:t> </a:t>
+            </a:r>
+            <a:r>
+              <a:rPr lang="en-US" b="1" dirty="0">
+                <a:latin typeface="Times New Roman" panose="02020603050405020304" pitchFamily="18" charset="0"/>
+                <a:cs typeface="Times New Roman" panose="02020603050405020304" pitchFamily="18" charset="0"/>
+              </a:rPr>
+              <a:t>EMR</a:t>
+            </a:r>
+            <a:r>
+              <a:rPr lang="en-US" dirty="0">
+                <a:latin typeface="Times New Roman" panose="02020603050405020304" pitchFamily="18" charset="0"/>
+                <a:cs typeface="Times New Roman" panose="02020603050405020304" pitchFamily="18" charset="0"/>
+              </a:rPr>
+              <a:t> data to enhance LLM clinical context</a:t>
+            </a:r>
+          </a:p>
+        </p:txBody>
+      </p:sp>
+      <p:sp>
+        <p:nvSpPr>
+          <p:cNvPr id="14" name="TextBox 13">
+            <a:extLst>
+              <a:ext uri="{FF2B5EF4-FFF2-40B4-BE49-F238E27FC236}">
+                <a16:creationId xmlns:a16="http://schemas.microsoft.com/office/drawing/2014/main" id="{B63D6EFB-12DF-2E77-2DBD-0646E9607ADC}"/>
+              </a:ext>
+            </a:extLst>
+          </p:cNvPr>
+          <p:cNvSpPr txBox="1"/>
+          <p:nvPr/>
+        </p:nvSpPr>
+        <p:spPr>
+          <a:xfrm>
+            <a:off x="1879599" y="2431482"/>
+            <a:ext cx="7881257" cy="369332"/>
+          </a:xfrm>
+          <a:prstGeom prst="rect">
+            <a:avLst/>
+          </a:prstGeom>
+          <a:noFill/>
+        </p:spPr>
+        <p:txBody>
+          <a:bodyPr wrap="square">
+            <a:spAutoFit/>
+          </a:bodyPr>
+          <a:lstStyle/>
+          <a:p>
+            <a:r>
+              <a:rPr lang="en-US" b="1" dirty="0">
+                <a:latin typeface="Times New Roman" panose="02020603050405020304" pitchFamily="18" charset="0"/>
+                <a:cs typeface="Times New Roman" panose="02020603050405020304" pitchFamily="18" charset="0"/>
+              </a:rPr>
+              <a:t>Fine-tune DenseNet121 </a:t>
+            </a:r>
+            <a:r>
+              <a:rPr lang="en-US" dirty="0">
+                <a:latin typeface="Times New Roman" panose="02020603050405020304" pitchFamily="18" charset="0"/>
+                <a:cs typeface="Times New Roman" panose="02020603050405020304" pitchFamily="18" charset="0"/>
+              </a:rPr>
+              <a:t>on large, diverse datasets using high-end GPU systems</a:t>
+            </a:r>
+          </a:p>
+        </p:txBody>
+      </p:sp>
+      <p:sp>
+        <p:nvSpPr>
+          <p:cNvPr id="16" name="TextBox 15">
+            <a:extLst>
+              <a:ext uri="{FF2B5EF4-FFF2-40B4-BE49-F238E27FC236}">
+                <a16:creationId xmlns:a16="http://schemas.microsoft.com/office/drawing/2014/main" id="{270AA0D7-500B-5001-D03D-BA7555CE25EB}"/>
+              </a:ext>
+            </a:extLst>
+          </p:cNvPr>
+          <p:cNvSpPr txBox="1"/>
+          <p:nvPr/>
+        </p:nvSpPr>
+        <p:spPr>
+          <a:xfrm>
+            <a:off x="2976999" y="3186562"/>
+            <a:ext cx="6323118" cy="369332"/>
+          </a:xfrm>
+          <a:prstGeom prst="rect">
+            <a:avLst/>
+          </a:prstGeom>
+          <a:noFill/>
+        </p:spPr>
+        <p:txBody>
+          <a:bodyPr wrap="square">
+            <a:spAutoFit/>
+          </a:bodyPr>
+          <a:lstStyle/>
+          <a:p>
+            <a:r>
+              <a:rPr lang="en-US" dirty="0">
+                <a:latin typeface="Times New Roman" panose="02020603050405020304" pitchFamily="18" charset="0"/>
+                <a:cs typeface="Times New Roman" panose="02020603050405020304" pitchFamily="18" charset="0"/>
+              </a:rPr>
+              <a:t>Leverage secure, advanced </a:t>
+            </a:r>
+            <a:r>
+              <a:rPr lang="en-US" b="1" dirty="0">
+                <a:latin typeface="Times New Roman" panose="02020603050405020304" pitchFamily="18" charset="0"/>
+                <a:cs typeface="Times New Roman" panose="02020603050405020304" pitchFamily="18" charset="0"/>
+              </a:rPr>
+              <a:t>Azure OpenAI LLMs such as gpt-4</a:t>
+            </a:r>
+          </a:p>
+        </p:txBody>
+      </p:sp>
+      <p:sp>
+        <p:nvSpPr>
+          <p:cNvPr id="18" name="TextBox 17">
+            <a:extLst>
+              <a:ext uri="{FF2B5EF4-FFF2-40B4-BE49-F238E27FC236}">
+                <a16:creationId xmlns:a16="http://schemas.microsoft.com/office/drawing/2014/main" id="{6AAB9E05-6DEE-3F86-6ABD-0F132D9BE931}"/>
+              </a:ext>
+            </a:extLst>
+          </p:cNvPr>
+          <p:cNvSpPr txBox="1"/>
+          <p:nvPr/>
+        </p:nvSpPr>
+        <p:spPr>
+          <a:xfrm>
+            <a:off x="5413830" y="3941642"/>
+            <a:ext cx="6096000" cy="369332"/>
+          </a:xfrm>
+          <a:prstGeom prst="rect">
+            <a:avLst/>
+          </a:prstGeom>
+          <a:noFill/>
+        </p:spPr>
+        <p:txBody>
+          <a:bodyPr wrap="square">
+            <a:spAutoFit/>
+          </a:bodyPr>
+          <a:lstStyle/>
+          <a:p>
+            <a:r>
+              <a:rPr lang="en-US" dirty="0">
+                <a:latin typeface="Times New Roman" panose="02020603050405020304" pitchFamily="18" charset="0"/>
+                <a:cs typeface="Times New Roman" panose="02020603050405020304" pitchFamily="18" charset="0"/>
+              </a:rPr>
+              <a:t>Use </a:t>
+            </a:r>
+            <a:r>
+              <a:rPr lang="en-US" b="1" dirty="0">
+                <a:latin typeface="Times New Roman" panose="02020603050405020304" pitchFamily="18" charset="0"/>
+                <a:cs typeface="Times New Roman" panose="02020603050405020304" pitchFamily="18" charset="0"/>
+              </a:rPr>
+              <a:t>asynchronous model calling </a:t>
+            </a:r>
+            <a:r>
+              <a:rPr lang="en-US" dirty="0">
+                <a:latin typeface="Times New Roman" panose="02020603050405020304" pitchFamily="18" charset="0"/>
+                <a:cs typeface="Times New Roman" panose="02020603050405020304" pitchFamily="18" charset="0"/>
+              </a:rPr>
+              <a:t>for efficiency</a:t>
+            </a:r>
+          </a:p>
+        </p:txBody>
+      </p:sp>
+      <p:sp>
+        <p:nvSpPr>
+          <p:cNvPr id="20" name="TextBox 19">
+            <a:extLst>
+              <a:ext uri="{FF2B5EF4-FFF2-40B4-BE49-F238E27FC236}">
+                <a16:creationId xmlns:a16="http://schemas.microsoft.com/office/drawing/2014/main" id="{2578C2C3-0E81-3261-D27F-E621D823E536}"/>
+              </a:ext>
+            </a:extLst>
+          </p:cNvPr>
+          <p:cNvSpPr txBox="1"/>
+          <p:nvPr/>
+        </p:nvSpPr>
+        <p:spPr>
+          <a:xfrm>
+            <a:off x="6284686" y="4696722"/>
+            <a:ext cx="5225141" cy="369332"/>
+          </a:xfrm>
+          <a:prstGeom prst="rect">
+            <a:avLst/>
+          </a:prstGeom>
+          <a:noFill/>
+        </p:spPr>
+        <p:txBody>
+          <a:bodyPr wrap="square">
+            <a:spAutoFit/>
+          </a:bodyPr>
+          <a:lstStyle/>
+          <a:p>
+            <a:r>
+              <a:rPr lang="en-US" dirty="0">
+                <a:latin typeface="Times New Roman" panose="02020603050405020304" pitchFamily="18" charset="0"/>
+                <a:cs typeface="Times New Roman" panose="02020603050405020304" pitchFamily="18" charset="0"/>
+              </a:rPr>
+              <a:t>Deploy via AWS Kubernetes with </a:t>
+            </a:r>
+            <a:r>
+              <a:rPr lang="en-US" b="1" dirty="0">
+                <a:latin typeface="Times New Roman" panose="02020603050405020304" pitchFamily="18" charset="0"/>
+                <a:cs typeface="Times New Roman" panose="02020603050405020304" pitchFamily="18" charset="0"/>
+              </a:rPr>
+              <a:t>multi-pod scaling</a:t>
+            </a:r>
+          </a:p>
+        </p:txBody>
+      </p:sp>
+      <p:cxnSp>
+        <p:nvCxnSpPr>
+          <p:cNvPr id="22" name="Straight Arrow Connector 21">
+            <a:extLst>
+              <a:ext uri="{FF2B5EF4-FFF2-40B4-BE49-F238E27FC236}">
+                <a16:creationId xmlns:a16="http://schemas.microsoft.com/office/drawing/2014/main" id="{22096E66-CC30-FC4D-FFA2-803CE4491E03}"/>
+              </a:ext>
+            </a:extLst>
+          </p:cNvPr>
+          <p:cNvCxnSpPr/>
+          <p:nvPr/>
+        </p:nvCxnSpPr>
+        <p:spPr>
+          <a:xfrm>
+            <a:off x="4339772" y="2096533"/>
+            <a:ext cx="0" cy="363977"/>
+          </a:xfrm>
+          <a:prstGeom prst="straightConnector1">
+            <a:avLst/>
+          </a:prstGeom>
+          <a:ln>
+            <a:tailEnd type="triangle"/>
+          </a:ln>
+        </p:spPr>
+        <p:style>
+          <a:lnRef idx="2">
+            <a:schemeClr val="dk1"/>
+          </a:lnRef>
+          <a:fillRef idx="0">
+            <a:schemeClr val="dk1"/>
+          </a:fillRef>
+          <a:effectRef idx="1">
+            <a:schemeClr val="dk1"/>
+          </a:effectRef>
+          <a:fontRef idx="minor">
+            <a:schemeClr val="tx1"/>
+          </a:fontRef>
+        </p:style>
+      </p:cxnSp>
+      <p:cxnSp>
+        <p:nvCxnSpPr>
+          <p:cNvPr id="23" name="Straight Arrow Connector 22">
+            <a:extLst>
+              <a:ext uri="{FF2B5EF4-FFF2-40B4-BE49-F238E27FC236}">
+                <a16:creationId xmlns:a16="http://schemas.microsoft.com/office/drawing/2014/main" id="{DE034B45-28FB-828B-9632-82B46D90CBF1}"/>
+              </a:ext>
+            </a:extLst>
+          </p:cNvPr>
+          <p:cNvCxnSpPr/>
+          <p:nvPr/>
+        </p:nvCxnSpPr>
+        <p:spPr>
+          <a:xfrm>
+            <a:off x="5812970" y="2822585"/>
+            <a:ext cx="0" cy="363977"/>
+          </a:xfrm>
+          <a:prstGeom prst="straightConnector1">
+            <a:avLst/>
+          </a:prstGeom>
+          <a:ln>
+            <a:tailEnd type="triangle"/>
+          </a:ln>
+        </p:spPr>
+        <p:style>
+          <a:lnRef idx="2">
+            <a:schemeClr val="dk1"/>
+          </a:lnRef>
+          <a:fillRef idx="0">
+            <a:schemeClr val="dk1"/>
+          </a:fillRef>
+          <a:effectRef idx="1">
+            <a:schemeClr val="dk1"/>
+          </a:effectRef>
+          <a:fontRef idx="minor">
+            <a:schemeClr val="tx1"/>
+          </a:fontRef>
+        </p:style>
+      </p:cxnSp>
+      <p:cxnSp>
+        <p:nvCxnSpPr>
+          <p:cNvPr id="24" name="Straight Arrow Connector 23">
+            <a:extLst>
+              <a:ext uri="{FF2B5EF4-FFF2-40B4-BE49-F238E27FC236}">
+                <a16:creationId xmlns:a16="http://schemas.microsoft.com/office/drawing/2014/main" id="{3E7E2A93-56FA-33F3-6736-A82457E805CB}"/>
+              </a:ext>
+            </a:extLst>
+          </p:cNvPr>
+          <p:cNvCxnSpPr/>
+          <p:nvPr/>
+        </p:nvCxnSpPr>
+        <p:spPr>
+          <a:xfrm>
+            <a:off x="7126513" y="3577665"/>
+            <a:ext cx="0" cy="363977"/>
+          </a:xfrm>
+          <a:prstGeom prst="straightConnector1">
+            <a:avLst/>
+          </a:prstGeom>
+          <a:ln>
+            <a:tailEnd type="triangle"/>
+          </a:ln>
+        </p:spPr>
+        <p:style>
+          <a:lnRef idx="2">
+            <a:schemeClr val="dk1"/>
+          </a:lnRef>
+          <a:fillRef idx="0">
+            <a:schemeClr val="dk1"/>
+          </a:fillRef>
+          <a:effectRef idx="1">
+            <a:schemeClr val="dk1"/>
+          </a:effectRef>
+          <a:fontRef idx="minor">
+            <a:schemeClr val="tx1"/>
+          </a:fontRef>
+        </p:style>
+      </p:cxnSp>
+      <p:cxnSp>
+        <p:nvCxnSpPr>
+          <p:cNvPr id="25" name="Straight Arrow Connector 24">
+            <a:extLst>
+              <a:ext uri="{FF2B5EF4-FFF2-40B4-BE49-F238E27FC236}">
+                <a16:creationId xmlns:a16="http://schemas.microsoft.com/office/drawing/2014/main" id="{30A7BFC7-CBE8-669F-2543-9D37A0FFF5B3}"/>
+              </a:ext>
+            </a:extLst>
+          </p:cNvPr>
+          <p:cNvCxnSpPr>
+            <a:cxnSpLocks/>
+          </p:cNvCxnSpPr>
+          <p:nvPr/>
+        </p:nvCxnSpPr>
+        <p:spPr>
+          <a:xfrm>
+            <a:off x="8222341" y="4332745"/>
+            <a:ext cx="0" cy="363977"/>
+          </a:xfrm>
+          <a:prstGeom prst="straightConnector1">
+            <a:avLst/>
+          </a:prstGeom>
+          <a:ln>
+            <a:tailEnd type="triangle"/>
+          </a:ln>
+        </p:spPr>
+        <p:style>
+          <a:lnRef idx="2">
+            <a:schemeClr val="dk1"/>
+          </a:lnRef>
+          <a:fillRef idx="0">
+            <a:schemeClr val="dk1"/>
+          </a:fillRef>
+          <a:effectRef idx="1">
+            <a:schemeClr val="dk1"/>
+          </a:effectRef>
+          <a:fontRef idx="minor">
+            <a:schemeClr val="tx1"/>
+          </a:fontRef>
+        </p:style>
+      </p:cxnSp>
+    </p:spTree>
+    <p:extLst>
+      <p:ext uri="{BB962C8B-B14F-4D97-AF65-F5344CB8AC3E}">
+        <p14:creationId xmlns:p14="http://schemas.microsoft.com/office/powerpoint/2010/main" val="794088569"/>
+      </p:ext>
+    </p:extLst>
+  </p:cSld>
+  <p:clrMapOvr>
+    <a:masterClrMapping/>
+  </p:clrMapOvr>
+</p:sld>
+</file>
+
+<file path=ppt/slides/slide8.xml><?xml version="1.0" encoding="utf-8"?>
+<p:sld xmlns:a="http://schemas.openxmlformats.org/drawingml/2006/main" xmlns:r="http://schemas.openxmlformats.org/officeDocument/2006/relationships" xmlns:p="http://schemas.openxmlformats.org/presentationml/2006/main">
+  <p:cSld>
+    <p:spTree>
+      <p:nvGrpSpPr>
+        <p:cNvPr id="1" name=""/>
+        <p:cNvGrpSpPr/>
+        <p:nvPr/>
+      </p:nvGrpSpPr>
+      <p:grpSpPr>
+        <a:xfrm>
+          <a:off x="0" y="0"/>
+          <a:ext cx="0" cy="0"/>
+          <a:chOff x="0" y="0"/>
+          <a:chExt cx="0" cy="0"/>
+        </a:xfrm>
+      </p:grpSpPr>
+      <p:sp>
+        <p:nvSpPr>
+          <p:cNvPr id="2" name="TextBox 1">
+            <a:extLst>
+              <a:ext uri="{FF2B5EF4-FFF2-40B4-BE49-F238E27FC236}">
+                <a16:creationId xmlns:a16="http://schemas.microsoft.com/office/drawing/2014/main" id="{418153B8-26DF-2010-CFCA-4EFF0B20E36C}"/>
+              </a:ext>
+            </a:extLst>
+          </p:cNvPr>
+          <p:cNvSpPr txBox="1"/>
+          <p:nvPr/>
+        </p:nvSpPr>
+        <p:spPr>
+          <a:xfrm>
+            <a:off x="4393579" y="2531327"/>
+            <a:ext cx="3646450" cy="707886"/>
+          </a:xfrm>
+          <a:prstGeom prst="rect">
+            <a:avLst/>
+          </a:prstGeom>
+          <a:noFill/>
+        </p:spPr>
+        <p:txBody>
+          <a:bodyPr wrap="square" rtlCol="0">
+            <a:spAutoFit/>
+          </a:bodyPr>
+          <a:lstStyle/>
+          <a:p>
+            <a:r>
+              <a:rPr lang="en-US" sz="4000" b="1" dirty="0">
+                <a:latin typeface="Times New Roman" panose="02020603050405020304" pitchFamily="18" charset="0"/>
+                <a:cs typeface="Times New Roman" panose="02020603050405020304" pitchFamily="18" charset="0"/>
+              </a:rPr>
+              <a:t>Thank you</a:t>
+            </a:r>
+          </a:p>
+        </p:txBody>
+      </p:sp>
+    </p:spTree>
+    <p:extLst>
+      <p:ext uri="{BB962C8B-B14F-4D97-AF65-F5344CB8AC3E}">
+        <p14:creationId xmlns:p14="http://schemas.microsoft.com/office/powerpoint/2010/main" val="227811867"/>
       </p:ext>
     </p:extLst>
   </p:cSld>
@@ -6946,4 +9082,319 @@
     </a:ext>
   </a:extLst>
 </a:theme>
+</file>
+
+<file path=ppt/theme/theme2.xml><?xml version="1.0" encoding="utf-8"?>
+<a:theme xmlns:a="http://schemas.openxmlformats.org/drawingml/2006/main" name="Office Theme">
+  <a:themeElements>
+    <a:clrScheme name="Office">
+      <a:dk1>
+        <a:sysClr val="windowText" lastClr="000000"/>
+      </a:dk1>
+      <a:lt1>
+        <a:sysClr val="window" lastClr="FFFFFF"/>
+      </a:lt1>
+      <a:dk2>
+        <a:srgbClr val="0E2841"/>
+      </a:dk2>
+      <a:lt2>
+        <a:srgbClr val="E8E8E8"/>
+      </a:lt2>
+      <a:accent1>
+        <a:srgbClr val="156082"/>
+      </a:accent1>
+      <a:accent2>
+        <a:srgbClr val="E97132"/>
+      </a:accent2>
+      <a:accent3>
+        <a:srgbClr val="196B24"/>
+      </a:accent3>
+      <a:accent4>
+        <a:srgbClr val="0F9ED5"/>
+      </a:accent4>
+      <a:accent5>
+        <a:srgbClr val="A02B93"/>
+      </a:accent5>
+      <a:accent6>
+        <a:srgbClr val="4EA72E"/>
+      </a:accent6>
+      <a:hlink>
+        <a:srgbClr val="467886"/>
+      </a:hlink>
+      <a:folHlink>
+        <a:srgbClr val="96607D"/>
+      </a:folHlink>
+    </a:clrScheme>
+    <a:fontScheme name="Office">
+      <a:majorFont>
+        <a:latin typeface="Aptos Display" panose="02110004020202020204"/>
+        <a:ea typeface=""/>
+        <a:cs typeface=""/>
+        <a:font script="Jpan" typeface="游ゴシック Light"/>
+        <a:font script="Hang" typeface="맑은 고딕"/>
+        <a:font script="Hans" typeface="等线 Light"/>
+        <a:font script="Hant" typeface="新細明體"/>
+        <a:font script="Arab" typeface="Times New Roman"/>
+        <a:font script="Hebr" typeface="Times New Roman"/>
+        <a:font script="Thai" typeface="Angsana New"/>
+        <a:font script="Ethi" typeface="Nyala"/>
+        <a:font script="Beng" typeface="Vrinda"/>
+        <a:font script="Gujr" typeface="Shruti"/>
+        <a:font script="Khmr" typeface="MoolBoran"/>
+        <a:font script="Knda" typeface="Tunga"/>
+        <a:font script="Guru" typeface="Raavi"/>
+        <a:font script="Cans" typeface="Euphemia"/>
+        <a:font script="Cher" typeface="Plantagenet Cherokee"/>
+        <a:font script="Yiii" typeface="Microsoft Yi Baiti"/>
+        <a:font script="Tibt" typeface="Microsoft Himalaya"/>
+        <a:font script="Thaa" typeface="MV Boli"/>
+        <a:font script="Deva" typeface="Mangal"/>
+        <a:font script="Telu" typeface="Gautami"/>
+        <a:font script="Taml" typeface="Latha"/>
+        <a:font script="Syrc" typeface="Estrangelo Edessa"/>
+        <a:font script="Orya" typeface="Kalinga"/>
+        <a:font script="Mlym" typeface="Kartika"/>
+        <a:font script="Laoo" typeface="DokChampa"/>
+        <a:font script="Sinh" typeface="Iskoola Pota"/>
+        <a:font script="Mong" typeface="Mongolian Baiti"/>
+        <a:font script="Viet" typeface="Times New Roman"/>
+        <a:font script="Uigh" typeface="Microsoft Uighur"/>
+        <a:font script="Geor" typeface="Sylfaen"/>
+        <a:font script="Armn" typeface="Arial"/>
+        <a:font script="Bugi" typeface="Leelawadee UI"/>
+        <a:font script="Bopo" typeface="Microsoft JhengHei"/>
+        <a:font script="Java" typeface="Javanese Text"/>
+        <a:font script="Lisu" typeface="Segoe UI"/>
+        <a:font script="Mymr" typeface="Myanmar Text"/>
+        <a:font script="Nkoo" typeface="Ebrima"/>
+        <a:font script="Olck" typeface="Nirmala UI"/>
+        <a:font script="Osma" typeface="Ebrima"/>
+        <a:font script="Phag" typeface="Phagspa"/>
+        <a:font script="Syrn" typeface="Estrangelo Edessa"/>
+        <a:font script="Syrj" typeface="Estrangelo Edessa"/>
+        <a:font script="Syre" typeface="Estrangelo Edessa"/>
+        <a:font script="Sora" typeface="Nirmala UI"/>
+        <a:font script="Tale" typeface="Microsoft Tai Le"/>
+        <a:font script="Talu" typeface="Microsoft New Tai Lue"/>
+        <a:font script="Tfng" typeface="Ebrima"/>
+      </a:majorFont>
+      <a:minorFont>
+        <a:latin typeface="Aptos" panose="02110004020202020204"/>
+        <a:ea typeface=""/>
+        <a:cs typeface=""/>
+        <a:font script="Jpan" typeface="游ゴシック"/>
+        <a:font script="Hang" typeface="맑은 고딕"/>
+        <a:font script="Hans" typeface="等线"/>
+        <a:font script="Hant" typeface="新細明體"/>
+        <a:font script="Arab" typeface="Arial"/>
+        <a:font script="Hebr" typeface="Arial"/>
+        <a:font script="Thai" typeface="Cordia New"/>
+        <a:font script="Ethi" typeface="Nyala"/>
+        <a:font script="Beng" typeface="Vrinda"/>
+        <a:font script="Gujr" typeface="Shruti"/>
+        <a:font script="Khmr" typeface="DaunPenh"/>
+        <a:font script="Knda" typeface="Tunga"/>
+        <a:font script="Guru" typeface="Raavi"/>
+        <a:font script="Cans" typeface="Euphemia"/>
+        <a:font script="Cher" typeface="Plantagenet Cherokee"/>
+        <a:font script="Yiii" typeface="Microsoft Yi Baiti"/>
+        <a:font script="Tibt" typeface="Microsoft Himalaya"/>
+        <a:font script="Thaa" typeface="MV Boli"/>
+        <a:font script="Deva" typeface="Mangal"/>
+        <a:font script="Telu" typeface="Gautami"/>
+        <a:font script="Taml" typeface="Latha"/>
+        <a:font script="Syrc" typeface="Estrangelo Edessa"/>
+        <a:font script="Orya" typeface="Kalinga"/>
+        <a:font script="Mlym" typeface="Kartika"/>
+        <a:font script="Laoo" typeface="DokChampa"/>
+        <a:font script="Sinh" typeface="Iskoola Pota"/>
+        <a:font script="Mong" typeface="Mongolian Baiti"/>
+        <a:font script="Viet" typeface="Arial"/>
+        <a:font script="Uigh" typeface="Microsoft Uighur"/>
+        <a:font script="Geor" typeface="Sylfaen"/>
+        <a:font script="Armn" typeface="Arial"/>
+        <a:font script="Bugi" typeface="Leelawadee UI"/>
+        <a:font script="Bopo" typeface="Microsoft JhengHei"/>
+        <a:font script="Java" typeface="Javanese Text"/>
+        <a:font script="Lisu" typeface="Segoe UI"/>
+        <a:font script="Mymr" typeface="Myanmar Text"/>
+        <a:font script="Nkoo" typeface="Ebrima"/>
+        <a:font script="Olck" typeface="Nirmala UI"/>
+        <a:font script="Osma" typeface="Ebrima"/>
+        <a:font script="Phag" typeface="Phagspa"/>
+        <a:font script="Syrn" typeface="Estrangelo Edessa"/>
+        <a:font script="Syrj" typeface="Estrangelo Edessa"/>
+        <a:font script="Syre" typeface="Estrangelo Edessa"/>
+        <a:font script="Sora" typeface="Nirmala UI"/>
+        <a:font script="Tale" typeface="Microsoft Tai Le"/>
+        <a:font script="Talu" typeface="Microsoft New Tai Lue"/>
+        <a:font script="Tfng" typeface="Ebrima"/>
+      </a:minorFont>
+    </a:fontScheme>
+    <a:fmtScheme name="Office">
+      <a:fillStyleLst>
+        <a:solidFill>
+          <a:schemeClr val="phClr"/>
+        </a:solidFill>
+        <a:gradFill rotWithShape="1">
+          <a:gsLst>
+            <a:gs pos="0">
+              <a:schemeClr val="phClr">
+                <a:lumMod val="110000"/>
+                <a:satMod val="105000"/>
+                <a:tint val="67000"/>
+              </a:schemeClr>
+            </a:gs>
+            <a:gs pos="50000">
+              <a:schemeClr val="phClr">
+                <a:lumMod val="105000"/>
+                <a:satMod val="103000"/>
+                <a:tint val="73000"/>
+              </a:schemeClr>
+            </a:gs>
+            <a:gs pos="100000">
+              <a:schemeClr val="phClr">
+                <a:lumMod val="105000"/>
+                <a:satMod val="109000"/>
+                <a:tint val="81000"/>
+              </a:schemeClr>
+            </a:gs>
+          </a:gsLst>
+          <a:lin ang="5400000" scaled="0"/>
+        </a:gradFill>
+        <a:gradFill rotWithShape="1">
+          <a:gsLst>
+            <a:gs pos="0">
+              <a:schemeClr val="phClr">
+                <a:satMod val="103000"/>
+                <a:lumMod val="102000"/>
+                <a:tint val="94000"/>
+              </a:schemeClr>
+            </a:gs>
+            <a:gs pos="50000">
+              <a:schemeClr val="phClr">
+                <a:satMod val="110000"/>
+                <a:lumMod val="100000"/>
+                <a:shade val="100000"/>
+              </a:schemeClr>
+            </a:gs>
+            <a:gs pos="100000">
+              <a:schemeClr val="phClr">
+                <a:lumMod val="99000"/>
+                <a:satMod val="120000"/>
+                <a:shade val="78000"/>
+              </a:schemeClr>
+            </a:gs>
+          </a:gsLst>
+          <a:lin ang="5400000" scaled="0"/>
+        </a:gradFill>
+      </a:fillStyleLst>
+      <a:lnStyleLst>
+        <a:ln w="12700" cap="flat" cmpd="sng" algn="ctr">
+          <a:solidFill>
+            <a:schemeClr val="phClr"/>
+          </a:solidFill>
+          <a:prstDash val="solid"/>
+          <a:miter lim="800000"/>
+        </a:ln>
+        <a:ln w="19050" cap="flat" cmpd="sng" algn="ctr">
+          <a:solidFill>
+            <a:schemeClr val="phClr"/>
+          </a:solidFill>
+          <a:prstDash val="solid"/>
+          <a:miter lim="800000"/>
+        </a:ln>
+        <a:ln w="25400" cap="flat" cmpd="sng" algn="ctr">
+          <a:solidFill>
+            <a:schemeClr val="phClr"/>
+          </a:solidFill>
+          <a:prstDash val="solid"/>
+          <a:miter lim="800000"/>
+        </a:ln>
+      </a:lnStyleLst>
+      <a:effectStyleLst>
+        <a:effectStyle>
+          <a:effectLst/>
+        </a:effectStyle>
+        <a:effectStyle>
+          <a:effectLst/>
+        </a:effectStyle>
+        <a:effectStyle>
+          <a:effectLst>
+            <a:outerShdw blurRad="57150" dist="19050" dir="5400000" algn="ctr" rotWithShape="0">
+              <a:srgbClr val="000000">
+                <a:alpha val="63000"/>
+              </a:srgbClr>
+            </a:outerShdw>
+          </a:effectLst>
+        </a:effectStyle>
+      </a:effectStyleLst>
+      <a:bgFillStyleLst>
+        <a:solidFill>
+          <a:schemeClr val="phClr"/>
+        </a:solidFill>
+        <a:solidFill>
+          <a:schemeClr val="phClr">
+            <a:tint val="95000"/>
+            <a:satMod val="170000"/>
+          </a:schemeClr>
+        </a:solidFill>
+        <a:gradFill rotWithShape="1">
+          <a:gsLst>
+            <a:gs pos="0">
+              <a:schemeClr val="phClr">
+                <a:tint val="93000"/>
+                <a:satMod val="150000"/>
+                <a:shade val="98000"/>
+                <a:lumMod val="102000"/>
+              </a:schemeClr>
+            </a:gs>
+            <a:gs pos="50000">
+              <a:schemeClr val="phClr">
+                <a:tint val="98000"/>
+                <a:satMod val="130000"/>
+                <a:shade val="90000"/>
+                <a:lumMod val="103000"/>
+              </a:schemeClr>
+            </a:gs>
+            <a:gs pos="100000">
+              <a:schemeClr val="phClr">
+                <a:shade val="63000"/>
+                <a:satMod val="120000"/>
+              </a:schemeClr>
+            </a:gs>
+          </a:gsLst>
+          <a:lin ang="5400000" scaled="0"/>
+        </a:gradFill>
+      </a:bgFillStyleLst>
+    </a:fmtScheme>
+  </a:themeElements>
+  <a:objectDefaults>
+    <a:lnDef>
+      <a:spPr/>
+      <a:bodyPr/>
+      <a:lstStyle/>
+      <a:style>
+        <a:lnRef idx="2">
+          <a:schemeClr val="accent1"/>
+        </a:lnRef>
+        <a:fillRef idx="0">
+          <a:schemeClr val="accent1"/>
+        </a:fillRef>
+        <a:effectRef idx="1">
+          <a:schemeClr val="accent1"/>
+        </a:effectRef>
+        <a:fontRef idx="minor">
+          <a:schemeClr val="tx1"/>
+        </a:fontRef>
+      </a:style>
+    </a:lnDef>
+  </a:objectDefaults>
+  <a:extraClrSchemeLst/>
+  <a:extLst>
+    <a:ext uri="{05A4C25C-085E-4340-85A3-A5531E510DB2}">
+      <thm15:themeFamily xmlns:thm15="http://schemas.microsoft.com/office/thememl/2012/main" name="Office Theme" id="{2E142A2C-CD16-42D6-873A-C26D2A0506FA}" vid="{1BDDFF52-6CD6-40A5-AB3C-68EB2F1E4D0A}"/>
+    </a:ext>
+  </a:extLst>
+</a:theme>
 </file>